--- a/02 Osnove Informacione Bezbednosti/02 Prezentacije/PPTX/00_Osnovne_informacije.pptx
+++ b/02 Osnove Informacione Bezbednosti/02 Prezentacije/PPTX/00_Osnovne_informacije.pptx
@@ -2,32 +2,32 @@
 <file path=ppt/presentation.xml><?xml version="1.0" encoding="utf-8"?>
 <p:presentation xmlns:p="http://schemas.openxmlformats.org/presentationml/2006/main">
   <p:sldMasterIdLst>
-    <p:sldMasterId xmlns:r="http://schemas.openxmlformats.org/officeDocument/2006/relationships" id="2147483648" r:id="R5fc467e6bae9490b"/>
+    <p:sldMasterId xmlns:r="http://schemas.openxmlformats.org/officeDocument/2006/relationships" id="2147483648" r:id="R55864bcb9a8e44b1"/>
   </p:sldMasterIdLst>
   <p:notesMasterIdLst>
-    <p:notesMasterId xmlns:r="http://schemas.openxmlformats.org/officeDocument/2006/relationships" r:id="R21960c57327e46a3"/>
+    <p:notesMasterId xmlns:r="http://schemas.openxmlformats.org/officeDocument/2006/relationships" r:id="R9b2dfbc968a54502"/>
   </p:notesMasterIdLst>
   <p:sldIdLst>
-    <p:sldId xmlns:r="http://schemas.openxmlformats.org/officeDocument/2006/relationships" id="256" r:id="R1f5b821058044fcd"/>
-    <p:sldId xmlns:r="http://schemas.openxmlformats.org/officeDocument/2006/relationships" id="257" r:id="R302797cb87854d87"/>
-    <p:sldId xmlns:r="http://schemas.openxmlformats.org/officeDocument/2006/relationships" id="258" r:id="Rad4cac010a6e4110"/>
-    <p:sldId xmlns:r="http://schemas.openxmlformats.org/officeDocument/2006/relationships" id="259" r:id="R734c51ea648d4e47"/>
-    <p:sldId xmlns:r="http://schemas.openxmlformats.org/officeDocument/2006/relationships" id="260" r:id="Ra65fa925cf814cb3"/>
-    <p:sldId xmlns:r="http://schemas.openxmlformats.org/officeDocument/2006/relationships" id="261" r:id="R6d21dd63f40547fc"/>
-    <p:sldId xmlns:r="http://schemas.openxmlformats.org/officeDocument/2006/relationships" id="262" r:id="R45a9cc8851e4461a"/>
-    <p:sldId xmlns:r="http://schemas.openxmlformats.org/officeDocument/2006/relationships" id="263" r:id="Rd365d9cb44a64a46"/>
-    <p:sldId xmlns:r="http://schemas.openxmlformats.org/officeDocument/2006/relationships" id="264" r:id="R0956b9ff039d4650"/>
-    <p:sldId xmlns:r="http://schemas.openxmlformats.org/officeDocument/2006/relationships" id="265" r:id="R886f71d6991e4911"/>
-    <p:sldId xmlns:r="http://schemas.openxmlformats.org/officeDocument/2006/relationships" id="266" r:id="R4836ddf2edc94659"/>
-    <p:sldId xmlns:r="http://schemas.openxmlformats.org/officeDocument/2006/relationships" id="267" r:id="Reefac2b93c1c4feb"/>
-    <p:sldId xmlns:r="http://schemas.openxmlformats.org/officeDocument/2006/relationships" id="268" r:id="R87197549a67940d9"/>
-    <p:sldId xmlns:r="http://schemas.openxmlformats.org/officeDocument/2006/relationships" id="269" r:id="Rcb938c5c7fca45ac"/>
-    <p:sldId xmlns:r="http://schemas.openxmlformats.org/officeDocument/2006/relationships" id="270" r:id="R87ad8f4401c0431c"/>
-    <p:sldId xmlns:r="http://schemas.openxmlformats.org/officeDocument/2006/relationships" id="271" r:id="R6763c524477841f3"/>
-    <p:sldId xmlns:r="http://schemas.openxmlformats.org/officeDocument/2006/relationships" id="272" r:id="R968e7cacbd054962"/>
-    <p:sldId xmlns:r="http://schemas.openxmlformats.org/officeDocument/2006/relationships" id="273" r:id="R37ff372089b74089"/>
-    <p:sldId xmlns:r="http://schemas.openxmlformats.org/officeDocument/2006/relationships" id="274" r:id="Rebf1112d7be04a02"/>
-    <p:sldId xmlns:r="http://schemas.openxmlformats.org/officeDocument/2006/relationships" id="275" r:id="R4a1626f2ae304cf7"/>
+    <p:sldId xmlns:r="http://schemas.openxmlformats.org/officeDocument/2006/relationships" id="256" r:id="R0509dc1c3ae043bc"/>
+    <p:sldId xmlns:r="http://schemas.openxmlformats.org/officeDocument/2006/relationships" id="257" r:id="Ra088c258524d4518"/>
+    <p:sldId xmlns:r="http://schemas.openxmlformats.org/officeDocument/2006/relationships" id="258" r:id="R9a090b87d0b34050"/>
+    <p:sldId xmlns:r="http://schemas.openxmlformats.org/officeDocument/2006/relationships" id="259" r:id="Rdca74eb0863e4c58"/>
+    <p:sldId xmlns:r="http://schemas.openxmlformats.org/officeDocument/2006/relationships" id="260" r:id="Rbc276ee21dc043cf"/>
+    <p:sldId xmlns:r="http://schemas.openxmlformats.org/officeDocument/2006/relationships" id="261" r:id="Rd1dac7fd022943ae"/>
+    <p:sldId xmlns:r="http://schemas.openxmlformats.org/officeDocument/2006/relationships" id="262" r:id="R2f1de67b155b4cd8"/>
+    <p:sldId xmlns:r="http://schemas.openxmlformats.org/officeDocument/2006/relationships" id="263" r:id="R023e1cac617640f9"/>
+    <p:sldId xmlns:r="http://schemas.openxmlformats.org/officeDocument/2006/relationships" id="264" r:id="R23d59d3c693943bc"/>
+    <p:sldId xmlns:r="http://schemas.openxmlformats.org/officeDocument/2006/relationships" id="265" r:id="R45b3f80d498245c7"/>
+    <p:sldId xmlns:r="http://schemas.openxmlformats.org/officeDocument/2006/relationships" id="266" r:id="R6e4752a53d264ac9"/>
+    <p:sldId xmlns:r="http://schemas.openxmlformats.org/officeDocument/2006/relationships" id="267" r:id="R01d3be826ec24e97"/>
+    <p:sldId xmlns:r="http://schemas.openxmlformats.org/officeDocument/2006/relationships" id="268" r:id="Re804c1c112c34c78"/>
+    <p:sldId xmlns:r="http://schemas.openxmlformats.org/officeDocument/2006/relationships" id="269" r:id="R7eed0e2909104223"/>
+    <p:sldId xmlns:r="http://schemas.openxmlformats.org/officeDocument/2006/relationships" id="270" r:id="Rc98e57076415406d"/>
+    <p:sldId xmlns:r="http://schemas.openxmlformats.org/officeDocument/2006/relationships" id="271" r:id="R05e29e6b756047ea"/>
+    <p:sldId xmlns:r="http://schemas.openxmlformats.org/officeDocument/2006/relationships" id="272" r:id="Rd5f2db4b17bf4840"/>
+    <p:sldId xmlns:r="http://schemas.openxmlformats.org/officeDocument/2006/relationships" id="273" r:id="Rb1116aa51ae14a56"/>
+    <p:sldId xmlns:r="http://schemas.openxmlformats.org/officeDocument/2006/relationships" id="274" r:id="R8cd804fd8e024c25"/>
+    <p:sldId xmlns:r="http://schemas.openxmlformats.org/officeDocument/2006/relationships" id="275" r:id="Rc3966107cb53417b"/>
   </p:sldIdLst>
   <p:sldSz cx="12192000" cy="6858000"/>
   <p:notesSz cx="6858000" cy="9144000"/>
@@ -1868,7 +1868,7 @@
   </p:cSld>
   <p:clrMap bg1="lt1" tx1="dk1" bg2="lt2" tx2="dk2" accent1="accent1" accent2="accent2" accent3="accent3" accent4="accent4" accent5="accent5" accent6="accent6" hlink="hlink" folHlink="folHlink"/>
   <p:sldLayoutIdLst>
-    <p:sldLayoutId xmlns:r="http://schemas.openxmlformats.org/officeDocument/2006/relationships" id="2147483649" r:id="Rf8797d342fa947c0"/>
+    <p:sldLayoutId xmlns:r="http://schemas.openxmlformats.org/officeDocument/2006/relationships" id="2147483649" r:id="R045d13e3684e482a"/>
   </p:sldLayoutIdLst>
   <p:txStyles>
     <p:titleStyle>
@@ -2509,7 +2509,7 @@
           <a:noFill xmlns:a="http://schemas.openxmlformats.org/drawingml/2006/main"/>
           <a:ln xmlns:a="http://schemas.openxmlformats.org/drawingml/2006/main" w="8573">
             <a:solidFill>
-              <a:srgbClr val="7F8B9B"/>
+              <a:srgbClr val="8D5560"/>
             </a:solidFill>
             <a:prstDash val="solid"/>
           </a:ln>
@@ -2540,7 +2540,7 @@
             </a:avLst>
           </a:prstGeom>
           <a:solidFill xmlns:a="http://schemas.openxmlformats.org/drawingml/2006/main">
-            <a:srgbClr val="315CF4"/>
+            <a:srgbClr val="7A2636"/>
           </a:solidFill>
           <a:ln xmlns:a="http://schemas.openxmlformats.org/drawingml/2006/main" w="0">
             <a:noFill/>
@@ -2722,7 +2722,7 @@
         </p:spPr>
         <p:txBody>
           <a:bodyPr xmlns:a="http://schemas.openxmlformats.org/drawingml/2006/main" wrap="square" lIns="0" tIns="0" rIns="0" bIns="0" anchor="ctr">
-            <a:normAutofit/>
+            <a:normAutofit fontScale="100000"/>
           </a:bodyPr>
           <a:lstStyle xmlns:a="http://schemas.openxmlformats.org/drawingml/2006/main"/>
           <a:p xmlns:a="http://schemas.openxmlformats.org/drawingml/2006/main">
@@ -2749,7 +2749,7 @@
                 <a:ea typeface="Aptos"/>
                 <a:cs typeface="Aptos"/>
               </a:rPr>
-              <a:t>Начин рада, правила полагања и ток практичних вежби</a:t>
+              <a:t>Организација наставе, начини полагања и пројектне обавезе</a:t>
             </a:r>
           </a:p>
         </p:txBody>
@@ -2777,9 +2777,9 @@
             <a:avLst/>
           </a:prstGeom>
           <a:noFill xmlns:a="http://schemas.openxmlformats.org/drawingml/2006/main"/>
-          <a:ln xmlns:a="http://schemas.openxmlformats.org/drawingml/2006/main" w="9525">
+          <a:ln xmlns:a="http://schemas.openxmlformats.org/drawingml/2006/main" w="8573">
             <a:solidFill>
-              <a:srgbClr val="CBD5E1"/>
+              <a:srgbClr val="8D5560"/>
             </a:solidFill>
             <a:prstDash val="solid"/>
           </a:ln>
@@ -2802,7 +2802,7 @@
         <p:spPr>
           <a:xfrm xmlns:a="http://schemas.openxmlformats.org/drawingml/2006/main">
             <a:off x="914400" y="5581650"/>
-            <a:ext cx="4000500" cy="247650"/>
+            <a:ext cx="6191250" cy="247650"/>
           </a:xfrm>
           <a:prstGeom xmlns:a="http://schemas.openxmlformats.org/drawingml/2006/main" prst="rect">
             <a:avLst/>
@@ -2814,7 +2814,7 @@
         </p:spPr>
         <p:txBody>
           <a:bodyPr xmlns:a="http://schemas.openxmlformats.org/drawingml/2006/main" wrap="square" lIns="0" tIns="0" rIns="0" bIns="0" anchor="t">
-            <a:normAutofit/>
+            <a:normAutofit fontScale="100000"/>
           </a:bodyPr>
           <a:lstStyle xmlns:a="http://schemas.openxmlformats.org/drawingml/2006/main"/>
           <a:p xmlns:a="http://schemas.openxmlformats.org/drawingml/2006/main">
@@ -2833,7 +2833,7 @@
               </a:defRPr>
             </a:pPr>
             <a:r>
-              <a:rPr sz="1200" b="1">
+              <a:rPr sz="1125" b="0">
                 <a:solidFill>
                   <a:srgbClr val="1A202C"/>
                 </a:solidFill>
@@ -2841,7 +2841,7 @@
                 <a:ea typeface="Aptos"/>
                 <a:cs typeface="Aptos"/>
               </a:rPr>
-              <a:t>ОИБ · 5. семестар</a:t>
+              <a:t>Факултет техничких наука · Универзитет у Новом Саду</a:t>
             </a:r>
           </a:p>
         </p:txBody>
@@ -2875,7 +2875,7 @@
         </p:spPr>
         <p:txBody>
           <a:bodyPr xmlns:a="http://schemas.openxmlformats.org/drawingml/2006/main" wrap="square" lIns="0" tIns="0" rIns="0" bIns="0" anchor="t">
-            <a:normAutofit/>
+            <a:normAutofit fontScale="100000"/>
           </a:bodyPr>
           <a:lstStyle xmlns:a="http://schemas.openxmlformats.org/drawingml/2006/main"/>
           <a:p xmlns:a="http://schemas.openxmlformats.org/drawingml/2006/main">
@@ -2902,7 +2902,7 @@
                 <a:ea typeface="Aptos"/>
                 <a:cs typeface="Aptos"/>
               </a:rPr>
-              <a:t>Академска 2026/27</a:t>
+              <a:t>Академска 2026/27.</a:t>
             </a:r>
           </a:p>
         </p:txBody>
@@ -2965,7 +2965,7 @@
         </p:spPr>
         <p:txBody>
           <a:bodyPr xmlns:a="http://schemas.openxmlformats.org/drawingml/2006/main" wrap="square" lIns="0" tIns="0" rIns="0" bIns="0" anchor="t">
-            <a:normAutofit/>
+            <a:normAutofit fontScale="100000"/>
           </a:bodyPr>
           <a:lstStyle xmlns:a="http://schemas.openxmlformats.org/drawingml/2006/main"/>
           <a:p xmlns:a="http://schemas.openxmlformats.org/drawingml/2006/main">
@@ -2986,7 +2986,7 @@
             <a:r>
               <a:rPr sz="825" b="0">
                 <a:solidFill>
-                  <a:srgbClr val="657184"/>
+                  <a:srgbClr val="5E6B7D"/>
                 </a:solidFill>
                 <a:latin typeface="Aptos"/>
                 <a:ea typeface="Aptos"/>
@@ -3019,10 +3019,12 @@
           <a:prstGeom xmlns:a="http://schemas.openxmlformats.org/drawingml/2006/main" prst="line">
             <a:avLst/>
           </a:prstGeom>
-          <a:noFill xmlns:a="http://schemas.openxmlformats.org/drawingml/2006/main"/>
-          <a:ln xmlns:a="http://schemas.openxmlformats.org/drawingml/2006/main" w="9525">
+          <a:solidFill xmlns:a="http://schemas.openxmlformats.org/drawingml/2006/main">
+            <a:srgbClr val="8D5560"/>
+          </a:solidFill>
+          <a:ln xmlns:a="http://schemas.openxmlformats.org/drawingml/2006/main" w="7144">
             <a:solidFill>
-              <a:srgbClr val="748092"/>
+              <a:srgbClr val="8D5560"/>
             </a:solidFill>
             <a:prstDash val="solid"/>
           </a:ln>
@@ -3118,7 +3120,7 @@
         </p:spPr>
         <p:txBody>
           <a:bodyPr xmlns:a="http://schemas.openxmlformats.org/drawingml/2006/main" wrap="square" lIns="0" tIns="0" rIns="0" bIns="0" anchor="t">
-            <a:normAutofit/>
+            <a:normAutofit fontScale="100000"/>
           </a:bodyPr>
           <a:lstStyle xmlns:a="http://schemas.openxmlformats.org/drawingml/2006/main"/>
           <a:p xmlns:a="http://schemas.openxmlformats.org/drawingml/2006/main">
@@ -3145,7 +3147,7 @@
                 <a:ea typeface="Aptos Display"/>
                 <a:cs typeface="Aptos Display"/>
               </a:rPr>
-              <a:t>Присуство, интегритет и безбедан рад су обавезни</a:t>
+              <a:t>Обавезе студената и правила безбедног рада</a:t>
             </a:r>
           </a:p>
         </p:txBody>
@@ -3179,7 +3181,7 @@
         </p:spPr>
         <p:txBody>
           <a:bodyPr xmlns:a="http://schemas.openxmlformats.org/drawingml/2006/main" wrap="square" lIns="0" tIns="0" rIns="0" bIns="0" anchor="t">
-            <a:normAutofit/>
+            <a:normAutofit fontScale="100000"/>
           </a:bodyPr>
           <a:lstStyle xmlns:a="http://schemas.openxmlformats.org/drawingml/2006/main"/>
           <a:p xmlns:a="http://schemas.openxmlformats.org/drawingml/2006/main">
@@ -3206,216 +3208,7 @@
                 <a:ea typeface="Aptos"/>
                 <a:cs typeface="Aptos"/>
               </a:rPr>
-              <a:t>Правила</a:t>
-            </a:r>
-            <a:r>
-              <a:rPr sz="1575" b="0">
-                <a:solidFill>
-                  <a:srgbClr val="657184"/>
-                </a:solidFill>
-                <a:latin typeface="Aptos"/>
-                <a:ea typeface="Aptos"/>
-                <a:cs typeface="Aptos"/>
-              </a:rPr>
-              <a:t> </a:t>
-            </a:r>
-            <a:r>
-              <a:rPr sz="1575" b="0">
-                <a:solidFill>
-                  <a:srgbClr val="657184"/>
-                </a:solidFill>
-                <a:latin typeface="Aptos"/>
-                <a:ea typeface="Aptos"/>
-                <a:cs typeface="Aptos"/>
-              </a:rPr>
-              <a:t>штите</a:t>
-            </a:r>
-            <a:r>
-              <a:rPr sz="1575" b="0">
-                <a:solidFill>
-                  <a:srgbClr val="657184"/>
-                </a:solidFill>
-                <a:latin typeface="Aptos"/>
-                <a:ea typeface="Aptos"/>
-                <a:cs typeface="Aptos"/>
-              </a:rPr>
-              <a:t> </a:t>
-            </a:r>
-            <a:r>
-              <a:rPr sz="1575" b="0">
-                <a:solidFill>
-                  <a:srgbClr val="657184"/>
-                </a:solidFill>
-                <a:latin typeface="Aptos"/>
-                <a:ea typeface="Aptos"/>
-                <a:cs typeface="Aptos"/>
-              </a:rPr>
-              <a:t>и</a:t>
-            </a:r>
-            <a:r>
-              <a:rPr sz="1575" b="0">
-                <a:solidFill>
-                  <a:srgbClr val="657184"/>
-                </a:solidFill>
-                <a:latin typeface="Aptos"/>
-                <a:ea typeface="Aptos"/>
-                <a:cs typeface="Aptos"/>
-              </a:rPr>
-              <a:t> </a:t>
-            </a:r>
-            <a:r>
-              <a:rPr sz="1575" b="0">
-                <a:solidFill>
-                  <a:srgbClr val="657184"/>
-                </a:solidFill>
-                <a:latin typeface="Aptos"/>
-                <a:ea typeface="Aptos"/>
-                <a:cs typeface="Aptos"/>
-              </a:rPr>
-              <a:t>квалитет</a:t>
-            </a:r>
-            <a:r>
-              <a:rPr sz="1575" b="0">
-                <a:solidFill>
-                  <a:srgbClr val="657184"/>
-                </a:solidFill>
-                <a:latin typeface="Aptos"/>
-                <a:ea typeface="Aptos"/>
-                <a:cs typeface="Aptos"/>
-              </a:rPr>
-              <a:t> </a:t>
-            </a:r>
-            <a:r>
-              <a:rPr sz="1575" b="0">
-                <a:solidFill>
-                  <a:srgbClr val="657184"/>
-                </a:solidFill>
-                <a:latin typeface="Aptos"/>
-                <a:ea typeface="Aptos"/>
-                <a:cs typeface="Aptos"/>
-              </a:rPr>
-              <a:t>наставе</a:t>
-            </a:r>
-            <a:r>
-              <a:rPr sz="1575" b="0">
-                <a:solidFill>
-                  <a:srgbClr val="657184"/>
-                </a:solidFill>
-                <a:latin typeface="Aptos"/>
-                <a:ea typeface="Aptos"/>
-                <a:cs typeface="Aptos"/>
-              </a:rPr>
-              <a:t> </a:t>
-            </a:r>
-            <a:r>
-              <a:rPr sz="1575" b="0">
-                <a:solidFill>
-                  <a:srgbClr val="657184"/>
-                </a:solidFill>
-                <a:latin typeface="Aptos"/>
-                <a:ea typeface="Aptos"/>
-                <a:cs typeface="Aptos"/>
-              </a:rPr>
-              <a:t>и</a:t>
-            </a:r>
-            <a:r>
-              <a:rPr sz="1575" b="0">
-                <a:solidFill>
-                  <a:srgbClr val="657184"/>
-                </a:solidFill>
-                <a:latin typeface="Aptos"/>
-                <a:ea typeface="Aptos"/>
-                <a:cs typeface="Aptos"/>
-              </a:rPr>
-              <a:t> </a:t>
-            </a:r>
-            <a:r>
-              <a:rPr sz="1575" b="0">
-                <a:solidFill>
-                  <a:srgbClr val="657184"/>
-                </a:solidFill>
-                <a:latin typeface="Aptos"/>
-                <a:ea typeface="Aptos"/>
-                <a:cs typeface="Aptos"/>
-              </a:rPr>
-              <a:t>системе</a:t>
-            </a:r>
-            <a:r>
-              <a:rPr sz="1575" b="0">
-                <a:solidFill>
-                  <a:srgbClr val="657184"/>
-                </a:solidFill>
-                <a:latin typeface="Aptos"/>
-                <a:ea typeface="Aptos"/>
-                <a:cs typeface="Aptos"/>
-              </a:rPr>
-              <a:t> </a:t>
-            </a:r>
-            <a:r>
-              <a:rPr sz="1575" b="0">
-                <a:solidFill>
-                  <a:srgbClr val="657184"/>
-                </a:solidFill>
-                <a:latin typeface="Aptos"/>
-                <a:ea typeface="Aptos"/>
-                <a:cs typeface="Aptos"/>
-              </a:rPr>
-              <a:t>ван</a:t>
-            </a:r>
-            <a:r>
-              <a:rPr sz="1575" b="0">
-                <a:solidFill>
-                  <a:srgbClr val="657184"/>
-                </a:solidFill>
-                <a:latin typeface="Aptos"/>
-                <a:ea typeface="Aptos"/>
-                <a:cs typeface="Aptos"/>
-              </a:rPr>
-              <a:t> </a:t>
-            </a:r>
-            <a:r>
-              <a:rPr sz="1575" b="0">
-                <a:solidFill>
-                  <a:srgbClr val="657184"/>
-                </a:solidFill>
-                <a:latin typeface="Aptos"/>
-                <a:ea typeface="Aptos"/>
-                <a:cs typeface="Aptos"/>
-              </a:rPr>
-              <a:t>контролисаног</a:t>
-            </a:r>
-            <a:r>
-              <a:rPr sz="1575" b="0">
-                <a:solidFill>
-                  <a:srgbClr val="657184"/>
-                </a:solidFill>
-                <a:latin typeface="Aptos"/>
-                <a:ea typeface="Aptos"/>
-                <a:cs typeface="Aptos"/>
-              </a:rPr>
-              <a:t> </a:t>
-            </a:r>
-            <a:r>
-              <a:rPr sz="1575" b="0">
-                <a:solidFill>
-                  <a:srgbClr val="657184"/>
-                </a:solidFill>
-                <a:latin typeface="Aptos"/>
-                <a:ea typeface="Aptos"/>
-                <a:cs typeface="Aptos"/>
-              </a:rPr>
-              <a:t>окружења</a:t>
-            </a:r>
-            <a:r>
-              <a:rPr sz="1575" b="0">
-                <a:solidFill>
-                  <a:srgbClr val="657184"/>
-                </a:solidFill>
-                <a:latin typeface="Aptos"/>
-                <a:ea typeface="Aptos"/>
-                <a:cs typeface="Aptos"/>
-              </a:rPr>
-              <a:t>.</a:t>
+              <a:t>Правила присуства, академског интегритета и контролисаног тестирања примењују се током целог семестра.</a:t>
             </a:r>
           </a:p>
         </p:txBody>
@@ -3445,7 +3238,7 @@
             </a:avLst>
           </a:prstGeom>
           <a:solidFill xmlns:a="http://schemas.openxmlformats.org/drawingml/2006/main">
-            <a:srgbClr val="EEF3FF"/>
+            <a:srgbClr val="F7EFF1"/>
           </a:solidFill>
           <a:ln xmlns:a="http://schemas.openxmlformats.org/drawingml/2006/main" w="9525">
             <a:solidFill>
@@ -3511,7 +3304,7 @@
             <a:r>
               <a:rPr sz="1275" b="1">
                 <a:solidFill>
-                  <a:srgbClr val="2F5EF5"/>
+                  <a:srgbClr val="7A2636"/>
                 </a:solidFill>
                 <a:latin typeface="Aptos"/>
                 <a:ea typeface="Aptos"/>
@@ -4117,11 +3910,11 @@
             </a:avLst>
           </a:prstGeom>
           <a:solidFill xmlns:a="http://schemas.openxmlformats.org/drawingml/2006/main">
-            <a:srgbClr val="EEF3FF"/>
+            <a:srgbClr val="F7EFF1"/>
           </a:solidFill>
           <a:ln xmlns:a="http://schemas.openxmlformats.org/drawingml/2006/main" w="8573">
             <a:solidFill>
-              <a:srgbClr val="CAD7F2"/>
+              <a:srgbClr val="DBC7CC"/>
             </a:solidFill>
             <a:prstDash val="solid"/>
           </a:ln>
@@ -4152,7 +3945,7 @@
             </a:avLst>
           </a:prstGeom>
           <a:solidFill xmlns:a="http://schemas.openxmlformats.org/drawingml/2006/main">
-            <a:srgbClr val="2F5EF5"/>
+            <a:srgbClr val="7A2636"/>
           </a:solidFill>
           <a:ln xmlns:a="http://schemas.openxmlformats.org/drawingml/2006/main" w="0">
             <a:noFill/>
@@ -4193,6 +3986,7 @@
           <a:lstStyle xmlns:a="http://schemas.openxmlformats.org/drawingml/2006/main"/>
           <a:p xmlns:a="http://schemas.openxmlformats.org/drawingml/2006/main">
             <a:pPr>
+              <a:buNone/>
               <a:defRPr sz="1200" b="1">
                 <a:solidFill>
                   <a:srgbClr val="2F5EF5"/>
@@ -4205,7 +3999,7 @@
             <a:r>
               <a:rPr sz="1200" b="1">
                 <a:solidFill>
-                  <a:srgbClr val="2F5EF5"/>
+                  <a:srgbClr val="7A2636"/>
                 </a:solidFill>
                 <a:latin typeface="Aptos"/>
                 <a:ea typeface="Aptos"/>
@@ -4250,6 +4044,7 @@
           <a:lstStyle xmlns:a="http://schemas.openxmlformats.org/drawingml/2006/main"/>
           <a:p xmlns:a="http://schemas.openxmlformats.org/drawingml/2006/main">
             <a:pPr>
+              <a:buNone/>
               <a:defRPr sz="1388" b="1">
                 <a:solidFill>
                   <a:srgbClr val="1B2432"/>
@@ -4331,7 +4126,7 @@
         </p:spPr>
         <p:txBody>
           <a:bodyPr xmlns:a="http://schemas.openxmlformats.org/drawingml/2006/main" wrap="square" lIns="0" tIns="0" rIns="0" bIns="0" anchor="t">
-            <a:normAutofit/>
+            <a:normAutofit fontScale="100000"/>
           </a:bodyPr>
           <a:lstStyle xmlns:a="http://schemas.openxmlformats.org/drawingml/2006/main"/>
           <a:p xmlns:a="http://schemas.openxmlformats.org/drawingml/2006/main">
@@ -4352,7 +4147,7 @@
             <a:r>
               <a:rPr sz="825" b="0">
                 <a:solidFill>
-                  <a:srgbClr val="657184"/>
+                  <a:srgbClr val="5E6B7D"/>
                 </a:solidFill>
                 <a:latin typeface="Aptos"/>
                 <a:ea typeface="Aptos"/>
@@ -4385,10 +4180,12 @@
           <a:prstGeom xmlns:a="http://schemas.openxmlformats.org/drawingml/2006/main" prst="line">
             <a:avLst/>
           </a:prstGeom>
-          <a:noFill xmlns:a="http://schemas.openxmlformats.org/drawingml/2006/main"/>
-          <a:ln xmlns:a="http://schemas.openxmlformats.org/drawingml/2006/main" w="9525">
+          <a:solidFill xmlns:a="http://schemas.openxmlformats.org/drawingml/2006/main">
+            <a:srgbClr val="8D5560"/>
+          </a:solidFill>
+          <a:ln xmlns:a="http://schemas.openxmlformats.org/drawingml/2006/main" w="7144">
             <a:solidFill>
-              <a:srgbClr val="748092"/>
+              <a:srgbClr val="8D5560"/>
             </a:solidFill>
             <a:prstDash val="solid"/>
           </a:ln>
@@ -4484,7 +4281,7 @@
         </p:spPr>
         <p:txBody>
           <a:bodyPr xmlns:a="http://schemas.openxmlformats.org/drawingml/2006/main" wrap="square" lIns="0" tIns="0" rIns="0" bIns="0" anchor="t">
-            <a:normAutofit/>
+            <a:normAutofit fontScale="100000"/>
           </a:bodyPr>
           <a:lstStyle xmlns:a="http://schemas.openxmlformats.org/drawingml/2006/main"/>
           <a:p xmlns:a="http://schemas.openxmlformats.org/drawingml/2006/main">
@@ -4511,7 +4308,7 @@
                 <a:ea typeface="Aptos Display"/>
                 <a:cs typeface="Aptos Display"/>
               </a:rPr>
-              <a:t>Прелазна правила зависе од признатих обавеза</a:t>
+              <a:t>Прелазна правила</a:t>
             </a:r>
           </a:p>
         </p:txBody>
@@ -4545,7 +4342,7 @@
         </p:spPr>
         <p:txBody>
           <a:bodyPr xmlns:a="http://schemas.openxmlformats.org/drawingml/2006/main" wrap="square" lIns="0" tIns="0" rIns="0" bIns="0" anchor="t">
-            <a:normAutofit/>
+            <a:normAutofit fontScale="100000"/>
           </a:bodyPr>
           <a:lstStyle xmlns:a="http://schemas.openxmlformats.org/drawingml/2006/main"/>
           <a:p xmlns:a="http://schemas.openxmlformats.org/drawingml/2006/main">
@@ -4572,7 +4369,7 @@
                 <a:ea typeface="Aptos"/>
                 <a:cs typeface="Aptos"/>
               </a:rPr>
-              <a:t>За раније генерације примењује се актуелни режим, уз конкретна признавања која студент већ има.</a:t>
+              <a:t>Раније генерације примењују актуелни режим полагања уз признавање претходно испуњених обавеза.</a:t>
             </a:r>
           </a:p>
         </p:txBody>
@@ -4887,7 +4684,7 @@
             </a:avLst>
           </a:prstGeom>
           <a:solidFill xmlns:a="http://schemas.openxmlformats.org/drawingml/2006/main">
-            <a:srgbClr val="EEF3FF"/>
+            <a:srgbClr val="F7EFF1"/>
           </a:solidFill>
           <a:ln xmlns:a="http://schemas.openxmlformats.org/drawingml/2006/main" w="9525">
             <a:solidFill>
@@ -4932,7 +4729,7 @@
         </p:spPr>
         <p:txBody>
           <a:bodyPr xmlns:a="http://schemas.openxmlformats.org/drawingml/2006/main" wrap="square" lIns="0" tIns="0" rIns="0" bIns="0" anchor="ctr">
-            <a:normAutofit/>
+            <a:normAutofit fontScale="100000"/>
           </a:bodyPr>
           <a:lstStyle xmlns:a="http://schemas.openxmlformats.org/drawingml/2006/main"/>
           <a:p xmlns:a="http://schemas.openxmlformats.org/drawingml/2006/main">
@@ -4953,7 +4750,7 @@
             <a:r>
               <a:rPr sz="1275" b="1">
                 <a:solidFill>
-                  <a:srgbClr val="2F5EF5"/>
+                  <a:srgbClr val="7A2636"/>
                 </a:solidFill>
                 <a:latin typeface="Aptos"/>
                 <a:ea typeface="Aptos"/>
@@ -5409,7 +5206,7 @@
         </p:spPr>
         <p:txBody>
           <a:bodyPr xmlns:a="http://schemas.openxmlformats.org/drawingml/2006/main" wrap="square" lIns="0" tIns="0" rIns="0" bIns="0" anchor="t">
-            <a:normAutofit/>
+            <a:normAutofit fontScale="100000"/>
           </a:bodyPr>
           <a:lstStyle xmlns:a="http://schemas.openxmlformats.org/drawingml/2006/main"/>
           <a:p xmlns:a="http://schemas.openxmlformats.org/drawingml/2006/main">
@@ -5430,7 +5227,7 @@
             <a:r>
               <a:rPr sz="825" b="0">
                 <a:solidFill>
-                  <a:srgbClr val="657184"/>
+                  <a:srgbClr val="5E6B7D"/>
                 </a:solidFill>
                 <a:latin typeface="Aptos"/>
                 <a:ea typeface="Aptos"/>
@@ -5463,10 +5260,12 @@
           <a:prstGeom xmlns:a="http://schemas.openxmlformats.org/drawingml/2006/main" prst="line">
             <a:avLst/>
           </a:prstGeom>
-          <a:noFill xmlns:a="http://schemas.openxmlformats.org/drawingml/2006/main"/>
-          <a:ln xmlns:a="http://schemas.openxmlformats.org/drawingml/2006/main" w="9525">
+          <a:solidFill xmlns:a="http://schemas.openxmlformats.org/drawingml/2006/main">
+            <a:srgbClr val="8D5560"/>
+          </a:solidFill>
+          <a:ln xmlns:a="http://schemas.openxmlformats.org/drawingml/2006/main" w="7144">
             <a:solidFill>
-              <a:srgbClr val="748092"/>
+              <a:srgbClr val="8D5560"/>
             </a:solidFill>
             <a:prstDash val="solid"/>
           </a:ln>
@@ -5562,7 +5361,7 @@
         </p:spPr>
         <p:txBody>
           <a:bodyPr xmlns:a="http://schemas.openxmlformats.org/drawingml/2006/main" wrap="square" lIns="0" tIns="0" rIns="0" bIns="0" anchor="t">
-            <a:normAutofit/>
+            <a:normAutofit fontScale="100000"/>
           </a:bodyPr>
           <a:lstStyle xmlns:a="http://schemas.openxmlformats.org/drawingml/2006/main"/>
           <a:p xmlns:a="http://schemas.openxmlformats.org/drawingml/2006/main">
@@ -5589,7 +5388,7 @@
                 <a:ea typeface="Aptos Display"/>
                 <a:cs typeface="Aptos Display"/>
               </a:rPr>
-              <a:t>Како користити практикум</a:t>
+              <a:t>Рад са практикумом</a:t>
             </a:r>
           </a:p>
         </p:txBody>
@@ -5623,7 +5422,7 @@
         </p:spPr>
         <p:txBody>
           <a:bodyPr xmlns:a="http://schemas.openxmlformats.org/drawingml/2006/main" wrap="square" lIns="0" tIns="0" rIns="0" bIns="0" anchor="t">
-            <a:normAutofit/>
+            <a:normAutofit fontScale="100000"/>
           </a:bodyPr>
           <a:lstStyle xmlns:a="http://schemas.openxmlformats.org/drawingml/2006/main"/>
           <a:p xmlns:a="http://schemas.openxmlformats.org/drawingml/2006/main">
@@ -5650,7 +5449,7 @@
                 <a:ea typeface="Aptos"/>
                 <a:cs typeface="Aptos"/>
               </a:rPr>
-              <a:t>Циљ није памћење једног примера, већ способност да се принцип пренесе на додељену пројектну целину.</a:t>
+              <a:t>Практикум служи за разумевање принципа и њихову примену на додељену пројектну целину.</a:t>
             </a:r>
           </a:p>
         </p:txBody>
@@ -5746,7 +5545,7 @@
             <a:r>
               <a:rPr sz="1238" b="1">
                 <a:solidFill>
-                  <a:srgbClr val="2F5EF5"/>
+                  <a:srgbClr val="7A2636"/>
                 </a:solidFill>
                 <a:latin typeface="Aptos"/>
                 <a:ea typeface="Aptos"/>
@@ -5847,7 +5646,7 @@
         </p:spPr>
         <p:txBody>
           <a:bodyPr xmlns:a="http://schemas.openxmlformats.org/drawingml/2006/main" wrap="square" lIns="0" tIns="0" rIns="0" bIns="0" anchor="ctr">
-            <a:normAutofit fontScale="83333"/>
+            <a:normAutofit fontScale="96109"/>
           </a:bodyPr>
           <a:lstStyle xmlns:a="http://schemas.openxmlformats.org/drawingml/2006/main"/>
           <a:p xmlns:a="http://schemas.openxmlformats.org/drawingml/2006/main">
@@ -5874,7 +5673,7 @@
                 <a:ea typeface="Aptos"/>
                 <a:cs typeface="Aptos"/>
               </a:rPr>
-              <a:t>прочитај тему и издвој претпоставке</a:t>
+              <a:t>анализа теме и претпоставки</a:t>
             </a:r>
           </a:p>
         </p:txBody>
@@ -5904,7 +5703,7 @@
             </a:avLst>
           </a:prstGeom>
           <a:solidFill xmlns:a="http://schemas.openxmlformats.org/drawingml/2006/main">
-            <a:srgbClr val="EEF3FF"/>
+            <a:srgbClr val="F7EFF1"/>
           </a:solidFill>
           <a:ln xmlns:a="http://schemas.openxmlformats.org/drawingml/2006/main" w="9525">
             <a:solidFill>
@@ -5970,7 +5769,7 @@
             <a:r>
               <a:rPr sz="1238" b="1">
                 <a:solidFill>
-                  <a:srgbClr val="2F5EF5"/>
+                  <a:srgbClr val="7A2636"/>
                 </a:solidFill>
                 <a:latin typeface="Aptos"/>
                 <a:ea typeface="Aptos"/>
@@ -6071,7 +5870,7 @@
         </p:spPr>
         <p:txBody>
           <a:bodyPr xmlns:a="http://schemas.openxmlformats.org/drawingml/2006/main" wrap="square" lIns="0" tIns="0" rIns="0" bIns="0" anchor="ctr">
-            <a:normAutofit fontScale="97044"/>
+            <a:normAutofit fontScale="90321"/>
           </a:bodyPr>
           <a:lstStyle xmlns:a="http://schemas.openxmlformats.org/drawingml/2006/main"/>
           <a:p xmlns:a="http://schemas.openxmlformats.org/drawingml/2006/main">
@@ -6098,7 +5897,7 @@
                 <a:ea typeface="Aptos"/>
                 <a:cs typeface="Aptos"/>
               </a:rPr>
-              <a:t>повежи појам са последицом</a:t>
+              <a:t>повезивање појма и последице</a:t>
             </a:r>
           </a:p>
         </p:txBody>
@@ -6128,7 +5927,7 @@
             </a:avLst>
           </a:prstGeom>
           <a:solidFill xmlns:a="http://schemas.openxmlformats.org/drawingml/2006/main">
-            <a:srgbClr val="F5F0FF"/>
+            <a:srgbClr val="F7F4F5"/>
           </a:solidFill>
           <a:ln xmlns:a="http://schemas.openxmlformats.org/drawingml/2006/main" w="9525">
             <a:solidFill>
@@ -6194,7 +5993,7 @@
             <a:r>
               <a:rPr sz="1238" b="1">
                 <a:solidFill>
-                  <a:srgbClr val="7651D4"/>
+                  <a:srgbClr val="7A2636"/>
                 </a:solidFill>
                 <a:latin typeface="Aptos"/>
                 <a:ea typeface="Aptos"/>
@@ -6295,7 +6094,7 @@
         </p:spPr>
         <p:txBody>
           <a:bodyPr xmlns:a="http://schemas.openxmlformats.org/drawingml/2006/main" wrap="square" lIns="0" tIns="0" rIns="0" bIns="0" anchor="ctr">
-            <a:normAutofit fontScale="95797"/>
+            <a:normAutofit fontScale="92179"/>
           </a:bodyPr>
           <a:lstStyle xmlns:a="http://schemas.openxmlformats.org/drawingml/2006/main"/>
           <a:p xmlns:a="http://schemas.openxmlformats.org/drawingml/2006/main">
@@ -6322,7 +6121,7 @@
                 <a:ea typeface="Aptos"/>
                 <a:cs typeface="Aptos"/>
               </a:rPr>
-              <a:t>примени принцип на пројекат</a:t>
+              <a:t>примена принципа на пројекат</a:t>
             </a:r>
           </a:p>
         </p:txBody>
@@ -6546,14 +6345,14 @@
                 <a:ea typeface="Aptos"/>
                 <a:cs typeface="Aptos"/>
               </a:rPr>
-              <a:t>покажи контролу и доказ</a:t>
+              <a:t>приказ контроле и доказа</a:t>
             </a:r>
           </a:p>
         </p:txBody>
       </p:sp>
       <p:cxnSp>
         <p:nvCxnSpPr>
-          <p:cNvPr id="193" name="Straight Arrow Connector 96"/>
+          <p:cNvPr id="289" name="Straight Arrow Connector 96"/>
           <p:cNvCxnSpPr>
             <a:stCxn xmlns:a="http://schemas.openxmlformats.org/drawingml/2006/main" id="6" idx="3"/>
             <a:endCxn xmlns:a="http://schemas.openxmlformats.org/drawingml/2006/main" id="10" idx="1"/>
@@ -6579,7 +6378,7 @@
       </p:cxnSp>
       <p:cxnSp>
         <p:nvCxnSpPr>
-          <p:cNvPr id="194" name="Straight Arrow Connector 97"/>
+          <p:cNvPr id="290" name="Straight Arrow Connector 97"/>
           <p:cNvCxnSpPr>
             <a:stCxn xmlns:a="http://schemas.openxmlformats.org/drawingml/2006/main" id="10" idx="3"/>
             <a:endCxn xmlns:a="http://schemas.openxmlformats.org/drawingml/2006/main" id="14" idx="1"/>
@@ -6605,7 +6404,7 @@
       </p:cxnSp>
       <p:cxnSp>
         <p:nvCxnSpPr>
-          <p:cNvPr id="195" name="Straight Arrow Connector 98"/>
+          <p:cNvPr id="291" name="Straight Arrow Connector 98"/>
           <p:cNvCxnSpPr>
             <a:stCxn xmlns:a="http://schemas.openxmlformats.org/drawingml/2006/main" id="14" idx="3"/>
             <a:endCxn xmlns:a="http://schemas.openxmlformats.org/drawingml/2006/main" id="18" idx="1"/>
@@ -6754,7 +6553,7 @@
         </p:spPr>
         <p:txBody>
           <a:bodyPr xmlns:a="http://schemas.openxmlformats.org/drawingml/2006/main" wrap="square" lIns="0" tIns="0" rIns="0" bIns="0" anchor="t">
-            <a:normAutofit/>
+            <a:normAutofit fontScale="100000"/>
           </a:bodyPr>
           <a:lstStyle xmlns:a="http://schemas.openxmlformats.org/drawingml/2006/main"/>
           <a:p xmlns:a="http://schemas.openxmlformats.org/drawingml/2006/main">
@@ -6781,7 +6580,7 @@
                 <a:ea typeface="Aptos"/>
                 <a:cs typeface="Aptos"/>
               </a:rPr>
-              <a:t>Проблем који решавамо · изабрана контрола · њено ограничење · тест, audit траг или демонстрација која доказује понашање.</a:t>
+              <a:t>Проблем који решавамо, изабрана контрола, њено ограничење, тест, ревизиони траг или демонстрација која доказује понашање.</a:t>
             </a:r>
           </a:p>
         </p:txBody>
@@ -6844,7 +6643,7 @@
         </p:spPr>
         <p:txBody>
           <a:bodyPr xmlns:a="http://schemas.openxmlformats.org/drawingml/2006/main" wrap="square" lIns="0" tIns="0" rIns="0" bIns="0" anchor="t">
-            <a:normAutofit/>
+            <a:normAutofit fontScale="100000"/>
           </a:bodyPr>
           <a:lstStyle xmlns:a="http://schemas.openxmlformats.org/drawingml/2006/main"/>
           <a:p xmlns:a="http://schemas.openxmlformats.org/drawingml/2006/main">
@@ -6865,7 +6664,7 @@
             <a:r>
               <a:rPr sz="825" b="0">
                 <a:solidFill>
-                  <a:srgbClr val="657184"/>
+                  <a:srgbClr val="5E6B7D"/>
                 </a:solidFill>
                 <a:latin typeface="Aptos"/>
                 <a:ea typeface="Aptos"/>
@@ -6898,10 +6697,12 @@
           <a:prstGeom xmlns:a="http://schemas.openxmlformats.org/drawingml/2006/main" prst="line">
             <a:avLst/>
           </a:prstGeom>
-          <a:noFill xmlns:a="http://schemas.openxmlformats.org/drawingml/2006/main"/>
-          <a:ln xmlns:a="http://schemas.openxmlformats.org/drawingml/2006/main" w="9525">
+          <a:solidFill xmlns:a="http://schemas.openxmlformats.org/drawingml/2006/main">
+            <a:srgbClr val="8D5560"/>
+          </a:solidFill>
+          <a:ln xmlns:a="http://schemas.openxmlformats.org/drawingml/2006/main" w="7144">
             <a:solidFill>
-              <a:srgbClr val="748092"/>
+              <a:srgbClr val="8D5560"/>
             </a:solidFill>
             <a:prstDash val="solid"/>
           </a:ln>
@@ -7058,7 +6859,7 @@
         </p:spPr>
         <p:txBody>
           <a:bodyPr xmlns:a="http://schemas.openxmlformats.org/drawingml/2006/main" wrap="square" lIns="0" tIns="0" rIns="0" bIns="0" anchor="t">
-            <a:normAutofit/>
+            <a:normAutofit fontScale="100000"/>
           </a:bodyPr>
           <a:lstStyle xmlns:a="http://schemas.openxmlformats.org/drawingml/2006/main"/>
           <a:p xmlns:a="http://schemas.openxmlformats.org/drawingml/2006/main">
@@ -7085,7 +6886,7 @@
                 <a:ea typeface="Aptos"/>
                 <a:cs typeface="Aptos"/>
               </a:rPr>
-              <a:t>На крају предмета студент повезује безбедносни проблем са контролом и проверљивим доказом.</a:t>
+              <a:t>Студент повезује безбедносни проблем са одговарајућом контролом и проверљивим доказом њеног рада.</a:t>
             </a:r>
           </a:p>
         </p:txBody>
@@ -7115,7 +6916,7 @@
             </a:avLst>
           </a:prstGeom>
           <a:solidFill xmlns:a="http://schemas.openxmlformats.org/drawingml/2006/main">
-            <a:srgbClr val="EEF3FF"/>
+            <a:srgbClr val="F7EFF1"/>
           </a:solidFill>
           <a:ln xmlns:a="http://schemas.openxmlformats.org/drawingml/2006/main" w="9525">
             <a:solidFill>
@@ -7181,7 +6982,7 @@
             <a:r>
               <a:rPr sz="1275" b="1">
                 <a:solidFill>
-                  <a:srgbClr val="2F5EF5"/>
+                  <a:srgbClr val="7A2636"/>
                 </a:solidFill>
                 <a:latin typeface="Aptos"/>
                 <a:ea typeface="Aptos"/>
@@ -7339,7 +7140,7 @@
             </a:avLst>
           </a:prstGeom>
           <a:solidFill xmlns:a="http://schemas.openxmlformats.org/drawingml/2006/main">
-            <a:srgbClr val="F5F0FF"/>
+            <a:srgbClr val="F7F4F5"/>
           </a:solidFill>
           <a:ln xmlns:a="http://schemas.openxmlformats.org/drawingml/2006/main" w="9525">
             <a:solidFill>
@@ -7405,7 +7206,7 @@
             <a:r>
               <a:rPr sz="1275" b="1">
                 <a:solidFill>
-                  <a:srgbClr val="7651D4"/>
+                  <a:srgbClr val="7A2636"/>
                 </a:solidFill>
                 <a:latin typeface="Aptos"/>
                 <a:ea typeface="Aptos"/>
@@ -7669,7 +7470,7 @@
         </p:spPr>
         <p:txBody>
           <a:bodyPr xmlns:a="http://schemas.openxmlformats.org/drawingml/2006/main" wrap="square" lIns="0" tIns="0" rIns="0" bIns="0" anchor="ctr">
-            <a:normAutofit/>
+            <a:normAutofit fontScale="100000"/>
           </a:bodyPr>
           <a:lstStyle xmlns:a="http://schemas.openxmlformats.org/drawingml/2006/main"/>
           <a:p xmlns:a="http://schemas.openxmlformats.org/drawingml/2006/main">
@@ -7696,7 +7497,7 @@
                 <a:ea typeface="Aptos"/>
                 <a:cs typeface="Aptos"/>
               </a:rPr>
-              <a:t>Тест и audit траг</a:t>
+              <a:t>Тест и ревизиони траг</a:t>
             </a:r>
           </a:p>
         </p:txBody>
@@ -7820,7 +7621,7 @@
         </p:spPr>
         <p:txBody>
           <a:bodyPr xmlns:a="http://schemas.openxmlformats.org/drawingml/2006/main" wrap="square" lIns="0" tIns="0" rIns="0" bIns="0" anchor="t">
-            <a:normAutofit/>
+            <a:normAutofit fontScale="100000"/>
           </a:bodyPr>
           <a:lstStyle xmlns:a="http://schemas.openxmlformats.org/drawingml/2006/main"/>
           <a:p xmlns:a="http://schemas.openxmlformats.org/drawingml/2006/main">
@@ -7841,7 +7642,7 @@
             <a:r>
               <a:rPr sz="825" b="0">
                 <a:solidFill>
-                  <a:srgbClr val="657184"/>
+                  <a:srgbClr val="5E6B7D"/>
                 </a:solidFill>
                 <a:latin typeface="Aptos"/>
                 <a:ea typeface="Aptos"/>
@@ -7874,10 +7675,12 @@
           <a:prstGeom xmlns:a="http://schemas.openxmlformats.org/drawingml/2006/main" prst="line">
             <a:avLst/>
           </a:prstGeom>
-          <a:noFill xmlns:a="http://schemas.openxmlformats.org/drawingml/2006/main"/>
-          <a:ln xmlns:a="http://schemas.openxmlformats.org/drawingml/2006/main" w="9525">
+          <a:solidFill xmlns:a="http://schemas.openxmlformats.org/drawingml/2006/main">
+            <a:srgbClr val="8D5560"/>
+          </a:solidFill>
+          <a:ln xmlns:a="http://schemas.openxmlformats.org/drawingml/2006/main" w="7144">
             <a:solidFill>
-              <a:srgbClr val="748092"/>
+              <a:srgbClr val="8D5560"/>
             </a:solidFill>
             <a:prstDash val="solid"/>
           </a:ln>
@@ -7973,7 +7776,7 @@
         </p:spPr>
         <p:txBody>
           <a:bodyPr xmlns:a="http://schemas.openxmlformats.org/drawingml/2006/main" wrap="square" lIns="0" tIns="0" rIns="0" bIns="0" anchor="t">
-            <a:normAutofit/>
+            <a:normAutofit fontScale="100000"/>
           </a:bodyPr>
           <a:lstStyle xmlns:a="http://schemas.openxmlformats.org/drawingml/2006/main"/>
           <a:p xmlns:a="http://schemas.openxmlformats.org/drawingml/2006/main">
@@ -8000,7 +7803,7 @@
                 <a:ea typeface="Aptos Display"/>
                 <a:cs typeface="Aptos Display"/>
               </a:rPr>
-              <a:t>Шта се очекује од редовног пројекта</a:t>
+              <a:t>Захтеви редовног пројекта</a:t>
             </a:r>
           </a:p>
         </p:txBody>
@@ -8157,7 +7960,7 @@
             <a:r>
               <a:rPr sz="1238" b="1">
                 <a:solidFill>
-                  <a:srgbClr val="2F5EF5"/>
+                  <a:srgbClr val="7A2636"/>
                 </a:solidFill>
                 <a:latin typeface="Aptos"/>
                 <a:ea typeface="Aptos"/>
@@ -8315,7 +8118,7 @@
             </a:avLst>
           </a:prstGeom>
           <a:solidFill xmlns:a="http://schemas.openxmlformats.org/drawingml/2006/main">
-            <a:srgbClr val="EEF3FF"/>
+            <a:srgbClr val="F7EFF1"/>
           </a:solidFill>
           <a:ln xmlns:a="http://schemas.openxmlformats.org/drawingml/2006/main" w="9525">
             <a:solidFill>
@@ -8381,7 +8184,7 @@
             <a:r>
               <a:rPr sz="1238" b="1">
                 <a:solidFill>
-                  <a:srgbClr val="2F5EF5"/>
+                  <a:srgbClr val="7A2636"/>
                 </a:solidFill>
                 <a:latin typeface="Aptos"/>
                 <a:ea typeface="Aptos"/>
@@ -8539,7 +8342,7 @@
             </a:avLst>
           </a:prstGeom>
           <a:solidFill xmlns:a="http://schemas.openxmlformats.org/drawingml/2006/main">
-            <a:srgbClr val="F5F0FF"/>
+            <a:srgbClr val="F7F4F5"/>
           </a:solidFill>
           <a:ln xmlns:a="http://schemas.openxmlformats.org/drawingml/2006/main" w="9525">
             <a:solidFill>
@@ -8605,7 +8408,7 @@
             <a:r>
               <a:rPr sz="1238" b="1">
                 <a:solidFill>
-                  <a:srgbClr val="7651D4"/>
+                  <a:srgbClr val="7A2636"/>
                 </a:solidFill>
                 <a:latin typeface="Aptos"/>
                 <a:ea typeface="Aptos"/>
@@ -9188,7 +8991,7 @@
       </p:sp>
       <p:cxnSp>
         <p:nvCxnSpPr>
-          <p:cNvPr id="234" name="Straight Arrow Connector 113"/>
+          <p:cNvPr id="350" name="Straight Arrow Connector 113"/>
           <p:cNvCxnSpPr>
             <a:stCxn xmlns:a="http://schemas.openxmlformats.org/drawingml/2006/main" id="6" idx="3"/>
             <a:endCxn xmlns:a="http://schemas.openxmlformats.org/drawingml/2006/main" id="10" idx="1"/>
@@ -9214,7 +9017,7 @@
       </p:cxnSp>
       <p:cxnSp>
         <p:nvCxnSpPr>
-          <p:cNvPr id="235" name="Straight Arrow Connector 114"/>
+          <p:cNvPr id="351" name="Straight Arrow Connector 114"/>
           <p:cNvCxnSpPr>
             <a:stCxn xmlns:a="http://schemas.openxmlformats.org/drawingml/2006/main" id="10" idx="3"/>
             <a:endCxn xmlns:a="http://schemas.openxmlformats.org/drawingml/2006/main" id="14" idx="1"/>
@@ -9240,7 +9043,7 @@
       </p:cxnSp>
       <p:cxnSp>
         <p:nvCxnSpPr>
-          <p:cNvPr id="236" name="Straight Arrow Connector 115"/>
+          <p:cNvPr id="352" name="Straight Arrow Connector 115"/>
           <p:cNvCxnSpPr>
             <a:stCxn xmlns:a="http://schemas.openxmlformats.org/drawingml/2006/main" id="14" idx="3"/>
             <a:endCxn xmlns:a="http://schemas.openxmlformats.org/drawingml/2006/main" id="18" idx="1"/>
@@ -9266,7 +9069,7 @@
       </p:cxnSp>
       <p:cxnSp>
         <p:nvCxnSpPr>
-          <p:cNvPr id="237" name="Straight Arrow Connector 116"/>
+          <p:cNvPr id="353" name="Straight Arrow Connector 116"/>
           <p:cNvCxnSpPr>
             <a:stCxn xmlns:a="http://schemas.openxmlformats.org/drawingml/2006/main" id="18" idx="3"/>
             <a:endCxn xmlns:a="http://schemas.openxmlformats.org/drawingml/2006/main" id="22" idx="1"/>
@@ -9315,11 +9118,11 @@
             </a:avLst>
           </a:prstGeom>
           <a:solidFill xmlns:a="http://schemas.openxmlformats.org/drawingml/2006/main">
-            <a:srgbClr val="EEF3FF"/>
+            <a:srgbClr val="F7EFF1"/>
           </a:solidFill>
           <a:ln xmlns:a="http://schemas.openxmlformats.org/drawingml/2006/main" w="8573">
             <a:solidFill>
-              <a:srgbClr val="CAD7F2"/>
+              <a:srgbClr val="DBC7CC"/>
             </a:solidFill>
             <a:prstDash val="solid"/>
           </a:ln>
@@ -9350,7 +9153,7 @@
             </a:avLst>
           </a:prstGeom>
           <a:solidFill xmlns:a="http://schemas.openxmlformats.org/drawingml/2006/main">
-            <a:srgbClr val="2F5EF5"/>
+            <a:srgbClr val="7A2636"/>
           </a:solidFill>
           <a:ln xmlns:a="http://schemas.openxmlformats.org/drawingml/2006/main" w="0">
             <a:noFill/>
@@ -9391,6 +9194,7 @@
           <a:lstStyle xmlns:a="http://schemas.openxmlformats.org/drawingml/2006/main"/>
           <a:p xmlns:a="http://schemas.openxmlformats.org/drawingml/2006/main">
             <a:pPr>
+              <a:buNone/>
               <a:defRPr sz="1200" b="1">
                 <a:solidFill>
                   <a:srgbClr val="2F5EF5"/>
@@ -9403,7 +9207,7 @@
             <a:r>
               <a:rPr sz="1200" b="1">
                 <a:solidFill>
-                  <a:srgbClr val="2F5EF5"/>
+                  <a:srgbClr val="7A2636"/>
                 </a:solidFill>
                 <a:latin typeface="Aptos"/>
                 <a:ea typeface="Aptos"/>
@@ -9448,6 +9252,7 @@
           <a:lstStyle xmlns:a="http://schemas.openxmlformats.org/drawingml/2006/main"/>
           <a:p xmlns:a="http://schemas.openxmlformats.org/drawingml/2006/main">
             <a:pPr>
+              <a:buNone/>
               <a:defRPr sz="1388" b="1">
                 <a:solidFill>
                   <a:srgbClr val="1B2432"/>
@@ -9529,7 +9334,7 @@
         </p:spPr>
         <p:txBody>
           <a:bodyPr xmlns:a="http://schemas.openxmlformats.org/drawingml/2006/main" wrap="square" lIns="0" tIns="0" rIns="0" bIns="0" anchor="t">
-            <a:normAutofit/>
+            <a:normAutofit fontScale="100000"/>
           </a:bodyPr>
           <a:lstStyle xmlns:a="http://schemas.openxmlformats.org/drawingml/2006/main"/>
           <a:p xmlns:a="http://schemas.openxmlformats.org/drawingml/2006/main">
@@ -9550,7 +9355,7 @@
             <a:r>
               <a:rPr sz="825" b="0">
                 <a:solidFill>
-                  <a:srgbClr val="657184"/>
+                  <a:srgbClr val="5E6B7D"/>
                 </a:solidFill>
                 <a:latin typeface="Aptos"/>
                 <a:ea typeface="Aptos"/>
@@ -9583,10 +9388,12 @@
           <a:prstGeom xmlns:a="http://schemas.openxmlformats.org/drawingml/2006/main" prst="line">
             <a:avLst/>
           </a:prstGeom>
-          <a:noFill xmlns:a="http://schemas.openxmlformats.org/drawingml/2006/main"/>
-          <a:ln xmlns:a="http://schemas.openxmlformats.org/drawingml/2006/main" w="9525">
+          <a:solidFill xmlns:a="http://schemas.openxmlformats.org/drawingml/2006/main">
+            <a:srgbClr val="8D5560"/>
+          </a:solidFill>
+          <a:ln xmlns:a="http://schemas.openxmlformats.org/drawingml/2006/main" w="7144">
             <a:solidFill>
-              <a:srgbClr val="748092"/>
+              <a:srgbClr val="8D5560"/>
             </a:solidFill>
             <a:prstDash val="solid"/>
           </a:ln>
@@ -9743,7 +9550,7 @@
         </p:spPr>
         <p:txBody>
           <a:bodyPr xmlns:a="http://schemas.openxmlformats.org/drawingml/2006/main" wrap="square" lIns="0" tIns="0" rIns="0" bIns="0" anchor="t">
-            <a:normAutofit fontScale="95238"/>
+            <a:normAutofit fontScale="98331"/>
           </a:bodyPr>
           <a:lstStyle xmlns:a="http://schemas.openxmlformats.org/drawingml/2006/main"/>
           <a:p xmlns:a="http://schemas.openxmlformats.org/drawingml/2006/main">
@@ -9770,7 +9577,7 @@
                 <a:ea typeface="Aptos"/>
                 <a:cs typeface="Aptos"/>
               </a:rPr>
-              <a:t>Овај начин полагања намењен је практичном делу дипломског рада који је непосредно повезан са информационом безбедношћу.</a:t>
+              <a:t>Супер пројекат представља практични део дипломског рада непосредно повезан са информационом безбедношћу.</a:t>
             </a:r>
           </a:p>
         </p:txBody>
@@ -10024,7 +9831,7 @@
             </a:avLst>
           </a:prstGeom>
           <a:solidFill xmlns:a="http://schemas.openxmlformats.org/drawingml/2006/main">
-            <a:srgbClr val="EEF3FF"/>
+            <a:srgbClr val="F7EFF1"/>
           </a:solidFill>
           <a:ln xmlns:a="http://schemas.openxmlformats.org/drawingml/2006/main" w="9525">
             <a:solidFill>
@@ -10090,7 +9897,7 @@
             <a:r>
               <a:rPr sz="1275" b="1">
                 <a:solidFill>
-                  <a:srgbClr val="2F5EF5"/>
+                  <a:srgbClr val="7A2636"/>
                 </a:solidFill>
                 <a:latin typeface="Aptos"/>
                 <a:ea typeface="Aptos"/>
@@ -10505,7 +10312,7 @@
         </p:spPr>
         <p:txBody>
           <a:bodyPr xmlns:a="http://schemas.openxmlformats.org/drawingml/2006/main" wrap="square" lIns="0" tIns="0" rIns="0" bIns="0" anchor="t">
-            <a:normAutofit/>
+            <a:normAutofit fontScale="100000"/>
           </a:bodyPr>
           <a:lstStyle xmlns:a="http://schemas.openxmlformats.org/drawingml/2006/main"/>
           <a:p xmlns:a="http://schemas.openxmlformats.org/drawingml/2006/main">
@@ -10526,7 +10333,7 @@
             <a:r>
               <a:rPr sz="825" b="0">
                 <a:solidFill>
-                  <a:srgbClr val="657184"/>
+                  <a:srgbClr val="5E6B7D"/>
                 </a:solidFill>
                 <a:latin typeface="Aptos"/>
                 <a:ea typeface="Aptos"/>
@@ -10559,10 +10366,12 @@
           <a:prstGeom xmlns:a="http://schemas.openxmlformats.org/drawingml/2006/main" prst="line">
             <a:avLst/>
           </a:prstGeom>
-          <a:noFill xmlns:a="http://schemas.openxmlformats.org/drawingml/2006/main"/>
-          <a:ln xmlns:a="http://schemas.openxmlformats.org/drawingml/2006/main" w="9525">
+          <a:solidFill xmlns:a="http://schemas.openxmlformats.org/drawingml/2006/main">
+            <a:srgbClr val="8D5560"/>
+          </a:solidFill>
+          <a:ln xmlns:a="http://schemas.openxmlformats.org/drawingml/2006/main" w="7144">
             <a:solidFill>
-              <a:srgbClr val="748092"/>
+              <a:srgbClr val="8D5560"/>
             </a:solidFill>
             <a:prstDash val="solid"/>
           </a:ln>
@@ -10658,7 +10467,7 @@
         </p:spPr>
         <p:txBody>
           <a:bodyPr xmlns:a="http://schemas.openxmlformats.org/drawingml/2006/main" wrap="square" lIns="0" tIns="0" rIns="0" bIns="0" anchor="t">
-            <a:normAutofit/>
+            <a:normAutofit fontScale="100000"/>
           </a:bodyPr>
           <a:lstStyle xmlns:a="http://schemas.openxmlformats.org/drawingml/2006/main"/>
           <a:p xmlns:a="http://schemas.openxmlformats.org/drawingml/2006/main">
@@ -10685,7 +10494,7 @@
                 <a:ea typeface="Aptos Display"/>
                 <a:cs typeface="Aptos Display"/>
               </a:rPr>
-              <a:t>Шта се показује на контролним тачкама</a:t>
+              <a:t>Садржај контролних тачака</a:t>
             </a:r>
           </a:p>
         </p:txBody>
@@ -10719,7 +10528,7 @@
         </p:spPr>
         <p:txBody>
           <a:bodyPr xmlns:a="http://schemas.openxmlformats.org/drawingml/2006/main" wrap="square" lIns="0" tIns="0" rIns="0" bIns="0" anchor="t">
-            <a:normAutofit/>
+            <a:normAutofit fontScale="100000"/>
           </a:bodyPr>
           <a:lstStyle xmlns:a="http://schemas.openxmlformats.org/drawingml/2006/main"/>
           <a:p xmlns:a="http://schemas.openxmlformats.org/drawingml/2006/main">
@@ -10746,7 +10555,7 @@
                 <a:ea typeface="Aptos"/>
                 <a:cs typeface="Aptos"/>
               </a:rPr>
-              <a:t>Контролна тачка не тражи савршен систем, већ видљив напредак и доказ да тим разуме границу коју гради.</a:t>
+              <a:t>Свака контролна тачка утврђује конкретан обим имплементације, тестова и доказа који тим представља.</a:t>
             </a:r>
           </a:p>
         </p:txBody>
@@ -10776,7 +10585,7 @@
             </a:avLst>
           </a:prstGeom>
           <a:solidFill xmlns:a="http://schemas.openxmlformats.org/drawingml/2006/main">
-            <a:srgbClr val="EEF3FF"/>
+            <a:srgbClr val="F7EFF1"/>
           </a:solidFill>
           <a:ln xmlns:a="http://schemas.openxmlformats.org/drawingml/2006/main" w="9525">
             <a:solidFill>
@@ -10842,7 +10651,7 @@
             <a:r>
               <a:rPr sz="1275" b="1">
                 <a:solidFill>
-                  <a:srgbClr val="2F5EF5"/>
+                  <a:srgbClr val="7A2636"/>
                 </a:solidFill>
                 <a:latin typeface="Aptos"/>
                 <a:ea typeface="Aptos"/>
@@ -11000,7 +10809,7 @@
             </a:avLst>
           </a:prstGeom>
           <a:solidFill xmlns:a="http://schemas.openxmlformats.org/drawingml/2006/main">
-            <a:srgbClr val="F5F0FF"/>
+            <a:srgbClr val="F7F4F5"/>
           </a:solidFill>
           <a:ln xmlns:a="http://schemas.openxmlformats.org/drawingml/2006/main" w="9525">
             <a:solidFill>
@@ -11066,7 +10875,7 @@
             <a:r>
               <a:rPr sz="1275" b="1">
                 <a:solidFill>
-                  <a:srgbClr val="7651D4"/>
+                  <a:srgbClr val="7A2636"/>
                 </a:solidFill>
                 <a:latin typeface="Aptos"/>
                 <a:ea typeface="Aptos"/>
@@ -11705,7 +11514,7 @@
         </p:spPr>
         <p:txBody>
           <a:bodyPr xmlns:a="http://schemas.openxmlformats.org/drawingml/2006/main" wrap="square" lIns="0" tIns="0" rIns="0" bIns="0" anchor="t">
-            <a:normAutofit/>
+            <a:normAutofit fontScale="100000"/>
           </a:bodyPr>
           <a:lstStyle xmlns:a="http://schemas.openxmlformats.org/drawingml/2006/main"/>
           <a:p xmlns:a="http://schemas.openxmlformats.org/drawingml/2006/main">
@@ -11726,7 +11535,7 @@
             <a:r>
               <a:rPr sz="825" b="0">
                 <a:solidFill>
-                  <a:srgbClr val="657184"/>
+                  <a:srgbClr val="5E6B7D"/>
                 </a:solidFill>
                 <a:latin typeface="Aptos"/>
                 <a:ea typeface="Aptos"/>
@@ -11759,10 +11568,12 @@
           <a:prstGeom xmlns:a="http://schemas.openxmlformats.org/drawingml/2006/main" prst="line">
             <a:avLst/>
           </a:prstGeom>
-          <a:noFill xmlns:a="http://schemas.openxmlformats.org/drawingml/2006/main"/>
-          <a:ln xmlns:a="http://schemas.openxmlformats.org/drawingml/2006/main" w="9525">
+          <a:solidFill xmlns:a="http://schemas.openxmlformats.org/drawingml/2006/main">
+            <a:srgbClr val="8D5560"/>
+          </a:solidFill>
+          <a:ln xmlns:a="http://schemas.openxmlformats.org/drawingml/2006/main" w="7144">
             <a:solidFill>
-              <a:srgbClr val="748092"/>
+              <a:srgbClr val="8D5560"/>
             </a:solidFill>
             <a:prstDash val="solid"/>
           </a:ln>
@@ -11976,7 +11787,7 @@
             </a:avLst>
           </a:prstGeom>
           <a:solidFill xmlns:a="http://schemas.openxmlformats.org/drawingml/2006/main">
-            <a:srgbClr val="EEF3FF"/>
+            <a:srgbClr val="F7EFF1"/>
           </a:solidFill>
           <a:ln xmlns:a="http://schemas.openxmlformats.org/drawingml/2006/main" w="9525">
             <a:solidFill>
@@ -12042,7 +11853,7 @@
             <a:r>
               <a:rPr sz="1275" b="1">
                 <a:solidFill>
-                  <a:srgbClr val="2F5EF5"/>
+                  <a:srgbClr val="7A2636"/>
                 </a:solidFill>
                 <a:latin typeface="Aptos"/>
                 <a:ea typeface="Aptos"/>
@@ -12700,7 +12511,7 @@
         </p:spPr>
         <p:txBody>
           <a:bodyPr xmlns:a="http://schemas.openxmlformats.org/drawingml/2006/main" wrap="square" lIns="0" tIns="0" rIns="0" bIns="0" anchor="t">
-            <a:normAutofit/>
+            <a:normAutofit fontScale="100000"/>
           </a:bodyPr>
           <a:lstStyle xmlns:a="http://schemas.openxmlformats.org/drawingml/2006/main"/>
           <a:p xmlns:a="http://schemas.openxmlformats.org/drawingml/2006/main">
@@ -12721,7 +12532,7 @@
             <a:r>
               <a:rPr sz="825" b="0">
                 <a:solidFill>
-                  <a:srgbClr val="657184"/>
+                  <a:srgbClr val="5E6B7D"/>
                 </a:solidFill>
                 <a:latin typeface="Aptos"/>
                 <a:ea typeface="Aptos"/>
@@ -12754,10 +12565,12 @@
           <a:prstGeom xmlns:a="http://schemas.openxmlformats.org/drawingml/2006/main" prst="line">
             <a:avLst/>
           </a:prstGeom>
-          <a:noFill xmlns:a="http://schemas.openxmlformats.org/drawingml/2006/main"/>
-          <a:ln xmlns:a="http://schemas.openxmlformats.org/drawingml/2006/main" w="9525">
+          <a:solidFill xmlns:a="http://schemas.openxmlformats.org/drawingml/2006/main">
+            <a:srgbClr val="8D5560"/>
+          </a:solidFill>
+          <a:ln xmlns:a="http://schemas.openxmlformats.org/drawingml/2006/main" w="7144">
             <a:solidFill>
-              <a:srgbClr val="748092"/>
+              <a:srgbClr val="8D5560"/>
             </a:solidFill>
             <a:prstDash val="solid"/>
           </a:ln>
@@ -12914,7 +12727,7 @@
         </p:spPr>
         <p:txBody>
           <a:bodyPr xmlns:a="http://schemas.openxmlformats.org/drawingml/2006/main" wrap="square" lIns="0" tIns="0" rIns="0" bIns="0" anchor="t">
-            <a:normAutofit/>
+            <a:normAutofit fontScale="100000"/>
           </a:bodyPr>
           <a:lstStyle xmlns:a="http://schemas.openxmlformats.org/drawingml/2006/main"/>
           <a:p xmlns:a="http://schemas.openxmlformats.org/drawingml/2006/main">
@@ -12941,7 +12754,7 @@
                 <a:ea typeface="Aptos"/>
                 <a:cs typeface="Aptos"/>
               </a:rPr>
-              <a:t>Усмени проверава да ли студент уме да повеже концепт са одлуком коју је тим применио на пројекту.</a:t>
+              <a:t>Студент повезује концепте предмета са безбедносним и архитектонским одлукама примењеним на пројекту.</a:t>
             </a:r>
           </a:p>
         </p:txBody>
@@ -13037,7 +12850,7 @@
             <a:r>
               <a:rPr sz="1238" b="1">
                 <a:solidFill>
-                  <a:srgbClr val="2F5EF5"/>
+                  <a:srgbClr val="7A2636"/>
                 </a:solidFill>
                 <a:latin typeface="Aptos"/>
                 <a:ea typeface="Aptos"/>
@@ -13419,7 +13232,7 @@
             </a:avLst>
           </a:prstGeom>
           <a:solidFill xmlns:a="http://schemas.openxmlformats.org/drawingml/2006/main">
-            <a:srgbClr val="EEF3FF"/>
+            <a:srgbClr val="F7EFF1"/>
           </a:solidFill>
           <a:ln xmlns:a="http://schemas.openxmlformats.org/drawingml/2006/main" w="9525">
             <a:solidFill>
@@ -13485,7 +13298,7 @@
             <a:r>
               <a:rPr sz="1238" b="1">
                 <a:solidFill>
-                  <a:srgbClr val="2F5EF5"/>
+                  <a:srgbClr val="7A2636"/>
                 </a:solidFill>
                 <a:latin typeface="Aptos"/>
                 <a:ea typeface="Aptos"/>
@@ -13643,7 +13456,7 @@
             </a:avLst>
           </a:prstGeom>
           <a:solidFill xmlns:a="http://schemas.openxmlformats.org/drawingml/2006/main">
-            <a:srgbClr val="F5F0FF"/>
+            <a:srgbClr val="F7F4F5"/>
           </a:solidFill>
           <a:ln xmlns:a="http://schemas.openxmlformats.org/drawingml/2006/main" w="9525">
             <a:solidFill>
@@ -13709,7 +13522,7 @@
             <a:r>
               <a:rPr sz="1238" b="1">
                 <a:solidFill>
-                  <a:srgbClr val="7651D4"/>
+                  <a:srgbClr val="7A2636"/>
                 </a:solidFill>
                 <a:latin typeface="Aptos"/>
                 <a:ea typeface="Aptos"/>
@@ -14068,7 +13881,7 @@
       </p:sp>
       <p:cxnSp>
         <p:nvCxnSpPr>
-          <p:cNvPr id="237" name="Straight Arrow Connector 115"/>
+          <p:cNvPr id="353" name="Straight Arrow Connector 115"/>
           <p:cNvCxnSpPr>
             <a:stCxn xmlns:a="http://schemas.openxmlformats.org/drawingml/2006/main" id="6" idx="3"/>
             <a:endCxn xmlns:a="http://schemas.openxmlformats.org/drawingml/2006/main" id="10" idx="1"/>
@@ -14094,7 +13907,7 @@
       </p:cxnSp>
       <p:cxnSp>
         <p:nvCxnSpPr>
-          <p:cNvPr id="238" name="Straight Arrow Connector 116"/>
+          <p:cNvPr id="354" name="Straight Arrow Connector 116"/>
           <p:cNvCxnSpPr>
             <a:stCxn xmlns:a="http://schemas.openxmlformats.org/drawingml/2006/main" id="10" idx="3"/>
             <a:endCxn xmlns:a="http://schemas.openxmlformats.org/drawingml/2006/main" id="14" idx="1"/>
@@ -14120,7 +13933,7 @@
       </p:cxnSp>
       <p:cxnSp>
         <p:nvCxnSpPr>
-          <p:cNvPr id="239" name="Straight Arrow Connector 117"/>
+          <p:cNvPr id="355" name="Straight Arrow Connector 117"/>
           <p:cNvCxnSpPr>
             <a:stCxn xmlns:a="http://schemas.openxmlformats.org/drawingml/2006/main" id="14" idx="3"/>
             <a:endCxn xmlns:a="http://schemas.openxmlformats.org/drawingml/2006/main" id="18" idx="1"/>
@@ -14146,7 +13959,7 @@
       </p:cxnSp>
       <p:cxnSp>
         <p:nvCxnSpPr>
-          <p:cNvPr id="240" name="Straight Arrow Connector 118"/>
+          <p:cNvPr id="356" name="Straight Arrow Connector 118"/>
           <p:cNvCxnSpPr>
             <a:stCxn xmlns:a="http://schemas.openxmlformats.org/drawingml/2006/main" id="18" idx="3"/>
             <a:endCxn xmlns:a="http://schemas.openxmlformats.org/drawingml/2006/main" id="22" idx="1"/>
@@ -14195,11 +14008,11 @@
             </a:avLst>
           </a:prstGeom>
           <a:solidFill xmlns:a="http://schemas.openxmlformats.org/drawingml/2006/main">
-            <a:srgbClr val="EEF3FF"/>
+            <a:srgbClr val="F7EFF1"/>
           </a:solidFill>
           <a:ln xmlns:a="http://schemas.openxmlformats.org/drawingml/2006/main" w="8573">
             <a:solidFill>
-              <a:srgbClr val="CAD7F2"/>
+              <a:srgbClr val="DBC7CC"/>
             </a:solidFill>
             <a:prstDash val="solid"/>
           </a:ln>
@@ -14230,7 +14043,7 @@
             </a:avLst>
           </a:prstGeom>
           <a:solidFill xmlns:a="http://schemas.openxmlformats.org/drawingml/2006/main">
-            <a:srgbClr val="2F5EF5"/>
+            <a:srgbClr val="7A2636"/>
           </a:solidFill>
           <a:ln xmlns:a="http://schemas.openxmlformats.org/drawingml/2006/main" w="0">
             <a:noFill/>
@@ -14271,6 +14084,7 @@
           <a:lstStyle xmlns:a="http://schemas.openxmlformats.org/drawingml/2006/main"/>
           <a:p xmlns:a="http://schemas.openxmlformats.org/drawingml/2006/main">
             <a:pPr>
+              <a:buNone/>
               <a:defRPr sz="1200" b="1">
                 <a:solidFill>
                   <a:srgbClr val="2F5EF5"/>
@@ -14283,7 +14097,7 @@
             <a:r>
               <a:rPr sz="1200" b="1">
                 <a:solidFill>
-                  <a:srgbClr val="2F5EF5"/>
+                  <a:srgbClr val="7A2636"/>
                 </a:solidFill>
                 <a:latin typeface="Aptos"/>
                 <a:ea typeface="Aptos"/>
@@ -14328,6 +14142,7 @@
           <a:lstStyle xmlns:a="http://schemas.openxmlformats.org/drawingml/2006/main"/>
           <a:p xmlns:a="http://schemas.openxmlformats.org/drawingml/2006/main">
             <a:pPr>
+              <a:buNone/>
               <a:defRPr sz="2025" b="1">
                 <a:solidFill>
                   <a:srgbClr val="1B2432"/>
@@ -14385,6 +14200,7 @@
           <a:lstStyle xmlns:a="http://schemas.openxmlformats.org/drawingml/2006/main"/>
           <a:p xmlns:a="http://schemas.openxmlformats.org/drawingml/2006/main">
             <a:pPr>
+              <a:buNone/>
               <a:defRPr sz="1275" b="0">
                 <a:solidFill>
                   <a:srgbClr val="52637B"/>
@@ -14466,7 +14282,7 @@
         </p:spPr>
         <p:txBody>
           <a:bodyPr xmlns:a="http://schemas.openxmlformats.org/drawingml/2006/main" wrap="square" lIns="0" tIns="0" rIns="0" bIns="0" anchor="t">
-            <a:normAutofit/>
+            <a:normAutofit fontScale="100000"/>
           </a:bodyPr>
           <a:lstStyle xmlns:a="http://schemas.openxmlformats.org/drawingml/2006/main"/>
           <a:p xmlns:a="http://schemas.openxmlformats.org/drawingml/2006/main">
@@ -14487,7 +14303,7 @@
             <a:r>
               <a:rPr sz="825" b="0">
                 <a:solidFill>
-                  <a:srgbClr val="657184"/>
+                  <a:srgbClr val="5E6B7D"/>
                 </a:solidFill>
                 <a:latin typeface="Aptos"/>
                 <a:ea typeface="Aptos"/>
@@ -14520,10 +14336,12 @@
           <a:prstGeom xmlns:a="http://schemas.openxmlformats.org/drawingml/2006/main" prst="line">
             <a:avLst/>
           </a:prstGeom>
-          <a:noFill xmlns:a="http://schemas.openxmlformats.org/drawingml/2006/main"/>
-          <a:ln xmlns:a="http://schemas.openxmlformats.org/drawingml/2006/main" w="9525">
+          <a:solidFill xmlns:a="http://schemas.openxmlformats.org/drawingml/2006/main">
+            <a:srgbClr val="8D5560"/>
+          </a:solidFill>
+          <a:ln xmlns:a="http://schemas.openxmlformats.org/drawingml/2006/main" w="7144">
             <a:solidFill>
-              <a:srgbClr val="748092"/>
+              <a:srgbClr val="8D5560"/>
             </a:solidFill>
             <a:prstDash val="solid"/>
           </a:ln>
@@ -14680,7 +14498,7 @@
         </p:spPr>
         <p:txBody>
           <a:bodyPr xmlns:a="http://schemas.openxmlformats.org/drawingml/2006/main" wrap="square" lIns="0" tIns="0" rIns="0" bIns="0" anchor="t">
-            <a:normAutofit/>
+            <a:normAutofit fontScale="100000"/>
           </a:bodyPr>
           <a:lstStyle xmlns:a="http://schemas.openxmlformats.org/drawingml/2006/main"/>
           <a:p xmlns:a="http://schemas.openxmlformats.org/drawingml/2006/main">
@@ -14707,7 +14525,7 @@
                 <a:ea typeface="Aptos"/>
                 <a:cs typeface="Aptos"/>
               </a:rPr>
-              <a:t>Термини, измене и организациона обавештења важе тек када се објаве путем званичних канала предмета.</a:t>
+              <a:t>Термини, измене и организациона обавештења важе након објављивања путем званичних канала предмета.</a:t>
             </a:r>
           </a:p>
         </p:txBody>
@@ -14737,7 +14555,7 @@
             </a:avLst>
           </a:prstGeom>
           <a:solidFill xmlns:a="http://schemas.openxmlformats.org/drawingml/2006/main">
-            <a:srgbClr val="EEF3FF"/>
+            <a:srgbClr val="F7EFF1"/>
           </a:solidFill>
           <a:ln xmlns:a="http://schemas.openxmlformats.org/drawingml/2006/main" w="9525">
             <a:solidFill>
@@ -14803,7 +14621,7 @@
             <a:r>
               <a:rPr sz="1275" b="1">
                 <a:solidFill>
-                  <a:srgbClr val="2F5EF5"/>
+                  <a:srgbClr val="7A2636"/>
                 </a:solidFill>
                 <a:latin typeface="Aptos"/>
                 <a:ea typeface="Aptos"/>
@@ -15218,7 +15036,7 @@
         </p:spPr>
         <p:txBody>
           <a:bodyPr xmlns:a="http://schemas.openxmlformats.org/drawingml/2006/main" wrap="square" lIns="0" tIns="0" rIns="0" bIns="0" anchor="t">
-            <a:normAutofit/>
+            <a:normAutofit fontScale="100000"/>
           </a:bodyPr>
           <a:lstStyle xmlns:a="http://schemas.openxmlformats.org/drawingml/2006/main"/>
           <a:p xmlns:a="http://schemas.openxmlformats.org/drawingml/2006/main">
@@ -15239,7 +15057,7 @@
             <a:r>
               <a:rPr sz="825" b="0">
                 <a:solidFill>
-                  <a:srgbClr val="657184"/>
+                  <a:srgbClr val="5E6B7D"/>
                 </a:solidFill>
                 <a:latin typeface="Aptos"/>
                 <a:ea typeface="Aptos"/>
@@ -15272,10 +15090,12 @@
           <a:prstGeom xmlns:a="http://schemas.openxmlformats.org/drawingml/2006/main" prst="line">
             <a:avLst/>
           </a:prstGeom>
-          <a:noFill xmlns:a="http://schemas.openxmlformats.org/drawingml/2006/main"/>
-          <a:ln xmlns:a="http://schemas.openxmlformats.org/drawingml/2006/main" w="9525">
+          <a:solidFill xmlns:a="http://schemas.openxmlformats.org/drawingml/2006/main">
+            <a:srgbClr val="8D5560"/>
+          </a:solidFill>
+          <a:ln xmlns:a="http://schemas.openxmlformats.org/drawingml/2006/main" w="7144">
             <a:solidFill>
-              <a:srgbClr val="748092"/>
+              <a:srgbClr val="8D5560"/>
             </a:solidFill>
             <a:prstDash val="solid"/>
           </a:ln>
@@ -15371,7 +15191,7 @@
         </p:spPr>
         <p:txBody>
           <a:bodyPr xmlns:a="http://schemas.openxmlformats.org/drawingml/2006/main" wrap="square" lIns="0" tIns="0" rIns="0" bIns="0" anchor="t">
-            <a:normAutofit/>
+            <a:normAutofit fontScale="100000"/>
           </a:bodyPr>
           <a:lstStyle xmlns:a="http://schemas.openxmlformats.org/drawingml/2006/main"/>
           <a:p xmlns:a="http://schemas.openxmlformats.org/drawingml/2006/main">
@@ -15398,7 +15218,7 @@
                 <a:ea typeface="Aptos Display"/>
                 <a:cs typeface="Aptos Display"/>
               </a:rPr>
-              <a:t>Безбедност се гради као доказив ланац</a:t>
+              <a:t>Безбедносни захтев, контрола и доказ</a:t>
             </a:r>
           </a:p>
         </p:txBody>
@@ -15432,7 +15252,7 @@
         </p:spPr>
         <p:txBody>
           <a:bodyPr xmlns:a="http://schemas.openxmlformats.org/drawingml/2006/main" wrap="square" lIns="0" tIns="0" rIns="0" bIns="0" anchor="t">
-            <a:normAutofit/>
+            <a:normAutofit fontScale="100000"/>
           </a:bodyPr>
           <a:lstStyle xmlns:a="http://schemas.openxmlformats.org/drawingml/2006/main"/>
           <a:p xmlns:a="http://schemas.openxmlformats.org/drawingml/2006/main">
@@ -15459,7 +15279,7 @@
                 <a:ea typeface="Aptos"/>
                 <a:cs typeface="Aptos"/>
               </a:rPr>
-              <a:t>Не полазимо од алата, већ од онога што штитимо и начина на који проверавамо одлуку.</a:t>
+              <a:t>Анализа полази од имовине и претње, а завршава се провером изабране контроле.</a:t>
             </a:r>
           </a:p>
         </p:txBody>
@@ -15555,7 +15375,7 @@
             <a:r>
               <a:rPr sz="1238" b="1">
                 <a:solidFill>
-                  <a:srgbClr val="2F5EF5"/>
+                  <a:srgbClr val="7A2636"/>
                 </a:solidFill>
                 <a:latin typeface="Aptos"/>
                 <a:ea typeface="Aptos"/>
@@ -15937,7 +15757,7 @@
             </a:avLst>
           </a:prstGeom>
           <a:solidFill xmlns:a="http://schemas.openxmlformats.org/drawingml/2006/main">
-            <a:srgbClr val="EEF3FF"/>
+            <a:srgbClr val="F7EFF1"/>
           </a:solidFill>
           <a:ln xmlns:a="http://schemas.openxmlformats.org/drawingml/2006/main" w="9525">
             <a:solidFill>
@@ -16003,7 +15823,7 @@
             <a:r>
               <a:rPr sz="1238" b="1">
                 <a:solidFill>
-                  <a:srgbClr val="2F5EF5"/>
+                  <a:srgbClr val="7A2636"/>
                 </a:solidFill>
                 <a:latin typeface="Aptos"/>
                 <a:ea typeface="Aptos"/>
@@ -16161,7 +15981,7 @@
             </a:avLst>
           </a:prstGeom>
           <a:solidFill xmlns:a="http://schemas.openxmlformats.org/drawingml/2006/main">
-            <a:srgbClr val="F5F0FF"/>
+            <a:srgbClr val="F7F4F5"/>
           </a:solidFill>
           <a:ln xmlns:a="http://schemas.openxmlformats.org/drawingml/2006/main" w="9525">
             <a:solidFill>
@@ -16227,7 +16047,7 @@
             <a:r>
               <a:rPr sz="1238" b="1">
                 <a:solidFill>
-                  <a:srgbClr val="7651D4"/>
+                  <a:srgbClr val="7A2636"/>
                 </a:solidFill>
                 <a:latin typeface="Aptos"/>
                 <a:ea typeface="Aptos"/>
@@ -16586,7 +16406,7 @@
       </p:sp>
       <p:cxnSp>
         <p:nvCxnSpPr>
-          <p:cNvPr id="235" name="Straight Arrow Connector 114"/>
+          <p:cNvPr id="351" name="Straight Arrow Connector 114"/>
           <p:cNvCxnSpPr>
             <a:stCxn xmlns:a="http://schemas.openxmlformats.org/drawingml/2006/main" id="6" idx="3"/>
             <a:endCxn xmlns:a="http://schemas.openxmlformats.org/drawingml/2006/main" id="10" idx="1"/>
@@ -16612,7 +16432,7 @@
       </p:cxnSp>
       <p:cxnSp>
         <p:nvCxnSpPr>
-          <p:cNvPr id="236" name="Straight Arrow Connector 115"/>
+          <p:cNvPr id="352" name="Straight Arrow Connector 115"/>
           <p:cNvCxnSpPr>
             <a:stCxn xmlns:a="http://schemas.openxmlformats.org/drawingml/2006/main" id="10" idx="3"/>
             <a:endCxn xmlns:a="http://schemas.openxmlformats.org/drawingml/2006/main" id="14" idx="1"/>
@@ -16638,7 +16458,7 @@
       </p:cxnSp>
       <p:cxnSp>
         <p:nvCxnSpPr>
-          <p:cNvPr id="237" name="Straight Arrow Connector 116"/>
+          <p:cNvPr id="353" name="Straight Arrow Connector 116"/>
           <p:cNvCxnSpPr>
             <a:stCxn xmlns:a="http://schemas.openxmlformats.org/drawingml/2006/main" id="14" idx="3"/>
             <a:endCxn xmlns:a="http://schemas.openxmlformats.org/drawingml/2006/main" id="18" idx="1"/>
@@ -16664,7 +16484,7 @@
       </p:cxnSp>
       <p:cxnSp>
         <p:nvCxnSpPr>
-          <p:cNvPr id="238" name="Straight Arrow Connector 117"/>
+          <p:cNvPr id="354" name="Straight Arrow Connector 117"/>
           <p:cNvCxnSpPr>
             <a:stCxn xmlns:a="http://schemas.openxmlformats.org/drawingml/2006/main" id="18" idx="3"/>
             <a:endCxn xmlns:a="http://schemas.openxmlformats.org/drawingml/2006/main" id="22" idx="1"/>
@@ -16713,11 +16533,11 @@
             </a:avLst>
           </a:prstGeom>
           <a:solidFill xmlns:a="http://schemas.openxmlformats.org/drawingml/2006/main">
-            <a:srgbClr val="EEF3FF"/>
+            <a:srgbClr val="F7EFF1"/>
           </a:solidFill>
           <a:ln xmlns:a="http://schemas.openxmlformats.org/drawingml/2006/main" w="8573">
             <a:solidFill>
-              <a:srgbClr val="CAD7F2"/>
+              <a:srgbClr val="DBC7CC"/>
             </a:solidFill>
             <a:prstDash val="solid"/>
           </a:ln>
@@ -16748,7 +16568,7 @@
             </a:avLst>
           </a:prstGeom>
           <a:solidFill xmlns:a="http://schemas.openxmlformats.org/drawingml/2006/main">
-            <a:srgbClr val="2F5EF5"/>
+            <a:srgbClr val="7A2636"/>
           </a:solidFill>
           <a:ln xmlns:a="http://schemas.openxmlformats.org/drawingml/2006/main" w="0">
             <a:noFill/>
@@ -16789,6 +16609,7 @@
           <a:lstStyle xmlns:a="http://schemas.openxmlformats.org/drawingml/2006/main"/>
           <a:p xmlns:a="http://schemas.openxmlformats.org/drawingml/2006/main">
             <a:pPr>
+              <a:buNone/>
               <a:defRPr sz="1200" b="1">
                 <a:solidFill>
                   <a:srgbClr val="2F5EF5"/>
@@ -16801,7 +16622,7 @@
             <a:r>
               <a:rPr sz="1200" b="1">
                 <a:solidFill>
-                  <a:srgbClr val="2F5EF5"/>
+                  <a:srgbClr val="7A2636"/>
                 </a:solidFill>
                 <a:latin typeface="Aptos"/>
                 <a:ea typeface="Aptos"/>
@@ -16846,6 +16667,7 @@
           <a:lstStyle xmlns:a="http://schemas.openxmlformats.org/drawingml/2006/main"/>
           <a:p xmlns:a="http://schemas.openxmlformats.org/drawingml/2006/main">
             <a:pPr>
+              <a:buNone/>
               <a:defRPr sz="1425" b="1">
                 <a:solidFill>
                   <a:srgbClr val="1B2432"/>
@@ -16927,7 +16749,7 @@
         </p:spPr>
         <p:txBody>
           <a:bodyPr xmlns:a="http://schemas.openxmlformats.org/drawingml/2006/main" wrap="square" lIns="0" tIns="0" rIns="0" bIns="0" anchor="t">
-            <a:normAutofit/>
+            <a:normAutofit fontScale="100000"/>
           </a:bodyPr>
           <a:lstStyle xmlns:a="http://schemas.openxmlformats.org/drawingml/2006/main"/>
           <a:p xmlns:a="http://schemas.openxmlformats.org/drawingml/2006/main">
@@ -16948,7 +16770,7 @@
             <a:r>
               <a:rPr sz="825" b="0">
                 <a:solidFill>
-                  <a:srgbClr val="657184"/>
+                  <a:srgbClr val="5E6B7D"/>
                 </a:solidFill>
                 <a:latin typeface="Aptos"/>
                 <a:ea typeface="Aptos"/>
@@ -16981,10 +16803,12 @@
           <a:prstGeom xmlns:a="http://schemas.openxmlformats.org/drawingml/2006/main" prst="line">
             <a:avLst/>
           </a:prstGeom>
-          <a:noFill xmlns:a="http://schemas.openxmlformats.org/drawingml/2006/main"/>
-          <a:ln xmlns:a="http://schemas.openxmlformats.org/drawingml/2006/main" w="9525">
+          <a:solidFill xmlns:a="http://schemas.openxmlformats.org/drawingml/2006/main">
+            <a:srgbClr val="8D5560"/>
+          </a:solidFill>
+          <a:ln xmlns:a="http://schemas.openxmlformats.org/drawingml/2006/main" w="7144">
             <a:solidFill>
-              <a:srgbClr val="748092"/>
+              <a:srgbClr val="8D5560"/>
             </a:solidFill>
             <a:prstDash val="solid"/>
           </a:ln>
@@ -17080,7 +16904,7 @@
         </p:spPr>
         <p:txBody>
           <a:bodyPr xmlns:a="http://schemas.openxmlformats.org/drawingml/2006/main" wrap="square" lIns="0" tIns="0" rIns="0" bIns="0" anchor="t">
-            <a:normAutofit/>
+            <a:normAutofit fontScale="100000"/>
           </a:bodyPr>
           <a:lstStyle xmlns:a="http://schemas.openxmlformats.org/drawingml/2006/main"/>
           <a:p xmlns:a="http://schemas.openxmlformats.org/drawingml/2006/main">
@@ -17107,7 +16931,7 @@
                 <a:ea typeface="Aptos Display"/>
                 <a:cs typeface="Aptos Display"/>
               </a:rPr>
-              <a:t>Први кораци</a:t>
+              <a:t>Организација рада на почетку семестра</a:t>
             </a:r>
           </a:p>
         </p:txBody>
@@ -17141,7 +16965,7 @@
         </p:spPr>
         <p:txBody>
           <a:bodyPr xmlns:a="http://schemas.openxmlformats.org/drawingml/2006/main" wrap="square" lIns="0" tIns="0" rIns="0" bIns="0" anchor="t">
-            <a:normAutofit/>
+            <a:normAutofit fontScale="100000"/>
           </a:bodyPr>
           <a:lstStyle xmlns:a="http://schemas.openxmlformats.org/drawingml/2006/main"/>
           <a:p xmlns:a="http://schemas.openxmlformats.org/drawingml/2006/main">
@@ -17168,7 +16992,7 @@
                 <a:ea typeface="Aptos"/>
                 <a:cs typeface="Aptos"/>
               </a:rPr>
-              <a:t>Почетак семестра служи да тим постави основу за проверљив и континуиран рад.</a:t>
+              <a:t>Тим на почетку семестра дефинише одговорности, репозиторијум, границу пројектне целине и почетни backlog.</a:t>
             </a:r>
           </a:p>
         </p:txBody>
@@ -17264,7 +17088,7 @@
             <a:r>
               <a:rPr sz="1238" b="1">
                 <a:solidFill>
-                  <a:srgbClr val="2F5EF5"/>
+                  <a:srgbClr val="7A2636"/>
                 </a:solidFill>
                 <a:latin typeface="Aptos"/>
                 <a:ea typeface="Aptos"/>
@@ -17422,7 +17246,7 @@
             </a:avLst>
           </a:prstGeom>
           <a:solidFill xmlns:a="http://schemas.openxmlformats.org/drawingml/2006/main">
-            <a:srgbClr val="EEF3FF"/>
+            <a:srgbClr val="F7EFF1"/>
           </a:solidFill>
           <a:ln xmlns:a="http://schemas.openxmlformats.org/drawingml/2006/main" w="9525">
             <a:solidFill>
@@ -17488,7 +17312,7 @@
             <a:r>
               <a:rPr sz="1238" b="1">
                 <a:solidFill>
-                  <a:srgbClr val="2F5EF5"/>
+                  <a:srgbClr val="7A2636"/>
                 </a:solidFill>
                 <a:latin typeface="Aptos"/>
                 <a:ea typeface="Aptos"/>
@@ -17646,7 +17470,7 @@
             </a:avLst>
           </a:prstGeom>
           <a:solidFill xmlns:a="http://schemas.openxmlformats.org/drawingml/2006/main">
-            <a:srgbClr val="F5F0FF"/>
+            <a:srgbClr val="F7F4F5"/>
           </a:solidFill>
           <a:ln xmlns:a="http://schemas.openxmlformats.org/drawingml/2006/main" w="9525">
             <a:solidFill>
@@ -17712,7 +17536,7 @@
             <a:r>
               <a:rPr sz="1238" b="1">
                 <a:solidFill>
-                  <a:srgbClr val="7651D4"/>
+                  <a:srgbClr val="7A2636"/>
                 </a:solidFill>
                 <a:latin typeface="Aptos"/>
                 <a:ea typeface="Aptos"/>
@@ -18071,7 +17895,7 @@
       </p:sp>
       <p:cxnSp>
         <p:nvCxnSpPr>
-          <p:cNvPr id="193" name="Straight Arrow Connector 96"/>
+          <p:cNvPr id="289" name="Straight Arrow Connector 96"/>
           <p:cNvCxnSpPr>
             <a:stCxn xmlns:a="http://schemas.openxmlformats.org/drawingml/2006/main" id="6" idx="3"/>
             <a:endCxn xmlns:a="http://schemas.openxmlformats.org/drawingml/2006/main" id="10" idx="1"/>
@@ -18097,7 +17921,7 @@
       </p:cxnSp>
       <p:cxnSp>
         <p:nvCxnSpPr>
-          <p:cNvPr id="194" name="Straight Arrow Connector 97"/>
+          <p:cNvPr id="290" name="Straight Arrow Connector 97"/>
           <p:cNvCxnSpPr>
             <a:stCxn xmlns:a="http://schemas.openxmlformats.org/drawingml/2006/main" id="10" idx="3"/>
             <a:endCxn xmlns:a="http://schemas.openxmlformats.org/drawingml/2006/main" id="14" idx="1"/>
@@ -18123,7 +17947,7 @@
       </p:cxnSp>
       <p:cxnSp>
         <p:nvCxnSpPr>
-          <p:cNvPr id="195" name="Straight Arrow Connector 98"/>
+          <p:cNvPr id="291" name="Straight Arrow Connector 98"/>
           <p:cNvCxnSpPr>
             <a:stCxn xmlns:a="http://schemas.openxmlformats.org/drawingml/2006/main" id="14" idx="3"/>
             <a:endCxn xmlns:a="http://schemas.openxmlformats.org/drawingml/2006/main" id="18" idx="1"/>
@@ -18362,7 +18186,7 @@
         </p:spPr>
         <p:txBody>
           <a:bodyPr xmlns:a="http://schemas.openxmlformats.org/drawingml/2006/main" wrap="square" lIns="0" tIns="0" rIns="0" bIns="0" anchor="t">
-            <a:normAutofit/>
+            <a:normAutofit fontScale="100000"/>
           </a:bodyPr>
           <a:lstStyle xmlns:a="http://schemas.openxmlformats.org/drawingml/2006/main"/>
           <a:p xmlns:a="http://schemas.openxmlformats.org/drawingml/2006/main">
@@ -18383,7 +18207,7 @@
             <a:r>
               <a:rPr sz="825" b="0">
                 <a:solidFill>
-                  <a:srgbClr val="657184"/>
+                  <a:srgbClr val="5E6B7D"/>
                 </a:solidFill>
                 <a:latin typeface="Aptos"/>
                 <a:ea typeface="Aptos"/>
@@ -18416,10 +18240,12 @@
           <a:prstGeom xmlns:a="http://schemas.openxmlformats.org/drawingml/2006/main" prst="line">
             <a:avLst/>
           </a:prstGeom>
-          <a:noFill xmlns:a="http://schemas.openxmlformats.org/drawingml/2006/main"/>
-          <a:ln xmlns:a="http://schemas.openxmlformats.org/drawingml/2006/main" w="9525">
+          <a:solidFill xmlns:a="http://schemas.openxmlformats.org/drawingml/2006/main">
+            <a:srgbClr val="8D5560"/>
+          </a:solidFill>
+          <a:ln xmlns:a="http://schemas.openxmlformats.org/drawingml/2006/main" w="7144">
             <a:solidFill>
-              <a:srgbClr val="748092"/>
+              <a:srgbClr val="8D5560"/>
             </a:solidFill>
             <a:prstDash val="solid"/>
           </a:ln>
@@ -18515,7 +18341,7 @@
         </p:spPr>
         <p:txBody>
           <a:bodyPr xmlns:a="http://schemas.openxmlformats.org/drawingml/2006/main" wrap="square" lIns="0" tIns="0" rIns="0" bIns="0" anchor="t">
-            <a:normAutofit/>
+            <a:normAutofit fontScale="100000"/>
           </a:bodyPr>
           <a:lstStyle xmlns:a="http://schemas.openxmlformats.org/drawingml/2006/main"/>
           <a:p xmlns:a="http://schemas.openxmlformats.org/drawingml/2006/main">
@@ -18542,7 +18368,7 @@
                 <a:ea typeface="Aptos Display"/>
                 <a:cs typeface="Aptos Display"/>
               </a:rPr>
-              <a:t>Два начина полагања</a:t>
+              <a:t>Начини полагања</a:t>
             </a:r>
           </a:p>
         </p:txBody>
@@ -18576,7 +18402,7 @@
         </p:spPr>
         <p:txBody>
           <a:bodyPr xmlns:a="http://schemas.openxmlformats.org/drawingml/2006/main" wrap="square" lIns="0" tIns="0" rIns="0" bIns="0" anchor="t">
-            <a:normAutofit/>
+            <a:normAutofit fontScale="95307"/>
           </a:bodyPr>
           <a:lstStyle xmlns:a="http://schemas.openxmlformats.org/drawingml/2006/main"/>
           <a:p xmlns:a="http://schemas.openxmlformats.org/drawingml/2006/main">
@@ -18603,7 +18429,7 @@
                 <a:ea typeface="Aptos"/>
                 <a:cs typeface="Aptos"/>
               </a:rPr>
-              <a:t>Оба пута завршавају се усменим испитом; разлика је у обиму пројекта и елиминационом тесту.</a:t>
+              <a:t>Оба начина завршавају се усменим испитом. Разликују се по обиму пројекта и обавези полагања елиминационог теста.</a:t>
             </a:r>
           </a:p>
         </p:txBody>
@@ -18633,7 +18459,7 @@
             </a:avLst>
           </a:prstGeom>
           <a:solidFill xmlns:a="http://schemas.openxmlformats.org/drawingml/2006/main">
-            <a:srgbClr val="EEF3FF"/>
+            <a:srgbClr val="F7EFF1"/>
           </a:solidFill>
           <a:ln xmlns:a="http://schemas.openxmlformats.org/drawingml/2006/main" w="9525">
             <a:solidFill>
@@ -18699,7 +18525,7 @@
             <a:r>
               <a:rPr sz="1275" b="1">
                 <a:solidFill>
-                  <a:srgbClr val="2F5EF5"/>
+                  <a:srgbClr val="7A2636"/>
                 </a:solidFill>
                 <a:latin typeface="Aptos"/>
                 <a:ea typeface="Aptos"/>
@@ -19304,7 +19130,7 @@
             </a:avLst>
           </a:prstGeom>
           <a:solidFill xmlns:a="http://schemas.openxmlformats.org/drawingml/2006/main">
-            <a:srgbClr val="EEF3FF"/>
+            <a:srgbClr val="F7EFF1"/>
           </a:solidFill>
           <a:ln xmlns:a="http://schemas.openxmlformats.org/drawingml/2006/main" w="9525">
             <a:solidFill>
@@ -19370,7 +19196,7 @@
             <a:r>
               <a:rPr sz="2250" b="1">
                 <a:solidFill>
-                  <a:srgbClr val="2F5EF5"/>
+                  <a:srgbClr val="7A2636"/>
                 </a:solidFill>
                 <a:latin typeface="Aptos Display"/>
                 <a:ea typeface="Aptos Display"/>
@@ -19431,7 +19257,7 @@
             <a:r>
               <a:rPr sz="1238" b="1">
                 <a:solidFill>
-                  <a:srgbClr val="2F5EF5"/>
+                  <a:srgbClr val="7A2636"/>
                 </a:solidFill>
                 <a:latin typeface="Aptos"/>
                 <a:ea typeface="Aptos"/>
@@ -19826,7 +19652,7 @@
         </p:spPr>
         <p:txBody>
           <a:bodyPr xmlns:a="http://schemas.openxmlformats.org/drawingml/2006/main" wrap="square" lIns="0" tIns="0" rIns="0" bIns="0" anchor="t">
-            <a:normAutofit/>
+            <a:normAutofit fontScale="100000"/>
           </a:bodyPr>
           <a:lstStyle xmlns:a="http://schemas.openxmlformats.org/drawingml/2006/main"/>
           <a:p xmlns:a="http://schemas.openxmlformats.org/drawingml/2006/main">
@@ -19847,7 +19673,7 @@
             <a:r>
               <a:rPr sz="825" b="0">
                 <a:solidFill>
-                  <a:srgbClr val="657184"/>
+                  <a:srgbClr val="5E6B7D"/>
                 </a:solidFill>
                 <a:latin typeface="Aptos"/>
                 <a:ea typeface="Aptos"/>
@@ -19880,10 +19706,12 @@
           <a:prstGeom xmlns:a="http://schemas.openxmlformats.org/drawingml/2006/main" prst="line">
             <a:avLst/>
           </a:prstGeom>
-          <a:noFill xmlns:a="http://schemas.openxmlformats.org/drawingml/2006/main"/>
-          <a:ln xmlns:a="http://schemas.openxmlformats.org/drawingml/2006/main" w="9525">
+          <a:solidFill xmlns:a="http://schemas.openxmlformats.org/drawingml/2006/main">
+            <a:srgbClr val="8D5560"/>
+          </a:solidFill>
+          <a:ln xmlns:a="http://schemas.openxmlformats.org/drawingml/2006/main" w="7144">
             <a:solidFill>
-              <a:srgbClr val="748092"/>
+              <a:srgbClr val="8D5560"/>
             </a:solidFill>
             <a:prstDash val="solid"/>
           </a:ln>
@@ -20040,7 +19868,7 @@
         </p:spPr>
         <p:txBody>
           <a:bodyPr xmlns:a="http://schemas.openxmlformats.org/drawingml/2006/main" wrap="square" lIns="0" tIns="0" rIns="0" bIns="0" anchor="t">
-            <a:normAutofit/>
+            <a:normAutofit fontScale="100000"/>
           </a:bodyPr>
           <a:lstStyle xmlns:a="http://schemas.openxmlformats.org/drawingml/2006/main"/>
           <a:p xmlns:a="http://schemas.openxmlformats.org/drawingml/2006/main">
@@ -20067,7 +19895,7 @@
                 <a:ea typeface="Aptos"/>
                 <a:cs typeface="Aptos"/>
               </a:rPr>
-              <a:t>Бодови се сабирају до максимума 100; додатни бодови не замењују обавезне компоненте.</a:t>
+              <a:t>Бодови се сабирају до максимума од 100. Додатни бодови не замењују обавезне компоненте.</a:t>
             </a:r>
           </a:p>
         </p:txBody>
@@ -20463,7 +20291,7 @@
             </a:avLst>
           </a:prstGeom>
           <a:solidFill xmlns:a="http://schemas.openxmlformats.org/drawingml/2006/main">
-            <a:srgbClr val="EEF3FF"/>
+            <a:srgbClr val="F7EFF1"/>
           </a:solidFill>
           <a:ln xmlns:a="http://schemas.openxmlformats.org/drawingml/2006/main" w="9525">
             <a:solidFill>
@@ -20813,7 +20641,7 @@
         </p:spPr>
         <p:txBody>
           <a:bodyPr xmlns:a="http://schemas.openxmlformats.org/drawingml/2006/main" wrap="square" lIns="0" tIns="0" rIns="0" bIns="0" anchor="ctr">
-            <a:normAutofit/>
+            <a:normAutofit fontScale="100000"/>
           </a:bodyPr>
           <a:lstStyle xmlns:a="http://schemas.openxmlformats.org/drawingml/2006/main"/>
           <a:p xmlns:a="http://schemas.openxmlformats.org/drawingml/2006/main">
@@ -20834,7 +20662,7 @@
             <a:r>
               <a:rPr sz="1425" b="1">
                 <a:solidFill>
-                  <a:srgbClr val="2F5EF5"/>
+                  <a:srgbClr val="7A2636"/>
                 </a:solidFill>
                 <a:latin typeface="Aptos"/>
                 <a:ea typeface="Aptos"/>
@@ -21316,7 +21144,7 @@
         </p:spPr>
         <p:txBody>
           <a:bodyPr xmlns:a="http://schemas.openxmlformats.org/drawingml/2006/main" wrap="square" lIns="0" tIns="0" rIns="0" bIns="0" anchor="ctr">
-            <a:normAutofit/>
+            <a:normAutofit fontScale="100000"/>
           </a:bodyPr>
           <a:lstStyle xmlns:a="http://schemas.openxmlformats.org/drawingml/2006/main"/>
           <a:p xmlns:a="http://schemas.openxmlformats.org/drawingml/2006/main">
@@ -21343,7 +21171,7 @@
                 <a:ea typeface="Aptos"/>
                 <a:cs typeface="Aptos"/>
               </a:rPr>
-              <a:t>Кључно правило</a:t>
+              <a:t>УСЛОВ БОДОВАЊА</a:t>
             </a:r>
           </a:p>
         </p:txBody>
@@ -21467,7 +21295,7 @@
         </p:spPr>
         <p:txBody>
           <a:bodyPr xmlns:a="http://schemas.openxmlformats.org/drawingml/2006/main" wrap="square" lIns="0" tIns="0" rIns="0" bIns="0" anchor="t">
-            <a:normAutofit/>
+            <a:normAutofit fontScale="100000"/>
           </a:bodyPr>
           <a:lstStyle xmlns:a="http://schemas.openxmlformats.org/drawingml/2006/main"/>
           <a:p xmlns:a="http://schemas.openxmlformats.org/drawingml/2006/main">
@@ -21488,7 +21316,7 @@
             <a:r>
               <a:rPr sz="825" b="0">
                 <a:solidFill>
-                  <a:srgbClr val="657184"/>
+                  <a:srgbClr val="5E6B7D"/>
                 </a:solidFill>
                 <a:latin typeface="Aptos"/>
                 <a:ea typeface="Aptos"/>
@@ -21521,10 +21349,12 @@
           <a:prstGeom xmlns:a="http://schemas.openxmlformats.org/drawingml/2006/main" prst="line">
             <a:avLst/>
           </a:prstGeom>
-          <a:noFill xmlns:a="http://schemas.openxmlformats.org/drawingml/2006/main"/>
-          <a:ln xmlns:a="http://schemas.openxmlformats.org/drawingml/2006/main" w="9525">
+          <a:solidFill xmlns:a="http://schemas.openxmlformats.org/drawingml/2006/main">
+            <a:srgbClr val="8D5560"/>
+          </a:solidFill>
+          <a:ln xmlns:a="http://schemas.openxmlformats.org/drawingml/2006/main" w="7144">
             <a:solidFill>
-              <a:srgbClr val="748092"/>
+              <a:srgbClr val="8D5560"/>
             </a:solidFill>
             <a:prstDash val="solid"/>
           </a:ln>
@@ -21620,7 +21450,7 @@
         </p:spPr>
         <p:txBody>
           <a:bodyPr xmlns:a="http://schemas.openxmlformats.org/drawingml/2006/main" wrap="square" lIns="0" tIns="0" rIns="0" bIns="0" anchor="t">
-            <a:normAutofit/>
+            <a:normAutofit fontScale="100000"/>
           </a:bodyPr>
           <a:lstStyle xmlns:a="http://schemas.openxmlformats.org/drawingml/2006/main"/>
           <a:p xmlns:a="http://schemas.openxmlformats.org/drawingml/2006/main">
@@ -21647,7 +21477,7 @@
                 <a:ea typeface="Aptos Display"/>
                 <a:cs typeface="Aptos Display"/>
               </a:rPr>
-              <a:t>Коначна оцена зависи од укупног збира</a:t>
+              <a:t>Формирање коначне оцене</a:t>
             </a:r>
           </a:p>
         </p:txBody>
@@ -21681,7 +21511,7 @@
         </p:spPr>
         <p:txBody>
           <a:bodyPr xmlns:a="http://schemas.openxmlformats.org/drawingml/2006/main" wrap="square" lIns="0" tIns="0" rIns="0" bIns="0" anchor="t">
-            <a:normAutofit/>
+            <a:normAutofit fontScale="100000"/>
           </a:bodyPr>
           <a:lstStyle xmlns:a="http://schemas.openxmlformats.org/drawingml/2006/main"/>
           <a:p xmlns:a="http://schemas.openxmlformats.org/drawingml/2006/main">
@@ -21708,7 +21538,7 @@
                 <a:ea typeface="Aptos"/>
                 <a:cs typeface="Aptos"/>
               </a:rPr>
-              <a:t>Распон је једноставан: сваких десет бодова подиже оцену за један ниво.</a:t>
+              <a:t>Оцена се утврђује на основу укупног броја бодова након испуњења свих обавезних компоненти.</a:t>
             </a:r>
           </a:p>
         </p:txBody>
@@ -21738,7 +21568,7 @@
             </a:avLst>
           </a:prstGeom>
           <a:solidFill xmlns:a="http://schemas.openxmlformats.org/drawingml/2006/main">
-            <a:srgbClr val="EEF3FF"/>
+            <a:srgbClr val="F7EFF1"/>
           </a:solidFill>
           <a:ln xmlns:a="http://schemas.openxmlformats.org/drawingml/2006/main" w="9525">
             <a:solidFill>
@@ -21783,7 +21613,7 @@
         </p:spPr>
         <p:txBody>
           <a:bodyPr xmlns:a="http://schemas.openxmlformats.org/drawingml/2006/main" wrap="square" lIns="0" tIns="0" rIns="0" bIns="0" anchor="ctr">
-            <a:normAutofit/>
+            <a:normAutofit fontScale="100000"/>
           </a:bodyPr>
           <a:lstStyle xmlns:a="http://schemas.openxmlformats.org/drawingml/2006/main"/>
           <a:p xmlns:a="http://schemas.openxmlformats.org/drawingml/2006/main">
@@ -21804,7 +21634,7 @@
             <a:r>
               <a:rPr sz="1650" b="1">
                 <a:solidFill>
-                  <a:srgbClr val="2F5EF5"/>
+                  <a:srgbClr val="7A2636"/>
                 </a:solidFill>
                 <a:latin typeface="Aptos"/>
                 <a:ea typeface="Aptos"/>
@@ -22410,7 +22240,7 @@
             </a:avLst>
           </a:prstGeom>
           <a:solidFill xmlns:a="http://schemas.openxmlformats.org/drawingml/2006/main">
-            <a:srgbClr val="F5F0FF"/>
+            <a:srgbClr val="F7F4F5"/>
           </a:solidFill>
           <a:ln xmlns:a="http://schemas.openxmlformats.org/drawingml/2006/main" w="9525">
             <a:solidFill>
@@ -22455,7 +22285,7 @@
         </p:spPr>
         <p:txBody>
           <a:bodyPr xmlns:a="http://schemas.openxmlformats.org/drawingml/2006/main" wrap="square" lIns="0" tIns="0" rIns="0" bIns="0" anchor="ctr">
-            <a:normAutofit/>
+            <a:normAutofit fontScale="100000"/>
           </a:bodyPr>
           <a:lstStyle xmlns:a="http://schemas.openxmlformats.org/drawingml/2006/main"/>
           <a:p xmlns:a="http://schemas.openxmlformats.org/drawingml/2006/main">
@@ -22476,7 +22306,7 @@
             <a:r>
               <a:rPr sz="1650" b="1">
                 <a:solidFill>
-                  <a:srgbClr val="7651D4"/>
+                  <a:srgbClr val="7A2636"/>
                 </a:solidFill>
                 <a:latin typeface="Aptos"/>
                 <a:ea typeface="Aptos"/>
@@ -22858,11 +22688,11 @@
             </a:avLst>
           </a:prstGeom>
           <a:solidFill xmlns:a="http://schemas.openxmlformats.org/drawingml/2006/main">
-            <a:srgbClr val="EEF3FF"/>
+            <a:srgbClr val="F7EFF1"/>
           </a:solidFill>
           <a:ln xmlns:a="http://schemas.openxmlformats.org/drawingml/2006/main" w="8573">
             <a:solidFill>
-              <a:srgbClr val="CAD7F2"/>
+              <a:srgbClr val="DBC7CC"/>
             </a:solidFill>
             <a:prstDash val="solid"/>
           </a:ln>
@@ -22893,7 +22723,7 @@
             </a:avLst>
           </a:prstGeom>
           <a:solidFill xmlns:a="http://schemas.openxmlformats.org/drawingml/2006/main">
-            <a:srgbClr val="2F5EF5"/>
+            <a:srgbClr val="7A2636"/>
           </a:solidFill>
           <a:ln xmlns:a="http://schemas.openxmlformats.org/drawingml/2006/main" w="0">
             <a:noFill/>
@@ -22934,6 +22764,7 @@
           <a:lstStyle xmlns:a="http://schemas.openxmlformats.org/drawingml/2006/main"/>
           <a:p xmlns:a="http://schemas.openxmlformats.org/drawingml/2006/main">
             <a:pPr>
+              <a:buNone/>
               <a:defRPr sz="1200" b="1">
                 <a:solidFill>
                   <a:srgbClr val="2F5EF5"/>
@@ -22946,7 +22777,7 @@
             <a:r>
               <a:rPr sz="1200" b="1">
                 <a:solidFill>
-                  <a:srgbClr val="2F5EF5"/>
+                  <a:srgbClr val="7A2636"/>
                 </a:solidFill>
                 <a:latin typeface="Aptos"/>
                 <a:ea typeface="Aptos"/>
@@ -22991,6 +22822,7 @@
           <a:lstStyle xmlns:a="http://schemas.openxmlformats.org/drawingml/2006/main"/>
           <a:p xmlns:a="http://schemas.openxmlformats.org/drawingml/2006/main">
             <a:pPr>
+              <a:buNone/>
               <a:defRPr sz="1388" b="1">
                 <a:solidFill>
                   <a:srgbClr val="1B2432"/>
@@ -23009,7 +22841,7 @@
                 <a:ea typeface="Aptos"/>
                 <a:cs typeface="Aptos"/>
               </a:rPr>
-              <a:t>Прво се испуњавају обавезе изабраног начина полагања; тек затим укупан број бодова одређује оцену.</a:t>
+              <a:t>Прво се испуњавају обавезе изабраног начина полагања. тек затим укупан број бодова одређује оцену.</a:t>
             </a:r>
           </a:p>
         </p:txBody>
@@ -23072,7 +22904,7 @@
         </p:spPr>
         <p:txBody>
           <a:bodyPr xmlns:a="http://schemas.openxmlformats.org/drawingml/2006/main" wrap="square" lIns="0" tIns="0" rIns="0" bIns="0" anchor="t">
-            <a:normAutofit/>
+            <a:normAutofit fontScale="100000"/>
           </a:bodyPr>
           <a:lstStyle xmlns:a="http://schemas.openxmlformats.org/drawingml/2006/main"/>
           <a:p xmlns:a="http://schemas.openxmlformats.org/drawingml/2006/main">
@@ -23093,7 +22925,7 @@
             <a:r>
               <a:rPr sz="825" b="0">
                 <a:solidFill>
-                  <a:srgbClr val="657184"/>
+                  <a:srgbClr val="5E6B7D"/>
                 </a:solidFill>
                 <a:latin typeface="Aptos"/>
                 <a:ea typeface="Aptos"/>
@@ -23126,10 +22958,12 @@
           <a:prstGeom xmlns:a="http://schemas.openxmlformats.org/drawingml/2006/main" prst="line">
             <a:avLst/>
           </a:prstGeom>
-          <a:noFill xmlns:a="http://schemas.openxmlformats.org/drawingml/2006/main"/>
-          <a:ln xmlns:a="http://schemas.openxmlformats.org/drawingml/2006/main" w="9525">
+          <a:solidFill xmlns:a="http://schemas.openxmlformats.org/drawingml/2006/main">
+            <a:srgbClr val="8D5560"/>
+          </a:solidFill>
+          <a:ln xmlns:a="http://schemas.openxmlformats.org/drawingml/2006/main" w="7144">
             <a:solidFill>
-              <a:srgbClr val="748092"/>
+              <a:srgbClr val="8D5560"/>
             </a:solidFill>
             <a:prstDash val="solid"/>
           </a:ln>
@@ -23225,7 +23059,7 @@
         </p:spPr>
         <p:txBody>
           <a:bodyPr xmlns:a="http://schemas.openxmlformats.org/drawingml/2006/main" wrap="square" lIns="0" tIns="0" rIns="0" bIns="0" anchor="t">
-            <a:normAutofit/>
+            <a:normAutofit fontScale="100000"/>
           </a:bodyPr>
           <a:lstStyle xmlns:a="http://schemas.openxmlformats.org/drawingml/2006/main"/>
           <a:p xmlns:a="http://schemas.openxmlformats.org/drawingml/2006/main">
@@ -23252,7 +23086,7 @@
                 <a:ea typeface="Aptos Display"/>
                 <a:cs typeface="Aptos Display"/>
               </a:rPr>
-              <a:t>Пројекат је континуиран рад, не изолована апликација</a:t>
+              <a:t>Организација пројектног рада</a:t>
             </a:r>
           </a:p>
         </p:txBody>
@@ -23286,7 +23120,7 @@
         </p:spPr>
         <p:txBody>
           <a:bodyPr xmlns:a="http://schemas.openxmlformats.org/drawingml/2006/main" wrap="square" lIns="0" tIns="0" rIns="0" bIns="0" anchor="t">
-            <a:normAutofit/>
+            <a:normAutofit fontScale="100000"/>
           </a:bodyPr>
           <a:lstStyle xmlns:a="http://schemas.openxmlformats.org/drawingml/2006/main"/>
           <a:p xmlns:a="http://schemas.openxmlformats.org/drawingml/2006/main">
@@ -23313,7 +23147,7 @@
                 <a:ea typeface="Aptos"/>
                 <a:cs typeface="Aptos"/>
               </a:rPr>
-              <a:t>Редован пројекат се развија у систему SCUTUM и наставља рад претходних генерација.</a:t>
+              <a:t>Редован пројекат развија се у систему SCUTUM и наставља рад претходних генерација.</a:t>
             </a:r>
           </a:p>
         </p:txBody>
@@ -23343,7 +23177,7 @@
             </a:avLst>
           </a:prstGeom>
           <a:solidFill xmlns:a="http://schemas.openxmlformats.org/drawingml/2006/main">
-            <a:srgbClr val="EEF3FF"/>
+            <a:srgbClr val="F7EFF1"/>
           </a:solidFill>
           <a:ln xmlns:a="http://schemas.openxmlformats.org/drawingml/2006/main" w="9525">
             <a:solidFill>
@@ -23409,7 +23243,7 @@
             <a:r>
               <a:rPr sz="1275" b="1">
                 <a:solidFill>
-                  <a:srgbClr val="2F5EF5"/>
+                  <a:srgbClr val="7A2636"/>
                 </a:solidFill>
                 <a:latin typeface="Aptos"/>
                 <a:ea typeface="Aptos"/>
@@ -24015,11 +23849,11 @@
             </a:avLst>
           </a:prstGeom>
           <a:solidFill xmlns:a="http://schemas.openxmlformats.org/drawingml/2006/main">
-            <a:srgbClr val="EEF3FF"/>
+            <a:srgbClr val="F7EFF1"/>
           </a:solidFill>
           <a:ln xmlns:a="http://schemas.openxmlformats.org/drawingml/2006/main" w="8573">
             <a:solidFill>
-              <a:srgbClr val="CAD7F2"/>
+              <a:srgbClr val="DBC7CC"/>
             </a:solidFill>
             <a:prstDash val="solid"/>
           </a:ln>
@@ -24050,7 +23884,7 @@
             </a:avLst>
           </a:prstGeom>
           <a:solidFill xmlns:a="http://schemas.openxmlformats.org/drawingml/2006/main">
-            <a:srgbClr val="2F5EF5"/>
+            <a:srgbClr val="7A2636"/>
           </a:solidFill>
           <a:ln xmlns:a="http://schemas.openxmlformats.org/drawingml/2006/main" w="0">
             <a:noFill/>
@@ -24091,6 +23925,7 @@
           <a:lstStyle xmlns:a="http://schemas.openxmlformats.org/drawingml/2006/main"/>
           <a:p xmlns:a="http://schemas.openxmlformats.org/drawingml/2006/main">
             <a:pPr>
+              <a:buNone/>
               <a:defRPr sz="1200" b="1">
                 <a:solidFill>
                   <a:srgbClr val="2F5EF5"/>
@@ -24103,7 +23938,7 @@
             <a:r>
               <a:rPr sz="1200" b="1">
                 <a:solidFill>
-                  <a:srgbClr val="2F5EF5"/>
+                  <a:srgbClr val="7A2636"/>
                 </a:solidFill>
                 <a:latin typeface="Aptos"/>
                 <a:ea typeface="Aptos"/>
@@ -24148,6 +23983,7 @@
           <a:lstStyle xmlns:a="http://schemas.openxmlformats.org/drawingml/2006/main"/>
           <a:p xmlns:a="http://schemas.openxmlformats.org/drawingml/2006/main">
             <a:pPr>
+              <a:buNone/>
               <a:defRPr sz="1350" b="1">
                 <a:solidFill>
                   <a:srgbClr val="1B2432"/>
@@ -24166,7 +24002,7 @@
                 <a:ea typeface="Aptos"/>
                 <a:cs typeface="Aptos"/>
               </a:rPr>
-              <a:t>Супер пројекат је практични део дипломског рада, непосредно повезан са информационом безбедношћу; тема и обим се утврђују пре почетка.</a:t>
+              <a:t>Супер пројекат је практични део дипломског рада, непосредно повезан са информационом безбедношћу. тема и обим се утврђују пре почетка.</a:t>
             </a:r>
           </a:p>
         </p:txBody>
@@ -24229,7 +24065,7 @@
         </p:spPr>
         <p:txBody>
           <a:bodyPr xmlns:a="http://schemas.openxmlformats.org/drawingml/2006/main" wrap="square" lIns="0" tIns="0" rIns="0" bIns="0" anchor="t">
-            <a:normAutofit/>
+            <a:normAutofit fontScale="100000"/>
           </a:bodyPr>
           <a:lstStyle xmlns:a="http://schemas.openxmlformats.org/drawingml/2006/main"/>
           <a:p xmlns:a="http://schemas.openxmlformats.org/drawingml/2006/main">
@@ -24250,7 +24086,7 @@
             <a:r>
               <a:rPr sz="825" b="0">
                 <a:solidFill>
-                  <a:srgbClr val="657184"/>
+                  <a:srgbClr val="5E6B7D"/>
                 </a:solidFill>
                 <a:latin typeface="Aptos"/>
                 <a:ea typeface="Aptos"/>
@@ -24283,10 +24119,12 @@
           <a:prstGeom xmlns:a="http://schemas.openxmlformats.org/drawingml/2006/main" prst="line">
             <a:avLst/>
           </a:prstGeom>
-          <a:noFill xmlns:a="http://schemas.openxmlformats.org/drawingml/2006/main"/>
-          <a:ln xmlns:a="http://schemas.openxmlformats.org/drawingml/2006/main" w="9525">
+          <a:solidFill xmlns:a="http://schemas.openxmlformats.org/drawingml/2006/main">
+            <a:srgbClr val="8D5560"/>
+          </a:solidFill>
+          <a:ln xmlns:a="http://schemas.openxmlformats.org/drawingml/2006/main" w="7144">
             <a:solidFill>
-              <a:srgbClr val="748092"/>
+              <a:srgbClr val="8D5560"/>
             </a:solidFill>
             <a:prstDash val="solid"/>
           </a:ln>
@@ -24382,7 +24220,7 @@
         </p:spPr>
         <p:txBody>
           <a:bodyPr xmlns:a="http://schemas.openxmlformats.org/drawingml/2006/main" wrap="square" lIns="0" tIns="0" rIns="0" bIns="0" anchor="t">
-            <a:normAutofit/>
+            <a:normAutofit fontScale="100000"/>
           </a:bodyPr>
           <a:lstStyle xmlns:a="http://schemas.openxmlformats.org/drawingml/2006/main"/>
           <a:p xmlns:a="http://schemas.openxmlformats.org/drawingml/2006/main">
@@ -24409,95 +24247,7 @@
                 <a:ea typeface="Aptos Display"/>
                 <a:cs typeface="Aptos Display"/>
               </a:rPr>
-              <a:t>Контролне</a:t>
-            </a:r>
-            <a:r>
-              <a:rPr sz="2550" b="1">
-                <a:solidFill>
-                  <a:srgbClr val="1A202C"/>
-                </a:solidFill>
-                <a:latin typeface="Aptos Display"/>
-                <a:ea typeface="Aptos Display"/>
-                <a:cs typeface="Aptos Display"/>
-              </a:rPr>
-              <a:t> </a:t>
-            </a:r>
-            <a:r>
-              <a:rPr sz="2550" b="1">
-                <a:solidFill>
-                  <a:srgbClr val="1A202C"/>
-                </a:solidFill>
-                <a:latin typeface="Aptos Display"/>
-                <a:ea typeface="Aptos Display"/>
-                <a:cs typeface="Aptos Display"/>
-              </a:rPr>
-              <a:t>тачке</a:t>
-            </a:r>
-            <a:r>
-              <a:rPr sz="2550" b="1">
-                <a:solidFill>
-                  <a:srgbClr val="1A202C"/>
-                </a:solidFill>
-                <a:latin typeface="Aptos Display"/>
-                <a:ea typeface="Aptos Display"/>
-                <a:cs typeface="Aptos Display"/>
-              </a:rPr>
-              <a:t> </a:t>
-            </a:r>
-            <a:r>
-              <a:rPr sz="2550" b="1">
-                <a:solidFill>
-                  <a:srgbClr val="1A202C"/>
-                </a:solidFill>
-                <a:latin typeface="Aptos Display"/>
-                <a:ea typeface="Aptos Display"/>
-                <a:cs typeface="Aptos Display"/>
-              </a:rPr>
-              <a:t>држе</a:t>
-            </a:r>
-            <a:r>
-              <a:rPr sz="2550" b="1">
-                <a:solidFill>
-                  <a:srgbClr val="1A202C"/>
-                </a:solidFill>
-                <a:latin typeface="Aptos Display"/>
-                <a:ea typeface="Aptos Display"/>
-                <a:cs typeface="Aptos Display"/>
-              </a:rPr>
-              <a:t> </a:t>
-            </a:r>
-            <a:r>
-              <a:rPr sz="2550" b="1">
-                <a:solidFill>
-                  <a:srgbClr val="1A202C"/>
-                </a:solidFill>
-                <a:latin typeface="Aptos Display"/>
-                <a:ea typeface="Aptos Display"/>
-                <a:cs typeface="Aptos Display"/>
-              </a:rPr>
-              <a:t>пројекат</a:t>
-            </a:r>
-            <a:r>
-              <a:rPr sz="2550" b="1">
-                <a:solidFill>
-                  <a:srgbClr val="1A202C"/>
-                </a:solidFill>
-                <a:latin typeface="Aptos Display"/>
-                <a:ea typeface="Aptos Display"/>
-                <a:cs typeface="Aptos Display"/>
-              </a:rPr>
-              <a:t> </a:t>
-            </a:r>
-            <a:r>
-              <a:rPr sz="2550" b="1">
-                <a:solidFill>
-                  <a:srgbClr val="1A202C"/>
-                </a:solidFill>
-                <a:latin typeface="Aptos Display"/>
-                <a:ea typeface="Aptos Display"/>
-                <a:cs typeface="Aptos Display"/>
-              </a:rPr>
-              <a:t>у континуитету</a:t>
+              <a:t>Контролне тачке пројекта</a:t>
             </a:r>
             <a:endParaRPr sz="2550" b="1">
               <a:solidFill>
@@ -24539,7 +24289,7 @@
         </p:spPr>
         <p:txBody>
           <a:bodyPr xmlns:a="http://schemas.openxmlformats.org/drawingml/2006/main" wrap="square" lIns="0" tIns="0" rIns="0" bIns="0" anchor="t">
-            <a:normAutofit/>
+            <a:normAutofit fontScale="100000"/>
           </a:bodyPr>
           <a:lstStyle xmlns:a="http://schemas.openxmlformats.org/drawingml/2006/main"/>
           <a:p xmlns:a="http://schemas.openxmlformats.org/drawingml/2006/main">
@@ -24566,7 +24316,7 @@
                 <a:ea typeface="Aptos"/>
                 <a:cs typeface="Aptos"/>
               </a:rPr>
-              <a:t>Одржавају се сваке друге рачунарске вежбе и проверавају унапред дефинисан напредак.</a:t>
+              <a:t>Контролне тачке одржавају се сваке друге рачунарске вежбе и проверавају унапред дефинисан напредак.</a:t>
             </a:r>
           </a:p>
         </p:txBody>
@@ -24596,7 +24346,7 @@
             </a:avLst>
           </a:prstGeom>
           <a:solidFill xmlns:a="http://schemas.openxmlformats.org/drawingml/2006/main">
-            <a:srgbClr val="EEF3FF"/>
+            <a:srgbClr val="F7EFF1"/>
           </a:solidFill>
           <a:ln xmlns:a="http://schemas.openxmlformats.org/drawingml/2006/main" w="9525">
             <a:solidFill>
@@ -24662,7 +24412,7 @@
             <a:r>
               <a:rPr sz="1238" b="1">
                 <a:solidFill>
-                  <a:srgbClr val="2F5EF5"/>
+                  <a:srgbClr val="7A2636"/>
                 </a:solidFill>
                 <a:latin typeface="Aptos"/>
                 <a:ea typeface="Aptos"/>
@@ -24820,7 +24570,7 @@
             </a:avLst>
           </a:prstGeom>
           <a:solidFill xmlns:a="http://schemas.openxmlformats.org/drawingml/2006/main">
-            <a:srgbClr val="F5F0FF"/>
+            <a:srgbClr val="F7F4F5"/>
           </a:solidFill>
           <a:ln xmlns:a="http://schemas.openxmlformats.org/drawingml/2006/main" w="9525">
             <a:solidFill>
@@ -24886,7 +24636,7 @@
             <a:r>
               <a:rPr sz="1238" b="1">
                 <a:solidFill>
-                  <a:srgbClr val="7651D4"/>
+                  <a:srgbClr val="7A2636"/>
                 </a:solidFill>
                 <a:latin typeface="Aptos"/>
                 <a:ea typeface="Aptos"/>
@@ -25469,7 +25219,7 @@
       </p:sp>
       <p:cxnSp>
         <p:nvCxnSpPr>
-          <p:cNvPr id="194" name="Straight Arrow Connector 97"/>
+          <p:cNvPr id="290" name="Straight Arrow Connector 97"/>
           <p:cNvCxnSpPr>
             <a:stCxn xmlns:a="http://schemas.openxmlformats.org/drawingml/2006/main" id="6" idx="3"/>
             <a:endCxn xmlns:a="http://schemas.openxmlformats.org/drawingml/2006/main" id="10" idx="1"/>
@@ -25495,7 +25245,7 @@
       </p:cxnSp>
       <p:cxnSp>
         <p:nvCxnSpPr>
-          <p:cNvPr id="195" name="Straight Arrow Connector 98"/>
+          <p:cNvPr id="291" name="Straight Arrow Connector 98"/>
           <p:cNvCxnSpPr>
             <a:stCxn xmlns:a="http://schemas.openxmlformats.org/drawingml/2006/main" id="10" idx="3"/>
             <a:endCxn xmlns:a="http://schemas.openxmlformats.org/drawingml/2006/main" id="14" idx="1"/>
@@ -25521,7 +25271,7 @@
       </p:cxnSp>
       <p:cxnSp>
         <p:nvCxnSpPr>
-          <p:cNvPr id="196" name="Straight Arrow Connector 99"/>
+          <p:cNvPr id="292" name="Straight Arrow Connector 99"/>
           <p:cNvCxnSpPr>
             <a:stCxn xmlns:a="http://schemas.openxmlformats.org/drawingml/2006/main" id="14" idx="3"/>
             <a:endCxn xmlns:a="http://schemas.openxmlformats.org/drawingml/2006/main" id="18" idx="1"/>
@@ -25821,7 +25571,7 @@
         </p:spPr>
         <p:txBody>
           <a:bodyPr xmlns:a="http://schemas.openxmlformats.org/drawingml/2006/main" wrap="square" lIns="0" tIns="0" rIns="0" bIns="0" anchor="t">
-            <a:normAutofit/>
+            <a:normAutofit fontScale="100000"/>
           </a:bodyPr>
           <a:lstStyle xmlns:a="http://schemas.openxmlformats.org/drawingml/2006/main"/>
           <a:p xmlns:a="http://schemas.openxmlformats.org/drawingml/2006/main">
@@ -25842,7 +25592,7 @@
             <a:r>
               <a:rPr sz="825" b="0">
                 <a:solidFill>
-                  <a:srgbClr val="657184"/>
+                  <a:srgbClr val="5E6B7D"/>
                 </a:solidFill>
                 <a:latin typeface="Aptos"/>
                 <a:ea typeface="Aptos"/>
@@ -25875,10 +25625,12 @@
           <a:prstGeom xmlns:a="http://schemas.openxmlformats.org/drawingml/2006/main" prst="line">
             <a:avLst/>
           </a:prstGeom>
-          <a:noFill xmlns:a="http://schemas.openxmlformats.org/drawingml/2006/main"/>
-          <a:ln xmlns:a="http://schemas.openxmlformats.org/drawingml/2006/main" w="9525">
+          <a:solidFill xmlns:a="http://schemas.openxmlformats.org/drawingml/2006/main">
+            <a:srgbClr val="8D5560"/>
+          </a:solidFill>
+          <a:ln xmlns:a="http://schemas.openxmlformats.org/drawingml/2006/main" w="7144">
             <a:solidFill>
-              <a:srgbClr val="748092"/>
+              <a:srgbClr val="8D5560"/>
             </a:solidFill>
             <a:prstDash val="solid"/>
           </a:ln>
@@ -25974,7 +25726,7 @@
         </p:spPr>
         <p:txBody>
           <a:bodyPr xmlns:a="http://schemas.openxmlformats.org/drawingml/2006/main" wrap="square" lIns="0" tIns="0" rIns="0" bIns="0" anchor="t">
-            <a:normAutofit/>
+            <a:normAutofit fontScale="100000"/>
           </a:bodyPr>
           <a:lstStyle xmlns:a="http://schemas.openxmlformats.org/drawingml/2006/main"/>
           <a:p xmlns:a="http://schemas.openxmlformats.org/drawingml/2006/main">
@@ -26001,7 +25753,7 @@
                 <a:ea typeface="Aptos Display"/>
                 <a:cs typeface="Aptos Display"/>
               </a:rPr>
-              <a:t>Одбрана, елиминациони тест и усмени</a:t>
+              <a:t>Компоненте испита</a:t>
             </a:r>
           </a:p>
         </p:txBody>
@@ -26035,7 +25787,7 @@
         </p:spPr>
         <p:txBody>
           <a:bodyPr xmlns:a="http://schemas.openxmlformats.org/drawingml/2006/main" wrap="square" lIns="0" tIns="0" rIns="0" bIns="0" anchor="t">
-            <a:normAutofit/>
+            <a:normAutofit fontScale="95238"/>
           </a:bodyPr>
           <a:lstStyle xmlns:a="http://schemas.openxmlformats.org/drawingml/2006/main"/>
           <a:p xmlns:a="http://schemas.openxmlformats.org/drawingml/2006/main">
@@ -26062,7 +25814,7 @@
                 <a:ea typeface="Aptos"/>
                 <a:cs typeface="Aptos"/>
               </a:rPr>
-              <a:t>Свака компонента проверава други слој знања: резултат, основне појмове и способност образлагања.</a:t>
+              <a:t>Одбрана пројекта, елиминациони тест и усмени испит проверавају различите аспекте знања и индивидуалног доприноса.</a:t>
             </a:r>
           </a:p>
         </p:txBody>
@@ -26092,7 +25844,7 @@
             </a:avLst>
           </a:prstGeom>
           <a:solidFill xmlns:a="http://schemas.openxmlformats.org/drawingml/2006/main">
-            <a:srgbClr val="EEF3FF"/>
+            <a:srgbClr val="F7EFF1"/>
           </a:solidFill>
           <a:ln xmlns:a="http://schemas.openxmlformats.org/drawingml/2006/main" w="9525">
             <a:solidFill>
@@ -26158,7 +25910,7 @@
             <a:r>
               <a:rPr sz="1275" b="1">
                 <a:solidFill>
-                  <a:srgbClr val="2F5EF5"/>
+                  <a:srgbClr val="7A2636"/>
                 </a:solidFill>
                 <a:latin typeface="Aptos"/>
                 <a:ea typeface="Aptos"/>
@@ -26978,7 +26730,7 @@
         </p:spPr>
         <p:txBody>
           <a:bodyPr xmlns:a="http://schemas.openxmlformats.org/drawingml/2006/main" wrap="square" lIns="0" tIns="0" rIns="0" bIns="0" anchor="t">
-            <a:normAutofit/>
+            <a:normAutofit fontScale="100000"/>
           </a:bodyPr>
           <a:lstStyle xmlns:a="http://schemas.openxmlformats.org/drawingml/2006/main"/>
           <a:p xmlns:a="http://schemas.openxmlformats.org/drawingml/2006/main">
@@ -26999,7 +26751,7 @@
             <a:r>
               <a:rPr sz="825" b="0">
                 <a:solidFill>
-                  <a:srgbClr val="657184"/>
+                  <a:srgbClr val="5E6B7D"/>
                 </a:solidFill>
                 <a:latin typeface="Aptos"/>
                 <a:ea typeface="Aptos"/>
@@ -27032,10 +26784,12 @@
           <a:prstGeom xmlns:a="http://schemas.openxmlformats.org/drawingml/2006/main" prst="line">
             <a:avLst/>
           </a:prstGeom>
-          <a:noFill xmlns:a="http://schemas.openxmlformats.org/drawingml/2006/main"/>
-          <a:ln xmlns:a="http://schemas.openxmlformats.org/drawingml/2006/main" w="9525">
+          <a:solidFill xmlns:a="http://schemas.openxmlformats.org/drawingml/2006/main">
+            <a:srgbClr val="8D5560"/>
+          </a:solidFill>
+          <a:ln xmlns:a="http://schemas.openxmlformats.org/drawingml/2006/main" w="7144">
             <a:solidFill>
-              <a:srgbClr val="748092"/>
+              <a:srgbClr val="8D5560"/>
             </a:solidFill>
             <a:prstDash val="solid"/>
           </a:ln>
@@ -27131,7 +26885,7 @@
         </p:spPr>
         <p:txBody>
           <a:bodyPr xmlns:a="http://schemas.openxmlformats.org/drawingml/2006/main" wrap="square" lIns="0" tIns="0" rIns="0" bIns="0" anchor="t">
-            <a:normAutofit/>
+            <a:normAutofit fontScale="100000"/>
           </a:bodyPr>
           <a:lstStyle xmlns:a="http://schemas.openxmlformats.org/drawingml/2006/main"/>
           <a:p xmlns:a="http://schemas.openxmlformats.org/drawingml/2006/main">
@@ -27158,7 +26912,7 @@
                 <a:ea typeface="Aptos Display"/>
                 <a:cs typeface="Aptos Display"/>
               </a:rPr>
-              <a:t>Осам вежби прати природан ток безбедносног размишљања</a:t>
+              <a:t>Теме рачунарских вежби</a:t>
             </a:r>
           </a:p>
         </p:txBody>
@@ -27192,7 +26946,7 @@
         </p:spPr>
         <p:txBody>
           <a:bodyPr xmlns:a="http://schemas.openxmlformats.org/drawingml/2006/main" wrap="square" lIns="0" tIns="0" rIns="0" bIns="0" anchor="t">
-            <a:normAutofit/>
+            <a:normAutofit fontScale="96236"/>
           </a:bodyPr>
           <a:lstStyle xmlns:a="http://schemas.openxmlformats.org/drawingml/2006/main"/>
           <a:p xmlns:a="http://schemas.openxmlformats.org/drawingml/2006/main">
@@ -27219,7 +26973,7 @@
                 <a:ea typeface="Aptos"/>
                 <a:cs typeface="Aptos"/>
               </a:rPr>
-              <a:t>Од идентитета и приступа до оперативне реакције, ризика и мерења ефективности.</a:t>
+              <a:t>Осам вежби обухвата контролу приступа, оперативну безбедност, процену ризика и проверу ефективности контрола.</a:t>
             </a:r>
           </a:p>
         </p:txBody>
@@ -27249,7 +27003,7 @@
             </a:avLst>
           </a:prstGeom>
           <a:solidFill xmlns:a="http://schemas.openxmlformats.org/drawingml/2006/main">
-            <a:srgbClr val="EEF3FF"/>
+            <a:srgbClr val="F7EFF1"/>
           </a:solidFill>
           <a:ln xmlns:a="http://schemas.openxmlformats.org/drawingml/2006/main" w="9525">
             <a:solidFill>
@@ -27309,7 +27063,7 @@
             <a:r>
               <a:rPr sz="1275" b="1">
                 <a:solidFill>
-                  <a:srgbClr val="2F5EF5"/>
+                  <a:srgbClr val="7A2636"/>
                 </a:solidFill>
                 <a:latin typeface="Aptos"/>
                 <a:ea typeface="Aptos"/>
@@ -27563,7 +27317,7 @@
             </a:avLst>
           </a:prstGeom>
           <a:solidFill xmlns:a="http://schemas.openxmlformats.org/drawingml/2006/main">
-            <a:srgbClr val="F5F0FF"/>
+            <a:srgbClr val="F7F4F5"/>
           </a:solidFill>
           <a:ln xmlns:a="http://schemas.openxmlformats.org/drawingml/2006/main" w="9525">
             <a:solidFill>
@@ -27623,7 +27377,7 @@
             <a:r>
               <a:rPr sz="1275" b="1">
                 <a:solidFill>
-                  <a:srgbClr val="7651D4"/>
+                  <a:srgbClr val="7A2636"/>
                 </a:solidFill>
                 <a:latin typeface="Aptos"/>
                 <a:ea typeface="Aptos"/>
@@ -27877,7 +27631,7 @@
             </a:avLst>
           </a:prstGeom>
           <a:solidFill xmlns:a="http://schemas.openxmlformats.org/drawingml/2006/main">
-            <a:srgbClr val="EEF3FF"/>
+            <a:srgbClr val="F7EFF1"/>
           </a:solidFill>
           <a:ln xmlns:a="http://schemas.openxmlformats.org/drawingml/2006/main" w="9525">
             <a:solidFill>
@@ -27937,7 +27691,7 @@
             <a:r>
               <a:rPr sz="1275" b="1">
                 <a:solidFill>
-                  <a:srgbClr val="2F5EF5"/>
+                  <a:srgbClr val="7A2636"/>
                 </a:solidFill>
                 <a:latin typeface="Aptos"/>
                 <a:ea typeface="Aptos"/>
@@ -28191,7 +27945,7 @@
             </a:avLst>
           </a:prstGeom>
           <a:solidFill xmlns:a="http://schemas.openxmlformats.org/drawingml/2006/main">
-            <a:srgbClr val="F5F0FF"/>
+            <a:srgbClr val="F7F4F5"/>
           </a:solidFill>
           <a:ln xmlns:a="http://schemas.openxmlformats.org/drawingml/2006/main" w="9525">
             <a:solidFill>
@@ -28251,7 +28005,7 @@
             <a:r>
               <a:rPr sz="1275" b="1">
                 <a:solidFill>
-                  <a:srgbClr val="7651D4"/>
+                  <a:srgbClr val="7A2636"/>
                 </a:solidFill>
                 <a:latin typeface="Aptos"/>
                 <a:ea typeface="Aptos"/>
@@ -28505,11 +28259,11 @@
             </a:avLst>
           </a:prstGeom>
           <a:solidFill xmlns:a="http://schemas.openxmlformats.org/drawingml/2006/main">
-            <a:srgbClr val="EEF3FF"/>
+            <a:srgbClr val="F7EFF1"/>
           </a:solidFill>
           <a:ln xmlns:a="http://schemas.openxmlformats.org/drawingml/2006/main" w="8573">
             <a:solidFill>
-              <a:srgbClr val="CAD7F2"/>
+              <a:srgbClr val="DBC7CC"/>
             </a:solidFill>
             <a:prstDash val="solid"/>
           </a:ln>
@@ -28540,7 +28294,7 @@
             </a:avLst>
           </a:prstGeom>
           <a:solidFill xmlns:a="http://schemas.openxmlformats.org/drawingml/2006/main">
-            <a:srgbClr val="2F5EF5"/>
+            <a:srgbClr val="7A2636"/>
           </a:solidFill>
           <a:ln xmlns:a="http://schemas.openxmlformats.org/drawingml/2006/main" w="0">
             <a:noFill/>
@@ -28581,6 +28335,7 @@
           <a:lstStyle xmlns:a="http://schemas.openxmlformats.org/drawingml/2006/main"/>
           <a:p xmlns:a="http://schemas.openxmlformats.org/drawingml/2006/main">
             <a:pPr>
+              <a:buNone/>
               <a:defRPr sz="1200" b="1">
                 <a:solidFill>
                   <a:srgbClr val="2854D7"/>
@@ -28593,7 +28348,7 @@
             <a:r>
               <a:rPr sz="1200" b="1">
                 <a:solidFill>
-                  <a:srgbClr val="2854D7"/>
+                  <a:srgbClr val="7A2636"/>
                 </a:solidFill>
                 <a:latin typeface="Aptos"/>
                 <a:ea typeface="Aptos"/>
@@ -28638,6 +28393,7 @@
           <a:lstStyle xmlns:a="http://schemas.openxmlformats.org/drawingml/2006/main"/>
           <a:p xmlns:a="http://schemas.openxmlformats.org/drawingml/2006/main">
             <a:pPr>
+              <a:buNone/>
               <a:defRPr sz="1350" b="1">
                 <a:solidFill>
                   <a:srgbClr val="1B2432"/>

--- a/02 Osnove Informacione Bezbednosti/02 Prezentacije/PPTX/00_Osnovne_informacije.pptx
+++ b/02 Osnove Informacione Bezbednosti/02 Prezentacije/PPTX/00_Osnovne_informacije.pptx
@@ -11003,7 +11003,7 @@
                 <a:ea typeface="Aptos"/>
                 <a:cs typeface="Aptos"/>
               </a:rPr>
-              <a:t>После вежбе 3</a:t>
+              <a:t>После вежби 3–4</a:t>
             </a:r>
           </a:p>
         </p:txBody>
@@ -11227,7 +11227,7 @@
                 <a:ea typeface="Aptos"/>
                 <a:cs typeface="Aptos"/>
               </a:rPr>
-              <a:t>После вежбе 4</a:t>
+              <a:t>После вежби 5–6</a:t>
             </a:r>
           </a:p>
         </p:txBody>
@@ -11451,7 +11451,7 @@
                 <a:ea typeface="Aptos"/>
                 <a:cs typeface="Aptos"/>
               </a:rPr>
-              <a:t>После вежби 5–8</a:t>
+              <a:t>После вежби 7–8</a:t>
             </a:r>
           </a:p>
         </p:txBody>
@@ -14749,7 +14749,7 @@
                 <a:ea typeface="Aptos"/>
                 <a:cs typeface="Aptos"/>
               </a:rPr>
-              <a:t>Јединствени материјали за рачунарске вежбе доступни су на ftn-predmeti.vercel.app/#oib.</a:t>
+              <a:t>Јединствени материјали за рачунарске вежбе доступни су на ftn-nastavni-portal.vercel.app/#oib.</a:t>
             </a:r>
           </a:p>
         </p:txBody>

--- a/02 Osnove Informacione Bezbednosti/02 Prezentacije/PPTX/00_Osnovne_informacije.pptx
+++ b/02 Osnove Informacione Bezbednosti/02 Prezentacije/PPTX/00_Osnovne_informacije.pptx
@@ -1029,7 +1029,7 @@
           <a:lstStyle xmlns:a="http://schemas.openxmlformats.org/drawingml/2006/main"/>
           <a:p xmlns:a="http://schemas.openxmlformats.org/drawingml/2006/main">
             <a:r>
-              <a:t>Контролне тачке повезују имплементацију, тестове и доказе са редоследом рачунарских вежби.</a:t>
+              <a:t>Током семестра постоје две контролне тачке. КТ1 је у термину 4. рачунарске вежбе и проверава основну имплементацију и безбедносни модел, покренут функционални ток и негативни тест. КТ2 је у термину 8. рачунарске вежбе и проверава све додељене целине у одобреном обиму, интеграцију, тестове и поновљиву демонстрацију. Контролне тачке и термини одбране пројекта су одвојене обавезе. Неиспуњена контролна тачка може донети умањење до 5 бодова према Правилима полагања.</a:t>
             </a:r>
           </a:p>
         </p:txBody>
@@ -1099,7 +1099,7 @@
           <a:lstStyle xmlns:a="http://schemas.openxmlformats.org/drawingml/2006/main"/>
           <a:p xmlns:a="http://schemas.openxmlformats.org/drawingml/2006/main">
             <a:r>
-              <a:t>Извори: OIB_Pravila_Polaganja.pdf, одељак 3, oibCheckpoints.ts. </a:t>
+              <a:t>Током семестра постоје две контролне тачке. КТ1 је у термину 4. рачунарске вежбе и проверава основну имплементацију и безбедносни модел, покренут функционални ток и негативни тест. КТ2 је у термину 8. рачунарске вежбе и проверава све додељене целине у одобреном обиму, интеграцију, тестове и поновљиву демонстрацију. Контролне тачке и термини одбране пројекта су одвојене обавезе. Неиспуњена контролна тачка може донети умањење до 5 бодова према Правилима полагања.</a:t>
             </a:r>
           </a:p>
         </p:txBody>
@@ -1169,7 +1169,7 @@
           <a:lstStyle xmlns:a="http://schemas.openxmlformats.org/drawingml/2006/main"/>
           <a:p xmlns:a="http://schemas.openxmlformats.org/drawingml/2006/main">
             <a:r>
-              <a:t>Извор: oibCheckpoints.ts. </a:t>
+              <a:t>Током семестра постоје две контролне тачке. КТ1 је у термину 4. рачунарске вежбе и проверава основну имплементацију и безбедносни модел, покренут функционални ток и негативни тест. КТ2 је у термину 8. рачунарске вежбе и проверава све додељене целине у одобреном обиму, интеграцију, тестове и поновљиву демонстрацију. Контролне тачке и термини одбране пројекта су одвојене обавезе. Неиспуњена контролна тачка може донети умањење до 5 бодова према Правилима полагања.</a:t>
             </a:r>
           </a:p>
         </p:txBody>
@@ -15543,142 +15543,6 @@
       </p:grpSpPr>
       <p:sp>
         <p:nvSpPr>
-          <p:cNvPr id="17" name="">
-            <a:extLst xmlns:a="http://schemas.openxmlformats.org/drawingml/2006/main">
-              <a:ext uri="{FF2B5EF4-FFF2-40B4-BE49-F238E27FC236}">
-                <a16:creationId xmlns:a16="http://schemas.microsoft.com/office/drawing/2014/main" id="{52E8485A-156F-4D08-99CB-EF4044811966}"/>
-              </a:ext>
-            </a:extLst>
-          </p:cNvPr>
-          <p:cNvSpPr>
-            <a:spLocks xmlns:a="http://schemas.openxmlformats.org/drawingml/2006/main" noGrp="1"/>
-          </p:cNvSpPr>
-          <p:nvPr/>
-        </p:nvSpPr>
-        <p:spPr>
-          <a:xfrm xmlns:a="http://schemas.openxmlformats.org/drawingml/2006/main">
-            <a:off x="6400800" y="6158657"/>
-            <a:ext cx="675829" cy="491430"/>
-          </a:xfrm>
-          <a:prstGeom xmlns:a="http://schemas.openxmlformats.org/drawingml/2006/main" prst="roundRect">
-            <a:avLst>
-              <a:gd name="adj" fmla="val 50000"/>
-            </a:avLst>
-          </a:prstGeom>
-          <a:solidFill xmlns:a="http://schemas.openxmlformats.org/drawingml/2006/main">
-            <a:srgbClr val="FCFCFB"/>
-          </a:solidFill>
-          <a:ln xmlns:a="http://schemas.openxmlformats.org/drawingml/2006/main" w="9525">
-            <a:solidFill>
-              <a:srgbClr val="C3CEDA"/>
-            </a:solidFill>
-          </a:ln>
-        </p:spPr>
-      </p:sp>
-      <p:sp>
-        <p:nvSpPr>
-          <p:cNvPr id="2" name="">
-            <a:extLst xmlns:a="http://schemas.openxmlformats.org/drawingml/2006/main">
-              <a:ext uri="{FF2B5EF4-FFF2-40B4-BE49-F238E27FC236}">
-                <a16:creationId xmlns:a16="http://schemas.microsoft.com/office/drawing/2014/main" id="{5BCA1D75-B203-4963-B2D0-90123C84F34B}"/>
-              </a:ext>
-            </a:extLst>
-          </p:cNvPr>
-          <p:cNvSpPr>
-            <a:spLocks xmlns:a="http://schemas.openxmlformats.org/drawingml/2006/main" noGrp="1"/>
-          </p:cNvSpPr>
-          <p:nvPr/>
-        </p:nvSpPr>
-        <p:spPr>
-          <a:xfrm xmlns:a="http://schemas.openxmlformats.org/drawingml/2006/main">
-            <a:off x="7190929" y="6158657"/>
-            <a:ext cx="675829" cy="491430"/>
-          </a:xfrm>
-          <a:prstGeom xmlns:a="http://schemas.openxmlformats.org/drawingml/2006/main" prst="roundRect">
-            <a:avLst>
-              <a:gd name="adj" fmla="val 50000"/>
-            </a:avLst>
-          </a:prstGeom>
-          <a:solidFill xmlns:a="http://schemas.openxmlformats.org/drawingml/2006/main">
-            <a:srgbClr val="FCFCFB"/>
-          </a:solidFill>
-          <a:ln xmlns:a="http://schemas.openxmlformats.org/drawingml/2006/main" w="9525">
-            <a:solidFill>
-              <a:srgbClr val="C3CEDA"/>
-            </a:solidFill>
-          </a:ln>
-        </p:spPr>
-      </p:sp>
-      <p:sp>
-        <p:nvSpPr>
-          <p:cNvPr id="3" name="">
-            <a:extLst xmlns:a="http://schemas.openxmlformats.org/drawingml/2006/main">
-              <a:ext uri="{FF2B5EF4-FFF2-40B4-BE49-F238E27FC236}">
-                <a16:creationId xmlns:a16="http://schemas.microsoft.com/office/drawing/2014/main" id="{F6F098DA-33C4-46D6-962A-AC8ADE15C7F5}"/>
-              </a:ext>
-            </a:extLst>
-          </p:cNvPr>
-          <p:cNvSpPr>
-            <a:spLocks xmlns:a="http://schemas.openxmlformats.org/drawingml/2006/main" noGrp="1"/>
-          </p:cNvSpPr>
-          <p:nvPr/>
-        </p:nvSpPr>
-        <p:spPr>
-          <a:xfrm xmlns:a="http://schemas.openxmlformats.org/drawingml/2006/main">
-            <a:off x="7981057" y="6158657"/>
-            <a:ext cx="675829" cy="491430"/>
-          </a:xfrm>
-          <a:prstGeom xmlns:a="http://schemas.openxmlformats.org/drawingml/2006/main" prst="roundRect">
-            <a:avLst>
-              <a:gd name="adj" fmla="val 50000"/>
-            </a:avLst>
-          </a:prstGeom>
-          <a:solidFill xmlns:a="http://schemas.openxmlformats.org/drawingml/2006/main">
-            <a:srgbClr val="FCFCFB"/>
-          </a:solidFill>
-          <a:ln xmlns:a="http://schemas.openxmlformats.org/drawingml/2006/main" w="9525">
-            <a:solidFill>
-              <a:srgbClr val="C3CEDA"/>
-            </a:solidFill>
-          </a:ln>
-        </p:spPr>
-      </p:sp>
-      <p:sp>
-        <p:nvSpPr>
-          <p:cNvPr id="4" name="">
-            <a:extLst xmlns:a="http://schemas.openxmlformats.org/drawingml/2006/main">
-              <a:ext uri="{FF2B5EF4-FFF2-40B4-BE49-F238E27FC236}">
-                <a16:creationId xmlns:a16="http://schemas.microsoft.com/office/drawing/2014/main" id="{04F3D126-DA2F-4927-AA98-9E5A218CE246}"/>
-              </a:ext>
-            </a:extLst>
-          </p:cNvPr>
-          <p:cNvSpPr>
-            <a:spLocks xmlns:a="http://schemas.openxmlformats.org/drawingml/2006/main" noGrp="1"/>
-          </p:cNvSpPr>
-          <p:nvPr/>
-        </p:nvSpPr>
-        <p:spPr>
-          <a:xfrm xmlns:a="http://schemas.openxmlformats.org/drawingml/2006/main">
-            <a:off x="8771186" y="6158657"/>
-            <a:ext cx="675829" cy="491430"/>
-          </a:xfrm>
-          <a:prstGeom xmlns:a="http://schemas.openxmlformats.org/drawingml/2006/main" prst="roundRect">
-            <a:avLst>
-              <a:gd name="adj" fmla="val 50000"/>
-            </a:avLst>
-          </a:prstGeom>
-          <a:solidFill xmlns:a="http://schemas.openxmlformats.org/drawingml/2006/main">
-            <a:srgbClr val="FCFCFB"/>
-          </a:solidFill>
-          <a:ln xmlns:a="http://schemas.openxmlformats.org/drawingml/2006/main" w="9525">
-            <a:solidFill>
-              <a:srgbClr val="C3CEDA"/>
-            </a:solidFill>
-          </a:ln>
-        </p:spPr>
-      </p:sp>
-      <p:sp>
-        <p:nvSpPr>
           <p:cNvPr id="5" name="">
             <a:extLst xmlns:a="http://schemas.openxmlformats.org/drawingml/2006/main">
               <a:ext uri="{FF2B5EF4-FFF2-40B4-BE49-F238E27FC236}">
@@ -15741,6 +15605,7 @@
           <a:lstStyle xmlns:a="http://schemas.openxmlformats.org/drawingml/2006/main"/>
           <a:p xmlns:a="http://schemas.openxmlformats.org/drawingml/2006/main">
             <a:pPr algn="l">
+              <a:buNone/>
               <a:defRPr sz="21000">
                 <a:latin typeface="IBM Plex Mono"/>
                 <a:ea typeface="IBM Plex Mono"/>
@@ -15795,6 +15660,7 @@
           <a:lstStyle xmlns:a="http://schemas.openxmlformats.org/drawingml/2006/main"/>
           <a:p xmlns:a="http://schemas.openxmlformats.org/drawingml/2006/main">
             <a:pPr algn="l">
+              <a:buNone/>
               <a:defRPr sz="1800">
                 <a:latin typeface="IBM Plex Mono"/>
                 <a:ea typeface="IBM Plex Mono"/>
@@ -15849,6 +15715,7 @@
           <a:lstStyle xmlns:a="http://schemas.openxmlformats.org/drawingml/2006/main"/>
           <a:p xmlns:a="http://schemas.openxmlformats.org/drawingml/2006/main">
             <a:pPr algn="l">
+              <a:buNone/>
               <a:defRPr sz="7200">
                 <a:latin typeface="IBM Plex Sans"/>
                 <a:ea typeface="IBM Plex Sans"/>
@@ -15903,6 +15770,7 @@
           <a:lstStyle xmlns:a="http://schemas.openxmlformats.org/drawingml/2006/main"/>
           <a:p xmlns:a="http://schemas.openxmlformats.org/drawingml/2006/main">
             <a:pPr algn="l">
+              <a:buNone/>
               <a:defRPr sz="2100">
                 <a:latin typeface="IBM Plex Sans"/>
                 <a:ea typeface="IBM Plex Sans"/>
@@ -15957,6 +15825,7 @@
           <a:lstStyle xmlns:a="http://schemas.openxmlformats.org/drawingml/2006/main"/>
           <a:p xmlns:a="http://schemas.openxmlformats.org/drawingml/2006/main">
             <a:pPr algn="l">
+              <a:buNone/>
               <a:defRPr sz="2100">
                 <a:latin typeface="IBM Plex Sans"/>
                 <a:ea typeface="IBM Plex Sans"/>
@@ -15979,22 +15848,22 @@
       </p:sp>
       <p:sp>
         <p:nvSpPr>
-          <p:cNvPr id="11" name="text-deo3">
-            <a:extLst xmlns:a="http://schemas.openxmlformats.org/drawingml/2006/main">
-              <a:ext uri="{FF2B5EF4-FFF2-40B4-BE49-F238E27FC236}">
-                <a16:creationId xmlns:a16="http://schemas.microsoft.com/office/drawing/2014/main" id="{983A91D6-7357-461B-A416-CAA0C6654BB7}"/>
-              </a:ext>
-            </a:extLst>
-          </p:cNvPr>
-          <p:cNvSpPr>
-            <a:spLocks xmlns:a="http://schemas.openxmlformats.org/drawingml/2006/main" noGrp="1"/>
-          </p:cNvSpPr>
-          <p:nvPr/>
-        </p:nvSpPr>
-        <p:spPr>
-          <a:xfrm xmlns:a="http://schemas.openxmlformats.org/drawingml/2006/main">
-            <a:off x="6600825" y="6244382"/>
-            <a:ext cx="618679" cy="381000"/>
+          <p:cNvPr id="15" name="text-deo3">
+            <a:extLst xmlns:a="http://schemas.openxmlformats.org/drawingml/2006/main">
+              <a:ext uri="{FF2B5EF4-FFF2-40B4-BE49-F238E27FC236}">
+                <a16:creationId xmlns:a16="http://schemas.microsoft.com/office/drawing/2014/main" id="{D6A17F0D-F473-4399-AA46-002DA7CE4D44}"/>
+              </a:ext>
+            </a:extLst>
+          </p:cNvPr>
+          <p:cNvSpPr>
+            <a:spLocks xmlns:a="http://schemas.openxmlformats.org/drawingml/2006/main" noGrp="1"/>
+          </p:cNvSpPr>
+          <p:nvPr/>
+        </p:nvSpPr>
+        <p:spPr>
+          <a:xfrm xmlns:a="http://schemas.openxmlformats.org/drawingml/2006/main">
+            <a:off x="1219200" y="9471720"/>
+            <a:ext cx="4265712" cy="381000"/>
           </a:xfrm>
           <a:prstGeom xmlns:a="http://schemas.openxmlformats.org/drawingml/2006/main" prst="rect">
             <a:avLst/>
@@ -16011,6 +15880,7 @@
           <a:lstStyle xmlns:a="http://schemas.openxmlformats.org/drawingml/2006/main"/>
           <a:p xmlns:a="http://schemas.openxmlformats.org/drawingml/2006/main">
             <a:pPr algn="l">
+              <a:buNone/>
               <a:defRPr sz="1800">
                 <a:latin typeface="IBM Plex Sans"/>
                 <a:ea typeface="IBM Plex Sans"/>
@@ -16020,35 +15890,35 @@
             <a:r>
               <a:rPr sz="1800" b="0">
                 <a:solidFill>
-                  <a:srgbClr val="13202D"/>
-                </a:solidFill>
-                <a:latin typeface="IBM Plex Sans"/>
-                <a:ea typeface="IBM Plex Sans"/>
-                <a:cs typeface="IBM Plex Sans"/>
-              </a:rPr>
-              <a:t>P1</a:t>
-            </a:r>
-          </a:p>
-        </p:txBody>
-      </p:sp>
-      <p:sp>
-        <p:nvSpPr>
-          <p:cNvPr id="12" name="text-deo3">
-            <a:extLst xmlns:a="http://schemas.openxmlformats.org/drawingml/2006/main">
-              <a:ext uri="{FF2B5EF4-FFF2-40B4-BE49-F238E27FC236}">
-                <a16:creationId xmlns:a16="http://schemas.microsoft.com/office/drawing/2014/main" id="{ED4B736A-053A-4AD1-91AA-DE9E1C45286C}"/>
-              </a:ext>
-            </a:extLst>
-          </p:cNvPr>
-          <p:cNvSpPr>
-            <a:spLocks xmlns:a="http://schemas.openxmlformats.org/drawingml/2006/main" noGrp="1"/>
-          </p:cNvSpPr>
-          <p:nvPr/>
-        </p:nvSpPr>
-        <p:spPr>
-          <a:xfrm xmlns:a="http://schemas.openxmlformats.org/drawingml/2006/main">
-            <a:off x="7390954" y="6244382"/>
-            <a:ext cx="618679" cy="381000"/>
+                  <a:srgbClr val="5E6975"/>
+                </a:solidFill>
+                <a:latin typeface="IBM Plex Sans"/>
+                <a:ea typeface="IBM Plex Sans"/>
+                <a:cs typeface="IBM Plex Sans"/>
+              </a:rPr>
+              <a:t>Основе информационе безбедности</a:t>
+            </a:r>
+          </a:p>
+        </p:txBody>
+      </p:sp>
+      <p:sp>
+        <p:nvSpPr>
+          <p:cNvPr id="16" name="text-deo3">
+            <a:extLst xmlns:a="http://schemas.openxmlformats.org/drawingml/2006/main">
+              <a:ext uri="{FF2B5EF4-FFF2-40B4-BE49-F238E27FC236}">
+                <a16:creationId xmlns:a16="http://schemas.microsoft.com/office/drawing/2014/main" id="{72F84AF1-E93B-48AD-985D-865057C667B3}"/>
+              </a:ext>
+            </a:extLst>
+          </p:cNvPr>
+          <p:cNvSpPr>
+            <a:spLocks xmlns:a="http://schemas.openxmlformats.org/drawingml/2006/main" noGrp="1"/>
+          </p:cNvSpPr>
+          <p:nvPr/>
+        </p:nvSpPr>
+        <p:spPr>
+          <a:xfrm xmlns:a="http://schemas.openxmlformats.org/drawingml/2006/main">
+            <a:off x="16794361" y="9471720"/>
+            <a:ext cx="617339" cy="381000"/>
           </a:xfrm>
           <a:prstGeom xmlns:a="http://schemas.openxmlformats.org/drawingml/2006/main" prst="rect">
             <a:avLst/>
@@ -16065,222 +15935,7 @@
           <a:lstStyle xmlns:a="http://schemas.openxmlformats.org/drawingml/2006/main"/>
           <a:p xmlns:a="http://schemas.openxmlformats.org/drawingml/2006/main">
             <a:pPr algn="l">
-              <a:defRPr sz="1800">
-                <a:latin typeface="IBM Plex Sans"/>
-                <a:ea typeface="IBM Plex Sans"/>
-                <a:cs typeface="IBM Plex Sans"/>
-              </a:defRPr>
-            </a:pPr>
-            <a:r>
-              <a:rPr sz="1800" b="0">
-                <a:solidFill>
-                  <a:srgbClr val="13202D"/>
-                </a:solidFill>
-                <a:latin typeface="IBM Plex Sans"/>
-                <a:ea typeface="IBM Plex Sans"/>
-                <a:cs typeface="IBM Plex Sans"/>
-              </a:rPr>
-              <a:t>P2</a:t>
-            </a:r>
-          </a:p>
-        </p:txBody>
-      </p:sp>
-      <p:sp>
-        <p:nvSpPr>
-          <p:cNvPr id="13" name="text-deo3">
-            <a:extLst xmlns:a="http://schemas.openxmlformats.org/drawingml/2006/main">
-              <a:ext uri="{FF2B5EF4-FFF2-40B4-BE49-F238E27FC236}">
-                <a16:creationId xmlns:a16="http://schemas.microsoft.com/office/drawing/2014/main" id="{F0A3E957-960B-48CF-945C-27AA3BF80D7E}"/>
-              </a:ext>
-            </a:extLst>
-          </p:cNvPr>
-          <p:cNvSpPr>
-            <a:spLocks xmlns:a="http://schemas.openxmlformats.org/drawingml/2006/main" noGrp="1"/>
-          </p:cNvSpPr>
-          <p:nvPr/>
-        </p:nvSpPr>
-        <p:spPr>
-          <a:xfrm xmlns:a="http://schemas.openxmlformats.org/drawingml/2006/main">
-            <a:off x="8181082" y="6244382"/>
-            <a:ext cx="618679" cy="381000"/>
-          </a:xfrm>
-          <a:prstGeom xmlns:a="http://schemas.openxmlformats.org/drawingml/2006/main" prst="rect">
-            <a:avLst/>
-          </a:prstGeom>
-          <a:noFill xmlns:a="http://schemas.openxmlformats.org/drawingml/2006/main"/>
-          <a:ln xmlns:a="http://schemas.openxmlformats.org/drawingml/2006/main" w="0">
-            <a:noFill/>
-          </a:ln>
-        </p:spPr>
-        <p:txBody>
-          <a:bodyPr xmlns:a="http://schemas.openxmlformats.org/drawingml/2006/main" wrap="none" lIns="0" tIns="0" rIns="0" bIns="0" anchor="t">
-            <a:normAutofit fontScale="100000"/>
-          </a:bodyPr>
-          <a:lstStyle xmlns:a="http://schemas.openxmlformats.org/drawingml/2006/main"/>
-          <a:p xmlns:a="http://schemas.openxmlformats.org/drawingml/2006/main">
-            <a:pPr algn="l">
-              <a:defRPr sz="1800">
-                <a:latin typeface="IBM Plex Sans"/>
-                <a:ea typeface="IBM Plex Sans"/>
-                <a:cs typeface="IBM Plex Sans"/>
-              </a:defRPr>
-            </a:pPr>
-            <a:r>
-              <a:rPr sz="1800" b="0">
-                <a:solidFill>
-                  <a:srgbClr val="13202D"/>
-                </a:solidFill>
-                <a:latin typeface="IBM Plex Sans"/>
-                <a:ea typeface="IBM Plex Sans"/>
-                <a:cs typeface="IBM Plex Sans"/>
-              </a:rPr>
-              <a:t>P3</a:t>
-            </a:r>
-          </a:p>
-        </p:txBody>
-      </p:sp>
-      <p:sp>
-        <p:nvSpPr>
-          <p:cNvPr id="14" name="text-deo3">
-            <a:extLst xmlns:a="http://schemas.openxmlformats.org/drawingml/2006/main">
-              <a:ext uri="{FF2B5EF4-FFF2-40B4-BE49-F238E27FC236}">
-                <a16:creationId xmlns:a16="http://schemas.microsoft.com/office/drawing/2014/main" id="{85EBF970-570C-4682-97AB-8550D663AAA0}"/>
-              </a:ext>
-            </a:extLst>
-          </p:cNvPr>
-          <p:cNvSpPr>
-            <a:spLocks xmlns:a="http://schemas.openxmlformats.org/drawingml/2006/main" noGrp="1"/>
-          </p:cNvSpPr>
-          <p:nvPr/>
-        </p:nvSpPr>
-        <p:spPr>
-          <a:xfrm xmlns:a="http://schemas.openxmlformats.org/drawingml/2006/main">
-            <a:off x="8971211" y="6244382"/>
-            <a:ext cx="618679" cy="381000"/>
-          </a:xfrm>
-          <a:prstGeom xmlns:a="http://schemas.openxmlformats.org/drawingml/2006/main" prst="rect">
-            <a:avLst/>
-          </a:prstGeom>
-          <a:noFill xmlns:a="http://schemas.openxmlformats.org/drawingml/2006/main"/>
-          <a:ln xmlns:a="http://schemas.openxmlformats.org/drawingml/2006/main" w="0">
-            <a:noFill/>
-          </a:ln>
-        </p:spPr>
-        <p:txBody>
-          <a:bodyPr xmlns:a="http://schemas.openxmlformats.org/drawingml/2006/main" wrap="none" lIns="0" tIns="0" rIns="0" bIns="0" anchor="t">
-            <a:normAutofit fontScale="100000"/>
-          </a:bodyPr>
-          <a:lstStyle xmlns:a="http://schemas.openxmlformats.org/drawingml/2006/main"/>
-          <a:p xmlns:a="http://schemas.openxmlformats.org/drawingml/2006/main">
-            <a:pPr algn="l">
-              <a:defRPr sz="1800">
-                <a:latin typeface="IBM Plex Sans"/>
-                <a:ea typeface="IBM Plex Sans"/>
-                <a:cs typeface="IBM Plex Sans"/>
-              </a:defRPr>
-            </a:pPr>
-            <a:r>
-              <a:rPr sz="1800" b="0">
-                <a:solidFill>
-                  <a:srgbClr val="13202D"/>
-                </a:solidFill>
-                <a:latin typeface="IBM Plex Sans"/>
-                <a:ea typeface="IBM Plex Sans"/>
-                <a:cs typeface="IBM Plex Sans"/>
-              </a:rPr>
-              <a:t>P4</a:t>
-            </a:r>
-          </a:p>
-        </p:txBody>
-      </p:sp>
-      <p:sp>
-        <p:nvSpPr>
-          <p:cNvPr id="15" name="text-deo3">
-            <a:extLst xmlns:a="http://schemas.openxmlformats.org/drawingml/2006/main">
-              <a:ext uri="{FF2B5EF4-FFF2-40B4-BE49-F238E27FC236}">
-                <a16:creationId xmlns:a16="http://schemas.microsoft.com/office/drawing/2014/main" id="{D6A17F0D-F473-4399-AA46-002DA7CE4D44}"/>
-              </a:ext>
-            </a:extLst>
-          </p:cNvPr>
-          <p:cNvSpPr>
-            <a:spLocks xmlns:a="http://schemas.openxmlformats.org/drawingml/2006/main" noGrp="1"/>
-          </p:cNvSpPr>
-          <p:nvPr/>
-        </p:nvSpPr>
-        <p:spPr>
-          <a:xfrm xmlns:a="http://schemas.openxmlformats.org/drawingml/2006/main">
-            <a:off x="1219200" y="9471720"/>
-            <a:ext cx="4265712" cy="381000"/>
-          </a:xfrm>
-          <a:prstGeom xmlns:a="http://schemas.openxmlformats.org/drawingml/2006/main" prst="rect">
-            <a:avLst/>
-          </a:prstGeom>
-          <a:noFill xmlns:a="http://schemas.openxmlformats.org/drawingml/2006/main"/>
-          <a:ln xmlns:a="http://schemas.openxmlformats.org/drawingml/2006/main" w="0">
-            <a:noFill/>
-          </a:ln>
-        </p:spPr>
-        <p:txBody>
-          <a:bodyPr xmlns:a="http://schemas.openxmlformats.org/drawingml/2006/main" wrap="none" lIns="0" tIns="0" rIns="0" bIns="0" anchor="t">
-            <a:normAutofit fontScale="100000"/>
-          </a:bodyPr>
-          <a:lstStyle xmlns:a="http://schemas.openxmlformats.org/drawingml/2006/main"/>
-          <a:p xmlns:a="http://schemas.openxmlformats.org/drawingml/2006/main">
-            <a:pPr algn="l">
-              <a:defRPr sz="1800">
-                <a:latin typeface="IBM Plex Sans"/>
-                <a:ea typeface="IBM Plex Sans"/>
-                <a:cs typeface="IBM Plex Sans"/>
-              </a:defRPr>
-            </a:pPr>
-            <a:r>
-              <a:rPr sz="1800" b="0">
-                <a:solidFill>
-                  <a:srgbClr val="5E6975"/>
-                </a:solidFill>
-                <a:latin typeface="IBM Plex Sans"/>
-                <a:ea typeface="IBM Plex Sans"/>
-                <a:cs typeface="IBM Plex Sans"/>
-              </a:rPr>
-              <a:t>Основе информационе безбедности</a:t>
-            </a:r>
-          </a:p>
-        </p:txBody>
-      </p:sp>
-      <p:sp>
-        <p:nvSpPr>
-          <p:cNvPr id="16" name="text-deo3">
-            <a:extLst xmlns:a="http://schemas.openxmlformats.org/drawingml/2006/main">
-              <a:ext uri="{FF2B5EF4-FFF2-40B4-BE49-F238E27FC236}">
-                <a16:creationId xmlns:a16="http://schemas.microsoft.com/office/drawing/2014/main" id="{72F84AF1-E93B-48AD-985D-865057C667B3}"/>
-              </a:ext>
-            </a:extLst>
-          </p:cNvPr>
-          <p:cNvSpPr>
-            <a:spLocks xmlns:a="http://schemas.openxmlformats.org/drawingml/2006/main" noGrp="1"/>
-          </p:cNvSpPr>
-          <p:nvPr/>
-        </p:nvSpPr>
-        <p:spPr>
-          <a:xfrm xmlns:a="http://schemas.openxmlformats.org/drawingml/2006/main">
-            <a:off x="16794361" y="9471720"/>
-            <a:ext cx="617339" cy="381000"/>
-          </a:xfrm>
-          <a:prstGeom xmlns:a="http://schemas.openxmlformats.org/drawingml/2006/main" prst="rect">
-            <a:avLst/>
-          </a:prstGeom>
-          <a:noFill xmlns:a="http://schemas.openxmlformats.org/drawingml/2006/main"/>
-          <a:ln xmlns:a="http://schemas.openxmlformats.org/drawingml/2006/main" w="0">
-            <a:noFill/>
-          </a:ln>
-        </p:spPr>
-        <p:txBody>
-          <a:bodyPr xmlns:a="http://schemas.openxmlformats.org/drawingml/2006/main" wrap="none" lIns="0" tIns="0" rIns="0" bIns="0" anchor="t">
-            <a:normAutofit fontScale="100000"/>
-          </a:bodyPr>
-          <a:lstStyle xmlns:a="http://schemas.openxmlformats.org/drawingml/2006/main"/>
-          <a:p xmlns:a="http://schemas.openxmlformats.org/drawingml/2006/main">
-            <a:pPr algn="l">
+              <a:buNone/>
               <a:defRPr sz="1800">
                 <a:latin typeface="IBM Plex Mono"/>
                 <a:ea typeface="IBM Plex Mono"/>
@@ -16297,6 +15952,318 @@
                 <a:cs typeface="IBM Plex Mono"/>
               </a:rPr>
               <a:t>17</a:t>
+            </a:r>
+          </a:p>
+        </p:txBody>
+      </p:sp>
+      <p:sp>
+        <p:nvSpPr>
+          <p:cNvPr id="17" name="checkpoint-update">
+            <a:extLst xmlns:a="http://schemas.openxmlformats.org/drawingml/2006/main">
+              <a:ext uri="{FF2B5EF4-FFF2-40B4-BE49-F238E27FC236}">
+                <a16:creationId xmlns:a16="http://schemas.microsoft.com/office/drawing/2014/main" id="{A98C4C8D-F3E0-4A63-82FB-B6B053DA579D}"/>
+              </a:ext>
+            </a:extLst>
+          </p:cNvPr>
+          <p:cNvSpPr>
+            <a:spLocks xmlns:a="http://schemas.openxmlformats.org/drawingml/2006/main" noGrp="1"/>
+          </p:cNvSpPr>
+          <p:nvPr/>
+        </p:nvSpPr>
+        <p:spPr>
+          <a:xfrm xmlns:a="http://schemas.openxmlformats.org/drawingml/2006/main">
+            <a:off x="6400800" y="6153150"/>
+            <a:ext cx="3238500" cy="476250"/>
+          </a:xfrm>
+          <a:prstGeom xmlns:a="http://schemas.openxmlformats.org/drawingml/2006/main" prst="rect">
+            <a:avLst/>
+          </a:prstGeom>
+          <a:noFill xmlns:a="http://schemas.openxmlformats.org/drawingml/2006/main"/>
+          <a:ln xmlns:a="http://schemas.openxmlformats.org/drawingml/2006/main" w="0">
+            <a:noFill/>
+          </a:ln>
+        </p:spPr>
+        <p:txBody>
+          <a:bodyPr xmlns:a="http://schemas.openxmlformats.org/drawingml/2006/main" lIns="0" tIns="0" rIns="0" bIns="0"/>
+          <a:lstStyle xmlns:a="http://schemas.openxmlformats.org/drawingml/2006/main">
+            <a:defPPr>
+              <a:defRPr sz="1950" b="0">
+                <a:solidFill>
+                  <a:srgbClr val="0A5CA8"/>
+                </a:solidFill>
+                <a:latin typeface="IBM Plex Mono"/>
+                <a:ea typeface="IBM Plex Mono"/>
+                <a:cs typeface="IBM Plex Mono"/>
+              </a:defRPr>
+            </a:defPPr>
+            <a:lvl1pPr>
+              <a:defRPr sz="1950" b="0">
+                <a:solidFill>
+                  <a:srgbClr val="0A5CA8"/>
+                </a:solidFill>
+                <a:latin typeface="IBM Plex Mono"/>
+                <a:ea typeface="IBM Plex Mono"/>
+                <a:cs typeface="IBM Plex Mono"/>
+              </a:defRPr>
+            </a:lvl1pPr>
+            <a:lvl2pPr>
+              <a:defRPr sz="1950" b="0">
+                <a:solidFill>
+                  <a:srgbClr val="0A5CA8"/>
+                </a:solidFill>
+                <a:latin typeface="IBM Plex Mono"/>
+                <a:ea typeface="IBM Plex Mono"/>
+                <a:cs typeface="IBM Plex Mono"/>
+              </a:defRPr>
+            </a:lvl2pPr>
+            <a:lvl3pPr>
+              <a:defRPr sz="1950" b="0">
+                <a:solidFill>
+                  <a:srgbClr val="0A5CA8"/>
+                </a:solidFill>
+                <a:latin typeface="IBM Plex Mono"/>
+                <a:ea typeface="IBM Plex Mono"/>
+                <a:cs typeface="IBM Plex Mono"/>
+              </a:defRPr>
+            </a:lvl3pPr>
+            <a:lvl4pPr>
+              <a:defRPr sz="1950" b="0">
+                <a:solidFill>
+                  <a:srgbClr val="0A5CA8"/>
+                </a:solidFill>
+                <a:latin typeface="IBM Plex Mono"/>
+                <a:ea typeface="IBM Plex Mono"/>
+                <a:cs typeface="IBM Plex Mono"/>
+              </a:defRPr>
+            </a:lvl4pPr>
+            <a:lvl5pPr>
+              <a:defRPr sz="1950" b="0">
+                <a:solidFill>
+                  <a:srgbClr val="0A5CA8"/>
+                </a:solidFill>
+                <a:latin typeface="IBM Plex Mono"/>
+                <a:ea typeface="IBM Plex Mono"/>
+                <a:cs typeface="IBM Plex Mono"/>
+              </a:defRPr>
+            </a:lvl5pPr>
+            <a:lvl6pPr>
+              <a:defRPr sz="1950" b="0">
+                <a:solidFill>
+                  <a:srgbClr val="0A5CA8"/>
+                </a:solidFill>
+                <a:latin typeface="IBM Plex Mono"/>
+                <a:ea typeface="IBM Plex Mono"/>
+                <a:cs typeface="IBM Plex Mono"/>
+              </a:defRPr>
+            </a:lvl6pPr>
+            <a:lvl7pPr>
+              <a:defRPr sz="1950" b="0">
+                <a:solidFill>
+                  <a:srgbClr val="0A5CA8"/>
+                </a:solidFill>
+                <a:latin typeface="IBM Plex Mono"/>
+                <a:ea typeface="IBM Plex Mono"/>
+                <a:cs typeface="IBM Plex Mono"/>
+              </a:defRPr>
+            </a:lvl7pPr>
+            <a:lvl8pPr>
+              <a:defRPr sz="1950" b="0">
+                <a:solidFill>
+                  <a:srgbClr val="0A5CA8"/>
+                </a:solidFill>
+                <a:latin typeface="IBM Plex Mono"/>
+                <a:ea typeface="IBM Plex Mono"/>
+                <a:cs typeface="IBM Plex Mono"/>
+              </a:defRPr>
+            </a:lvl8pPr>
+            <a:lvl9pPr>
+              <a:defRPr sz="1950" b="0">
+                <a:solidFill>
+                  <a:srgbClr val="0A5CA8"/>
+                </a:solidFill>
+                <a:latin typeface="IBM Plex Mono"/>
+                <a:ea typeface="IBM Plex Mono"/>
+                <a:cs typeface="IBM Plex Mono"/>
+              </a:defRPr>
+            </a:lvl9pPr>
+          </a:lstStyle>
+          <a:p xmlns:a="http://schemas.openxmlformats.org/drawingml/2006/main">
+            <a:pPr>
+              <a:defRPr sz="1950" b="0">
+                <a:solidFill>
+                  <a:srgbClr val="0A5CA8"/>
+                </a:solidFill>
+                <a:latin typeface="IBM Plex Mono"/>
+                <a:ea typeface="IBM Plex Mono"/>
+                <a:cs typeface="IBM Plex Mono"/>
+              </a:defRPr>
+            </a:pPr>
+            <a:r>
+              <a:rPr sz="1950" b="0">
+                <a:solidFill>
+                  <a:srgbClr val="0A5CA8"/>
+                </a:solidFill>
+                <a:latin typeface="IBM Plex Mono"/>
+                <a:ea typeface="IBM Plex Mono"/>
+                <a:cs typeface="IBM Plex Mono"/>
+              </a:rPr>
+              <a:t>КТ1 · 4. вежба</a:t>
+            </a:r>
+          </a:p>
+        </p:txBody>
+      </p:sp>
+      <p:sp>
+        <p:nvSpPr>
+          <p:cNvPr id="18" name="checkpoint-update">
+            <a:extLst xmlns:a="http://schemas.openxmlformats.org/drawingml/2006/main">
+              <a:ext uri="{FF2B5EF4-FFF2-40B4-BE49-F238E27FC236}">
+                <a16:creationId xmlns:a16="http://schemas.microsoft.com/office/drawing/2014/main" id="{86BBE719-34F7-4F0B-A3E4-3FF49C2B95C8}"/>
+              </a:ext>
+            </a:extLst>
+          </p:cNvPr>
+          <p:cNvSpPr>
+            <a:spLocks xmlns:a="http://schemas.openxmlformats.org/drawingml/2006/main" noGrp="1"/>
+          </p:cNvSpPr>
+          <p:nvPr/>
+        </p:nvSpPr>
+        <p:spPr>
+          <a:xfrm xmlns:a="http://schemas.openxmlformats.org/drawingml/2006/main">
+            <a:off x="10001250" y="6153150"/>
+            <a:ext cx="3238500" cy="476250"/>
+          </a:xfrm>
+          <a:prstGeom xmlns:a="http://schemas.openxmlformats.org/drawingml/2006/main" prst="rect">
+            <a:avLst/>
+          </a:prstGeom>
+          <a:noFill xmlns:a="http://schemas.openxmlformats.org/drawingml/2006/main"/>
+          <a:ln xmlns:a="http://schemas.openxmlformats.org/drawingml/2006/main" w="0">
+            <a:noFill/>
+          </a:ln>
+        </p:spPr>
+        <p:txBody>
+          <a:bodyPr xmlns:a="http://schemas.openxmlformats.org/drawingml/2006/main" lIns="0" tIns="0" rIns="0" bIns="0"/>
+          <a:lstStyle xmlns:a="http://schemas.openxmlformats.org/drawingml/2006/main">
+            <a:defPPr>
+              <a:defRPr sz="1950" b="0">
+                <a:solidFill>
+                  <a:srgbClr val="0A5CA8"/>
+                </a:solidFill>
+                <a:latin typeface="IBM Plex Mono"/>
+                <a:ea typeface="IBM Plex Mono"/>
+                <a:cs typeface="IBM Plex Mono"/>
+              </a:defRPr>
+            </a:defPPr>
+            <a:lvl1pPr>
+              <a:defRPr sz="1950" b="0">
+                <a:solidFill>
+                  <a:srgbClr val="0A5CA8"/>
+                </a:solidFill>
+                <a:latin typeface="IBM Plex Mono"/>
+                <a:ea typeface="IBM Plex Mono"/>
+                <a:cs typeface="IBM Plex Mono"/>
+              </a:defRPr>
+            </a:lvl1pPr>
+            <a:lvl2pPr>
+              <a:defRPr sz="1950" b="0">
+                <a:solidFill>
+                  <a:srgbClr val="0A5CA8"/>
+                </a:solidFill>
+                <a:latin typeface="IBM Plex Mono"/>
+                <a:ea typeface="IBM Plex Mono"/>
+                <a:cs typeface="IBM Plex Mono"/>
+              </a:defRPr>
+            </a:lvl2pPr>
+            <a:lvl3pPr>
+              <a:defRPr sz="1950" b="0">
+                <a:solidFill>
+                  <a:srgbClr val="0A5CA8"/>
+                </a:solidFill>
+                <a:latin typeface="IBM Plex Mono"/>
+                <a:ea typeface="IBM Plex Mono"/>
+                <a:cs typeface="IBM Plex Mono"/>
+              </a:defRPr>
+            </a:lvl3pPr>
+            <a:lvl4pPr>
+              <a:defRPr sz="1950" b="0">
+                <a:solidFill>
+                  <a:srgbClr val="0A5CA8"/>
+                </a:solidFill>
+                <a:latin typeface="IBM Plex Mono"/>
+                <a:ea typeface="IBM Plex Mono"/>
+                <a:cs typeface="IBM Plex Mono"/>
+              </a:defRPr>
+            </a:lvl4pPr>
+            <a:lvl5pPr>
+              <a:defRPr sz="1950" b="0">
+                <a:solidFill>
+                  <a:srgbClr val="0A5CA8"/>
+                </a:solidFill>
+                <a:latin typeface="IBM Plex Mono"/>
+                <a:ea typeface="IBM Plex Mono"/>
+                <a:cs typeface="IBM Plex Mono"/>
+              </a:defRPr>
+            </a:lvl5pPr>
+            <a:lvl6pPr>
+              <a:defRPr sz="1950" b="0">
+                <a:solidFill>
+                  <a:srgbClr val="0A5CA8"/>
+                </a:solidFill>
+                <a:latin typeface="IBM Plex Mono"/>
+                <a:ea typeface="IBM Plex Mono"/>
+                <a:cs typeface="IBM Plex Mono"/>
+              </a:defRPr>
+            </a:lvl6pPr>
+            <a:lvl7pPr>
+              <a:defRPr sz="1950" b="0">
+                <a:solidFill>
+                  <a:srgbClr val="0A5CA8"/>
+                </a:solidFill>
+                <a:latin typeface="IBM Plex Mono"/>
+                <a:ea typeface="IBM Plex Mono"/>
+                <a:cs typeface="IBM Plex Mono"/>
+              </a:defRPr>
+            </a:lvl7pPr>
+            <a:lvl8pPr>
+              <a:defRPr sz="1950" b="0">
+                <a:solidFill>
+                  <a:srgbClr val="0A5CA8"/>
+                </a:solidFill>
+                <a:latin typeface="IBM Plex Mono"/>
+                <a:ea typeface="IBM Plex Mono"/>
+                <a:cs typeface="IBM Plex Mono"/>
+              </a:defRPr>
+            </a:lvl8pPr>
+            <a:lvl9pPr>
+              <a:defRPr sz="1950" b="0">
+                <a:solidFill>
+                  <a:srgbClr val="0A5CA8"/>
+                </a:solidFill>
+                <a:latin typeface="IBM Plex Mono"/>
+                <a:ea typeface="IBM Plex Mono"/>
+                <a:cs typeface="IBM Plex Mono"/>
+              </a:defRPr>
+            </a:lvl9pPr>
+          </a:lstStyle>
+          <a:p xmlns:a="http://schemas.openxmlformats.org/drawingml/2006/main">
+            <a:pPr>
+              <a:defRPr sz="1950" b="0">
+                <a:solidFill>
+                  <a:srgbClr val="0A5CA8"/>
+                </a:solidFill>
+                <a:latin typeface="IBM Plex Mono"/>
+                <a:ea typeface="IBM Plex Mono"/>
+                <a:cs typeface="IBM Plex Mono"/>
+              </a:defRPr>
+            </a:pPr>
+            <a:r>
+              <a:rPr sz="1950" b="0">
+                <a:solidFill>
+                  <a:srgbClr val="0A5CA8"/>
+                </a:solidFill>
+                <a:latin typeface="IBM Plex Mono"/>
+                <a:ea typeface="IBM Plex Mono"/>
+                <a:cs typeface="IBM Plex Mono"/>
+              </a:rPr>
+              <a:t>КТ2 · 8. вежба</a:t>
             </a:r>
           </a:p>
         </p:txBody>
@@ -16364,142 +16331,6 @@
       </p:sp>
       <p:sp>
         <p:nvSpPr>
-          <p:cNvPr id="2" name="">
-            <a:extLst xmlns:a="http://schemas.openxmlformats.org/drawingml/2006/main">
-              <a:ext uri="{FF2B5EF4-FFF2-40B4-BE49-F238E27FC236}">
-                <a16:creationId xmlns:a16="http://schemas.microsoft.com/office/drawing/2014/main" id="{EBB2EFC9-006F-4B06-9018-F79C2C071D0F}"/>
-              </a:ext>
-            </a:extLst>
-          </p:cNvPr>
-          <p:cNvSpPr>
-            <a:spLocks xmlns:a="http://schemas.openxmlformats.org/drawingml/2006/main" noGrp="1"/>
-          </p:cNvSpPr>
-          <p:nvPr/>
-        </p:nvSpPr>
-        <p:spPr>
-          <a:xfrm xmlns:a="http://schemas.openxmlformats.org/drawingml/2006/main">
-            <a:off x="1219200" y="3112591"/>
-            <a:ext cx="3476625" cy="2403872"/>
-          </a:xfrm>
-          <a:prstGeom xmlns:a="http://schemas.openxmlformats.org/drawingml/2006/main" prst="roundRect">
-            <a:avLst>
-              <a:gd name="adj" fmla="val 6340"/>
-            </a:avLst>
-          </a:prstGeom>
-          <a:solidFill xmlns:a="http://schemas.openxmlformats.org/drawingml/2006/main">
-            <a:srgbClr val="FCFCFB"/>
-          </a:solidFill>
-          <a:ln xmlns:a="http://schemas.openxmlformats.org/drawingml/2006/main" w="9525">
-            <a:solidFill>
-              <a:srgbClr val="D3DAE1"/>
-            </a:solidFill>
-          </a:ln>
-        </p:spPr>
-      </p:sp>
-      <p:sp>
-        <p:nvSpPr>
-          <p:cNvPr id="3" name="">
-            <a:extLst xmlns:a="http://schemas.openxmlformats.org/drawingml/2006/main">
-              <a:ext uri="{FF2B5EF4-FFF2-40B4-BE49-F238E27FC236}">
-                <a16:creationId xmlns:a16="http://schemas.microsoft.com/office/drawing/2014/main" id="{853D3DB3-5370-4625-A934-64B24CB43A0B}"/>
-              </a:ext>
-            </a:extLst>
-          </p:cNvPr>
-          <p:cNvSpPr>
-            <a:spLocks xmlns:a="http://schemas.openxmlformats.org/drawingml/2006/main" noGrp="1"/>
-          </p:cNvSpPr>
-          <p:nvPr/>
-        </p:nvSpPr>
-        <p:spPr>
-          <a:xfrm xmlns:a="http://schemas.openxmlformats.org/drawingml/2006/main">
-            <a:off x="5343525" y="3112591"/>
-            <a:ext cx="3476625" cy="2403872"/>
-          </a:xfrm>
-          <a:prstGeom xmlns:a="http://schemas.openxmlformats.org/drawingml/2006/main" prst="roundRect">
-            <a:avLst>
-              <a:gd name="adj" fmla="val 6340"/>
-            </a:avLst>
-          </a:prstGeom>
-          <a:solidFill xmlns:a="http://schemas.openxmlformats.org/drawingml/2006/main">
-            <a:srgbClr val="FCFCFB"/>
-          </a:solidFill>
-          <a:ln xmlns:a="http://schemas.openxmlformats.org/drawingml/2006/main" w="9525">
-            <a:solidFill>
-              <a:srgbClr val="D3DAE1"/>
-            </a:solidFill>
-          </a:ln>
-        </p:spPr>
-      </p:sp>
-      <p:sp>
-        <p:nvSpPr>
-          <p:cNvPr id="4" name="">
-            <a:extLst xmlns:a="http://schemas.openxmlformats.org/drawingml/2006/main">
-              <a:ext uri="{FF2B5EF4-FFF2-40B4-BE49-F238E27FC236}">
-                <a16:creationId xmlns:a16="http://schemas.microsoft.com/office/drawing/2014/main" id="{82333F3B-90A3-4CB0-AFA6-4B183D582850}"/>
-              </a:ext>
-            </a:extLst>
-          </p:cNvPr>
-          <p:cNvSpPr>
-            <a:spLocks xmlns:a="http://schemas.openxmlformats.org/drawingml/2006/main" noGrp="1"/>
-          </p:cNvSpPr>
-          <p:nvPr/>
-        </p:nvSpPr>
-        <p:spPr>
-          <a:xfrm xmlns:a="http://schemas.openxmlformats.org/drawingml/2006/main">
-            <a:off x="9467850" y="3112591"/>
-            <a:ext cx="3476625" cy="2403872"/>
-          </a:xfrm>
-          <a:prstGeom xmlns:a="http://schemas.openxmlformats.org/drawingml/2006/main" prst="roundRect">
-            <a:avLst>
-              <a:gd name="adj" fmla="val 6340"/>
-            </a:avLst>
-          </a:prstGeom>
-          <a:solidFill xmlns:a="http://schemas.openxmlformats.org/drawingml/2006/main">
-            <a:srgbClr val="FCFCFB"/>
-          </a:solidFill>
-          <a:ln xmlns:a="http://schemas.openxmlformats.org/drawingml/2006/main" w="9525">
-            <a:solidFill>
-              <a:srgbClr val="D3DAE1"/>
-            </a:solidFill>
-          </a:ln>
-        </p:spPr>
-      </p:sp>
-      <p:sp>
-        <p:nvSpPr>
-          <p:cNvPr id="5" name="">
-            <a:extLst xmlns:a="http://schemas.openxmlformats.org/drawingml/2006/main">
-              <a:ext uri="{FF2B5EF4-FFF2-40B4-BE49-F238E27FC236}">
-                <a16:creationId xmlns:a16="http://schemas.microsoft.com/office/drawing/2014/main" id="{5A6D434F-F92A-4BF2-AC80-69C2FEAB6C75}"/>
-              </a:ext>
-            </a:extLst>
-          </p:cNvPr>
-          <p:cNvSpPr>
-            <a:spLocks xmlns:a="http://schemas.openxmlformats.org/drawingml/2006/main" noGrp="1"/>
-          </p:cNvSpPr>
-          <p:nvPr/>
-        </p:nvSpPr>
-        <p:spPr>
-          <a:xfrm xmlns:a="http://schemas.openxmlformats.org/drawingml/2006/main">
-            <a:off x="13592175" y="3112591"/>
-            <a:ext cx="3476625" cy="2403872"/>
-          </a:xfrm>
-          <a:prstGeom xmlns:a="http://schemas.openxmlformats.org/drawingml/2006/main" prst="roundRect">
-            <a:avLst>
-              <a:gd name="adj" fmla="val 6340"/>
-            </a:avLst>
-          </a:prstGeom>
-          <a:solidFill xmlns:a="http://schemas.openxmlformats.org/drawingml/2006/main">
-            <a:srgbClr val="FCFCFB"/>
-          </a:solidFill>
-          <a:ln xmlns:a="http://schemas.openxmlformats.org/drawingml/2006/main" w="9525">
-            <a:solidFill>
-              <a:srgbClr val="D3DAE1"/>
-            </a:solidFill>
-          </a:ln>
-        </p:spPr>
-      </p:sp>
-      <p:sp>
-        <p:nvSpPr>
           <p:cNvPr id="6" name="">
             <a:extLst xmlns:a="http://schemas.openxmlformats.org/drawingml/2006/main">
               <a:ext uri="{FF2B5EF4-FFF2-40B4-BE49-F238E27FC236}">
@@ -17184,14 +17015,20 @@
       </p:sp>
       <p:pic>
         <p:nvPicPr>
-          <p:cNvPr id="44" name=""/>
+          <p:cNvPr id="44" name="">
+            <a:extLst xmlns:a="http://schemas.openxmlformats.org/drawingml/2006/main">
+              <a:ext uri="{FF2B5EF4-FFF2-40B4-BE49-F238E27FC236}">
+                <a16:creationId xmlns:a16="http://schemas.microsoft.com/office/drawing/2014/main" id="{32FBF26B-18B1-42CC-A266-662A9BF7AB0B}"/>
+              </a:ext>
+            </a:extLst>
+          </p:cNvPr>
           <p:cNvPicPr>
             <a:picLocks xmlns:a="http://schemas.openxmlformats.org/drawingml/2006/main" noChangeAspect="1"/>
           </p:cNvPicPr>
           <p:nvPr/>
         </p:nvPicPr>
         <p:blipFill>
-          <a:blip xmlns:r="http://schemas.openxmlformats.org/officeDocument/2006/relationships" xmlns:a="http://schemas.openxmlformats.org/drawingml/2006/main" r:embed="R3af3fdefda1849dc"/>
+          <a:blip xmlns:r="http://schemas.openxmlformats.org/officeDocument/2006/relationships" xmlns:a="http://schemas.openxmlformats.org/drawingml/2006/main" r:embed="R7c3fce3e59314918"/>
           <a:stretch xmlns:a="http://schemas.openxmlformats.org/drawingml/2006/main"/>
         </p:blipFill>
         <p:spPr>
@@ -17206,14 +17043,20 @@
       </p:pic>
       <p:pic>
         <p:nvPicPr>
-          <p:cNvPr id="45" name=""/>
+          <p:cNvPr id="45" name="">
+            <a:extLst xmlns:a="http://schemas.openxmlformats.org/drawingml/2006/main">
+              <a:ext uri="{FF2B5EF4-FFF2-40B4-BE49-F238E27FC236}">
+                <a16:creationId xmlns:a16="http://schemas.microsoft.com/office/drawing/2014/main" id="{AE0D21B7-BAEA-4037-BB9F-C6CC578F2701}"/>
+              </a:ext>
+            </a:extLst>
+          </p:cNvPr>
           <p:cNvPicPr>
             <a:picLocks xmlns:a="http://schemas.openxmlformats.org/drawingml/2006/main" noChangeAspect="1"/>
           </p:cNvPicPr>
           <p:nvPr/>
         </p:nvPicPr>
         <p:blipFill>
-          <a:blip xmlns:r="http://schemas.openxmlformats.org/officeDocument/2006/relationships" xmlns:a="http://schemas.openxmlformats.org/drawingml/2006/main" r:embed="R3c6508fe10f9479a"/>
+          <a:blip xmlns:r="http://schemas.openxmlformats.org/officeDocument/2006/relationships" xmlns:a="http://schemas.openxmlformats.org/drawingml/2006/main" r:embed="Rfc813bb2dc7e49c5"/>
           <a:stretch xmlns:a="http://schemas.openxmlformats.org/drawingml/2006/main"/>
         </p:blipFill>
         <p:spPr>
@@ -17228,14 +17071,20 @@
       </p:pic>
       <p:pic>
         <p:nvPicPr>
-          <p:cNvPr id="46" name=""/>
+          <p:cNvPr id="46" name="">
+            <a:extLst xmlns:a="http://schemas.openxmlformats.org/drawingml/2006/main">
+              <a:ext uri="{FF2B5EF4-FFF2-40B4-BE49-F238E27FC236}">
+                <a16:creationId xmlns:a16="http://schemas.microsoft.com/office/drawing/2014/main" id="{643DB419-8D58-4BCB-B677-697C5504254F}"/>
+              </a:ext>
+            </a:extLst>
+          </p:cNvPr>
           <p:cNvPicPr>
             <a:picLocks xmlns:a="http://schemas.openxmlformats.org/drawingml/2006/main" noChangeAspect="1"/>
           </p:cNvPicPr>
           <p:nvPr/>
         </p:nvPicPr>
         <p:blipFill>
-          <a:blip xmlns:r="http://schemas.openxmlformats.org/officeDocument/2006/relationships" xmlns:a="http://schemas.openxmlformats.org/drawingml/2006/main" r:embed="R647c7df92cd84450"/>
+          <a:blip xmlns:r="http://schemas.openxmlformats.org/officeDocument/2006/relationships" xmlns:a="http://schemas.openxmlformats.org/drawingml/2006/main" r:embed="R4dd2c7bf14124d69"/>
           <a:stretch xmlns:a="http://schemas.openxmlformats.org/drawingml/2006/main"/>
         </p:blipFill>
         <p:spPr>
@@ -17282,6 +17131,7 @@
           <a:lstStyle xmlns:a="http://schemas.openxmlformats.org/drawingml/2006/main"/>
           <a:p xmlns:a="http://schemas.openxmlformats.org/drawingml/2006/main">
             <a:pPr algn="l">
+              <a:buNone/>
               <a:defRPr sz="1800">
                 <a:latin typeface="IBM Plex Mono"/>
                 <a:ea typeface="IBM Plex Mono"/>
@@ -17336,6 +17186,7 @@
           <a:lstStyle xmlns:a="http://schemas.openxmlformats.org/drawingml/2006/main"/>
           <a:p xmlns:a="http://schemas.openxmlformats.org/drawingml/2006/main">
             <a:pPr algn="l">
+              <a:buNone/>
               <a:defRPr sz="4500">
                 <a:latin typeface="IBM Plex Sans"/>
                 <a:ea typeface="IBM Plex Sans"/>
@@ -17390,6 +17241,7 @@
           <a:lstStyle xmlns:a="http://schemas.openxmlformats.org/drawingml/2006/main"/>
           <a:p xmlns:a="http://schemas.openxmlformats.org/drawingml/2006/main">
             <a:pPr algn="l">
+              <a:buNone/>
               <a:defRPr sz="2100">
                 <a:latin typeface="IBM Plex Sans"/>
                 <a:ea typeface="IBM Plex Sans"/>
@@ -17405,29 +17257,29 @@
                 <a:ea typeface="IBM Plex Sans"/>
                 <a:cs typeface="IBM Plex Sans"/>
               </a:rPr>
-              <a:t>Контролне тачке одржавају се сваке друге рачунарске вежбе и проверавају унапред дефинисан напредак.</a:t>
-            </a:r>
-          </a:p>
-        </p:txBody>
-      </p:sp>
-      <p:sp>
-        <p:nvSpPr>
-          <p:cNvPr id="15" name="text-source-07">
-            <a:extLst xmlns:a="http://schemas.openxmlformats.org/drawingml/2006/main">
-              <a:ext uri="{FF2B5EF4-FFF2-40B4-BE49-F238E27FC236}">
-                <a16:creationId xmlns:a16="http://schemas.microsoft.com/office/drawing/2014/main" id="{20661A6B-9430-4AAF-8A60-8A931716D8E1}"/>
-              </a:ext>
-            </a:extLst>
-          </p:cNvPr>
-          <p:cNvSpPr>
-            <a:spLocks xmlns:a="http://schemas.openxmlformats.org/drawingml/2006/main" noGrp="1"/>
-          </p:cNvSpPr>
-          <p:nvPr/>
-        </p:nvSpPr>
-        <p:spPr>
-          <a:xfrm xmlns:a="http://schemas.openxmlformats.org/drawingml/2006/main">
-            <a:off x="1495425" y="3407866"/>
-            <a:ext cx="845939" cy="619125"/>
+              <a:t>Две контролне тачке одржавају се у терминима 4. и 8. рачунарске вежбе.</a:t>
+            </a:r>
+          </a:p>
+        </p:txBody>
+      </p:sp>
+      <p:sp>
+        <p:nvSpPr>
+          <p:cNvPr id="31" name="text-source-07">
+            <a:extLst xmlns:a="http://schemas.openxmlformats.org/drawingml/2006/main">
+              <a:ext uri="{FF2B5EF4-FFF2-40B4-BE49-F238E27FC236}">
+                <a16:creationId xmlns:a16="http://schemas.microsoft.com/office/drawing/2014/main" id="{265AD0C1-50C8-4066-98AF-4357604FE3B6}"/>
+              </a:ext>
+            </a:extLst>
+          </p:cNvPr>
+          <p:cNvSpPr>
+            <a:spLocks xmlns:a="http://schemas.openxmlformats.org/drawingml/2006/main" noGrp="1"/>
+          </p:cNvSpPr>
+          <p:nvPr/>
+        </p:nvSpPr>
+        <p:spPr>
+          <a:xfrm xmlns:a="http://schemas.openxmlformats.org/drawingml/2006/main">
+            <a:off x="1504950" y="6011763"/>
+            <a:ext cx="2537520" cy="381000"/>
           </a:xfrm>
           <a:prstGeom xmlns:a="http://schemas.openxmlformats.org/drawingml/2006/main" prst="rect">
             <a:avLst/>
@@ -17444,870 +17296,7 @@
           <a:lstStyle xmlns:a="http://schemas.openxmlformats.org/drawingml/2006/main"/>
           <a:p xmlns:a="http://schemas.openxmlformats.org/drawingml/2006/main">
             <a:pPr algn="l">
-              <a:defRPr sz="3300">
-                <a:latin typeface="IBM Plex Mono"/>
-                <a:ea typeface="IBM Plex Mono"/>
-                <a:cs typeface="IBM Plex Mono"/>
-              </a:defRPr>
-            </a:pPr>
-            <a:r>
-              <a:rPr sz="3300" b="0">
-                <a:solidFill>
-                  <a:srgbClr val="0A5CA8"/>
-                </a:solidFill>
-                <a:latin typeface="IBM Plex Mono"/>
-                <a:ea typeface="IBM Plex Mono"/>
-                <a:cs typeface="IBM Plex Mono"/>
-              </a:rPr>
-              <a:t>01</a:t>
-            </a:r>
-          </a:p>
-        </p:txBody>
-      </p:sp>
-      <p:sp>
-        <p:nvSpPr>
-          <p:cNvPr id="16" name="text-source-07">
-            <a:extLst xmlns:a="http://schemas.openxmlformats.org/drawingml/2006/main">
-              <a:ext uri="{FF2B5EF4-FFF2-40B4-BE49-F238E27FC236}">
-                <a16:creationId xmlns:a16="http://schemas.microsoft.com/office/drawing/2014/main" id="{836A2A12-CAEC-4D5B-93E4-789C4247A536}"/>
-              </a:ext>
-            </a:extLst>
-          </p:cNvPr>
-          <p:cNvSpPr>
-            <a:spLocks xmlns:a="http://schemas.openxmlformats.org/drawingml/2006/main" noGrp="1"/>
-          </p:cNvSpPr>
-          <p:nvPr/>
-        </p:nvSpPr>
-        <p:spPr>
-          <a:xfrm xmlns:a="http://schemas.openxmlformats.org/drawingml/2006/main">
-            <a:off x="1495425" y="4108847"/>
-            <a:ext cx="673894" cy="428625"/>
-          </a:xfrm>
-          <a:prstGeom xmlns:a="http://schemas.openxmlformats.org/drawingml/2006/main" prst="rect">
-            <a:avLst/>
-          </a:prstGeom>
-          <a:noFill xmlns:a="http://schemas.openxmlformats.org/drawingml/2006/main"/>
-          <a:ln xmlns:a="http://schemas.openxmlformats.org/drawingml/2006/main" w="0">
-            <a:noFill/>
-          </a:ln>
-        </p:spPr>
-        <p:txBody>
-          <a:bodyPr xmlns:a="http://schemas.openxmlformats.org/drawingml/2006/main" wrap="none" lIns="0" tIns="0" rIns="0" bIns="0" anchor="t">
-            <a:normAutofit fontScale="100000"/>
-          </a:bodyPr>
-          <a:lstStyle xmlns:a="http://schemas.openxmlformats.org/drawingml/2006/main"/>
-          <a:p xmlns:a="http://schemas.openxmlformats.org/drawingml/2006/main">
-            <a:pPr algn="l">
-              <a:defRPr sz="2100">
-                <a:latin typeface="IBM Plex Sans"/>
-                <a:ea typeface="IBM Plex Sans"/>
-                <a:cs typeface="IBM Plex Sans"/>
-              </a:defRPr>
-            </a:pPr>
-            <a:r>
-              <a:rPr sz="2100" b="1">
-                <a:solidFill>
-                  <a:srgbClr val="13202D"/>
-                </a:solidFill>
-                <a:latin typeface="IBM Plex Sans"/>
-                <a:ea typeface="IBM Plex Sans"/>
-                <a:cs typeface="IBM Plex Sans"/>
-              </a:rPr>
-              <a:t>P1</a:t>
-            </a:r>
-          </a:p>
-        </p:txBody>
-      </p:sp>
-      <p:sp>
-        <p:nvSpPr>
-          <p:cNvPr id="17" name="text-source-07">
-            <a:extLst xmlns:a="http://schemas.openxmlformats.org/drawingml/2006/main">
-              <a:ext uri="{FF2B5EF4-FFF2-40B4-BE49-F238E27FC236}">
-                <a16:creationId xmlns:a16="http://schemas.microsoft.com/office/drawing/2014/main" id="{1BA5EAA9-C9BF-4FC5-958D-96BE4B9A583B}"/>
-              </a:ext>
-            </a:extLst>
-          </p:cNvPr>
-          <p:cNvSpPr>
-            <a:spLocks xmlns:a="http://schemas.openxmlformats.org/drawingml/2006/main" noGrp="1"/>
-          </p:cNvSpPr>
-          <p:nvPr/>
-        </p:nvSpPr>
-        <p:spPr>
-          <a:xfrm xmlns:a="http://schemas.openxmlformats.org/drawingml/2006/main">
-            <a:off x="1495425" y="4600277"/>
-            <a:ext cx="2344192" cy="381000"/>
-          </a:xfrm>
-          <a:prstGeom xmlns:a="http://schemas.openxmlformats.org/drawingml/2006/main" prst="rect">
-            <a:avLst/>
-          </a:prstGeom>
-          <a:noFill xmlns:a="http://schemas.openxmlformats.org/drawingml/2006/main"/>
-          <a:ln xmlns:a="http://schemas.openxmlformats.org/drawingml/2006/main" w="0">
-            <a:noFill/>
-          </a:ln>
-        </p:spPr>
-        <p:txBody>
-          <a:bodyPr xmlns:a="http://schemas.openxmlformats.org/drawingml/2006/main" wrap="none" lIns="0" tIns="0" rIns="0" bIns="0" anchor="t">
-            <a:normAutofit fontScale="100000"/>
-          </a:bodyPr>
-          <a:lstStyle xmlns:a="http://schemas.openxmlformats.org/drawingml/2006/main"/>
-          <a:p xmlns:a="http://schemas.openxmlformats.org/drawingml/2006/main">
-            <a:pPr algn="l">
-              <a:defRPr sz="1800">
-                <a:latin typeface="IBM Plex Sans"/>
-                <a:ea typeface="IBM Plex Sans"/>
-                <a:cs typeface="IBM Plex Sans"/>
-              </a:defRPr>
-            </a:pPr>
-            <a:r>
-              <a:rPr sz="1800" b="0">
-                <a:solidFill>
-                  <a:srgbClr val="44505D"/>
-                </a:solidFill>
-                <a:latin typeface="IBM Plex Sans"/>
-                <a:ea typeface="IBM Plex Sans"/>
-                <a:cs typeface="IBM Plex Sans"/>
-              </a:rPr>
-              <a:t>идентитет, улоге и </a:t>
-            </a:r>
-          </a:p>
-        </p:txBody>
-      </p:sp>
-      <p:sp>
-        <p:nvSpPr>
-          <p:cNvPr id="18" name="text-source-07">
-            <a:extLst xmlns:a="http://schemas.openxmlformats.org/drawingml/2006/main">
-              <a:ext uri="{FF2B5EF4-FFF2-40B4-BE49-F238E27FC236}">
-                <a16:creationId xmlns:a16="http://schemas.microsoft.com/office/drawing/2014/main" id="{97BBAC63-8DDD-48B4-AB98-5E7D2809FFCE}"/>
-              </a:ext>
-            </a:extLst>
-          </p:cNvPr>
-          <p:cNvSpPr>
-            <a:spLocks xmlns:a="http://schemas.openxmlformats.org/drawingml/2006/main" noGrp="1"/>
-          </p:cNvSpPr>
-          <p:nvPr/>
-        </p:nvSpPr>
-        <p:spPr>
-          <a:xfrm xmlns:a="http://schemas.openxmlformats.org/drawingml/2006/main">
-            <a:off x="1495425" y="4920258"/>
-            <a:ext cx="1765846" cy="381000"/>
-          </a:xfrm>
-          <a:prstGeom xmlns:a="http://schemas.openxmlformats.org/drawingml/2006/main" prst="rect">
-            <a:avLst/>
-          </a:prstGeom>
-          <a:noFill xmlns:a="http://schemas.openxmlformats.org/drawingml/2006/main"/>
-          <a:ln xmlns:a="http://schemas.openxmlformats.org/drawingml/2006/main" w="0">
-            <a:noFill/>
-          </a:ln>
-        </p:spPr>
-        <p:txBody>
-          <a:bodyPr xmlns:a="http://schemas.openxmlformats.org/drawingml/2006/main" wrap="none" lIns="0" tIns="0" rIns="0" bIns="0" anchor="t">
-            <a:normAutofit fontScale="100000"/>
-          </a:bodyPr>
-          <a:lstStyle xmlns:a="http://schemas.openxmlformats.org/drawingml/2006/main"/>
-          <a:p xmlns:a="http://schemas.openxmlformats.org/drawingml/2006/main">
-            <a:pPr algn="l">
-              <a:defRPr sz="1800">
-                <a:latin typeface="IBM Plex Sans"/>
-                <a:ea typeface="IBM Plex Sans"/>
-                <a:cs typeface="IBM Plex Sans"/>
-              </a:defRPr>
-            </a:pPr>
-            <a:r>
-              <a:rPr sz="1800" b="0">
-                <a:solidFill>
-                  <a:srgbClr val="44505D"/>
-                </a:solidFill>
-                <a:latin typeface="IBM Plex Sans"/>
-                <a:ea typeface="IBM Plex Sans"/>
-                <a:cs typeface="IBM Plex Sans"/>
-              </a:rPr>
-              <a:t>ауторизација</a:t>
-            </a:r>
-          </a:p>
-        </p:txBody>
-      </p:sp>
-      <p:sp>
-        <p:nvSpPr>
-          <p:cNvPr id="19" name="text-source-07">
-            <a:extLst xmlns:a="http://schemas.openxmlformats.org/drawingml/2006/main">
-              <a:ext uri="{FF2B5EF4-FFF2-40B4-BE49-F238E27FC236}">
-                <a16:creationId xmlns:a16="http://schemas.microsoft.com/office/drawing/2014/main" id="{30362EA4-4E34-4657-8AB0-B69C9F83C2A9}"/>
-              </a:ext>
-            </a:extLst>
-          </p:cNvPr>
-          <p:cNvSpPr>
-            <a:spLocks xmlns:a="http://schemas.openxmlformats.org/drawingml/2006/main" noGrp="1"/>
-          </p:cNvSpPr>
-          <p:nvPr/>
-        </p:nvSpPr>
-        <p:spPr>
-          <a:xfrm xmlns:a="http://schemas.openxmlformats.org/drawingml/2006/main">
-            <a:off x="5619750" y="3407866"/>
-            <a:ext cx="845939" cy="619125"/>
-          </a:xfrm>
-          <a:prstGeom xmlns:a="http://schemas.openxmlformats.org/drawingml/2006/main" prst="rect">
-            <a:avLst/>
-          </a:prstGeom>
-          <a:noFill xmlns:a="http://schemas.openxmlformats.org/drawingml/2006/main"/>
-          <a:ln xmlns:a="http://schemas.openxmlformats.org/drawingml/2006/main" w="0">
-            <a:noFill/>
-          </a:ln>
-        </p:spPr>
-        <p:txBody>
-          <a:bodyPr xmlns:a="http://schemas.openxmlformats.org/drawingml/2006/main" wrap="none" lIns="0" tIns="0" rIns="0" bIns="0" anchor="t">
-            <a:normAutofit fontScale="100000"/>
-          </a:bodyPr>
-          <a:lstStyle xmlns:a="http://schemas.openxmlformats.org/drawingml/2006/main"/>
-          <a:p xmlns:a="http://schemas.openxmlformats.org/drawingml/2006/main">
-            <a:pPr algn="l">
-              <a:defRPr sz="3300">
-                <a:latin typeface="IBM Plex Mono"/>
-                <a:ea typeface="IBM Plex Mono"/>
-                <a:cs typeface="IBM Plex Mono"/>
-              </a:defRPr>
-            </a:pPr>
-            <a:r>
-              <a:rPr sz="3300" b="0">
-                <a:solidFill>
-                  <a:srgbClr val="0A5CA8"/>
-                </a:solidFill>
-                <a:latin typeface="IBM Plex Mono"/>
-                <a:ea typeface="IBM Plex Mono"/>
-                <a:cs typeface="IBM Plex Mono"/>
-              </a:rPr>
-              <a:t>02</a:t>
-            </a:r>
-          </a:p>
-        </p:txBody>
-      </p:sp>
-      <p:sp>
-        <p:nvSpPr>
-          <p:cNvPr id="20" name="text-source-07">
-            <a:extLst xmlns:a="http://schemas.openxmlformats.org/drawingml/2006/main">
-              <a:ext uri="{FF2B5EF4-FFF2-40B4-BE49-F238E27FC236}">
-                <a16:creationId xmlns:a16="http://schemas.microsoft.com/office/drawing/2014/main" id="{30C28810-AEB4-4F97-BDE3-24A7F611423F}"/>
-              </a:ext>
-            </a:extLst>
-          </p:cNvPr>
-          <p:cNvSpPr>
-            <a:spLocks xmlns:a="http://schemas.openxmlformats.org/drawingml/2006/main" noGrp="1"/>
-          </p:cNvSpPr>
-          <p:nvPr/>
-        </p:nvSpPr>
-        <p:spPr>
-          <a:xfrm xmlns:a="http://schemas.openxmlformats.org/drawingml/2006/main">
-            <a:off x="5619750" y="4108847"/>
-            <a:ext cx="673894" cy="428625"/>
-          </a:xfrm>
-          <a:prstGeom xmlns:a="http://schemas.openxmlformats.org/drawingml/2006/main" prst="rect">
-            <a:avLst/>
-          </a:prstGeom>
-          <a:noFill xmlns:a="http://schemas.openxmlformats.org/drawingml/2006/main"/>
-          <a:ln xmlns:a="http://schemas.openxmlformats.org/drawingml/2006/main" w="0">
-            <a:noFill/>
-          </a:ln>
-        </p:spPr>
-        <p:txBody>
-          <a:bodyPr xmlns:a="http://schemas.openxmlformats.org/drawingml/2006/main" wrap="none" lIns="0" tIns="0" rIns="0" bIns="0" anchor="t">
-            <a:normAutofit fontScale="100000"/>
-          </a:bodyPr>
-          <a:lstStyle xmlns:a="http://schemas.openxmlformats.org/drawingml/2006/main"/>
-          <a:p xmlns:a="http://schemas.openxmlformats.org/drawingml/2006/main">
-            <a:pPr algn="l">
-              <a:defRPr sz="2100">
-                <a:latin typeface="IBM Plex Sans"/>
-                <a:ea typeface="IBM Plex Sans"/>
-                <a:cs typeface="IBM Plex Sans"/>
-              </a:defRPr>
-            </a:pPr>
-            <a:r>
-              <a:rPr sz="2100" b="1">
-                <a:solidFill>
-                  <a:srgbClr val="13202D"/>
-                </a:solidFill>
-                <a:latin typeface="IBM Plex Sans"/>
-                <a:ea typeface="IBM Plex Sans"/>
-                <a:cs typeface="IBM Plex Sans"/>
-              </a:rPr>
-              <a:t>P2</a:t>
-            </a:r>
-          </a:p>
-        </p:txBody>
-      </p:sp>
-      <p:sp>
-        <p:nvSpPr>
-          <p:cNvPr id="21" name="text-source-07">
-            <a:extLst xmlns:a="http://schemas.openxmlformats.org/drawingml/2006/main">
-              <a:ext uri="{FF2B5EF4-FFF2-40B4-BE49-F238E27FC236}">
-                <a16:creationId xmlns:a16="http://schemas.microsoft.com/office/drawing/2014/main" id="{89A7113D-08A4-4F6B-832F-B5898BB7FB2F}"/>
-              </a:ext>
-            </a:extLst>
-          </p:cNvPr>
-          <p:cNvSpPr>
-            <a:spLocks xmlns:a="http://schemas.openxmlformats.org/drawingml/2006/main" noGrp="1"/>
-          </p:cNvSpPr>
-          <p:nvPr/>
-        </p:nvSpPr>
-        <p:spPr>
-          <a:xfrm xmlns:a="http://schemas.openxmlformats.org/drawingml/2006/main">
-            <a:off x="5619750" y="4600277"/>
-            <a:ext cx="3099197" cy="381000"/>
-          </a:xfrm>
-          <a:prstGeom xmlns:a="http://schemas.openxmlformats.org/drawingml/2006/main" prst="rect">
-            <a:avLst/>
-          </a:prstGeom>
-          <a:noFill xmlns:a="http://schemas.openxmlformats.org/drawingml/2006/main"/>
-          <a:ln xmlns:a="http://schemas.openxmlformats.org/drawingml/2006/main" w="0">
-            <a:noFill/>
-          </a:ln>
-        </p:spPr>
-        <p:txBody>
-          <a:bodyPr xmlns:a="http://schemas.openxmlformats.org/drawingml/2006/main" wrap="none" lIns="0" tIns="0" rIns="0" bIns="0" anchor="t">
-            <a:normAutofit fontScale="100000"/>
-          </a:bodyPr>
-          <a:lstStyle xmlns:a="http://schemas.openxmlformats.org/drawingml/2006/main"/>
-          <a:p xmlns:a="http://schemas.openxmlformats.org/drawingml/2006/main">
-            <a:pPr algn="l">
-              <a:defRPr sz="1800">
-                <a:latin typeface="IBM Plex Sans"/>
-                <a:ea typeface="IBM Plex Sans"/>
-                <a:cs typeface="IBM Plex Sans"/>
-              </a:defRPr>
-            </a:pPr>
-            <a:r>
-              <a:rPr sz="1800" b="0">
-                <a:solidFill>
-                  <a:srgbClr val="44505D"/>
-                </a:solidFill>
-                <a:latin typeface="IBM Plex Sans"/>
-                <a:ea typeface="IBM Plex Sans"/>
-                <a:cs typeface="IBM Plex Sans"/>
-              </a:rPr>
-              <a:t>политике, класификација </a:t>
-            </a:r>
-          </a:p>
-        </p:txBody>
-      </p:sp>
-      <p:sp>
-        <p:nvSpPr>
-          <p:cNvPr id="22" name="text-source-07">
-            <a:extLst xmlns:a="http://schemas.openxmlformats.org/drawingml/2006/main">
-              <a:ext uri="{FF2B5EF4-FFF2-40B4-BE49-F238E27FC236}">
-                <a16:creationId xmlns:a16="http://schemas.microsoft.com/office/drawing/2014/main" id="{D5B4A604-2E68-4930-97C5-75E03523B09D}"/>
-              </a:ext>
-            </a:extLst>
-          </p:cNvPr>
-          <p:cNvSpPr>
-            <a:spLocks xmlns:a="http://schemas.openxmlformats.org/drawingml/2006/main" noGrp="1"/>
-          </p:cNvSpPr>
-          <p:nvPr/>
-        </p:nvSpPr>
-        <p:spPr>
-          <a:xfrm xmlns:a="http://schemas.openxmlformats.org/drawingml/2006/main">
-            <a:off x="5619750" y="4920258"/>
-            <a:ext cx="1397496" cy="381000"/>
-          </a:xfrm>
-          <a:prstGeom xmlns:a="http://schemas.openxmlformats.org/drawingml/2006/main" prst="rect">
-            <a:avLst/>
-          </a:prstGeom>
-          <a:noFill xmlns:a="http://schemas.openxmlformats.org/drawingml/2006/main"/>
-          <a:ln xmlns:a="http://schemas.openxmlformats.org/drawingml/2006/main" w="0">
-            <a:noFill/>
-          </a:ln>
-        </p:spPr>
-        <p:txBody>
-          <a:bodyPr xmlns:a="http://schemas.openxmlformats.org/drawingml/2006/main" wrap="none" lIns="0" tIns="0" rIns="0" bIns="0" anchor="t">
-            <a:normAutofit fontScale="100000"/>
-          </a:bodyPr>
-          <a:lstStyle xmlns:a="http://schemas.openxmlformats.org/drawingml/2006/main"/>
-          <a:p xmlns:a="http://schemas.openxmlformats.org/drawingml/2006/main">
-            <a:pPr algn="l">
-              <a:defRPr sz="1800">
-                <a:latin typeface="IBM Plex Sans"/>
-                <a:ea typeface="IBM Plex Sans"/>
-                <a:cs typeface="IBM Plex Sans"/>
-              </a:defRPr>
-            </a:pPr>
-            <a:r>
-              <a:rPr sz="1800" b="0">
-                <a:solidFill>
-                  <a:srgbClr val="44505D"/>
-                </a:solidFill>
-                <a:latin typeface="IBM Plex Sans"/>
-                <a:ea typeface="IBM Plex Sans"/>
-                <a:cs typeface="IBM Plex Sans"/>
-              </a:rPr>
-              <a:t>и baseline</a:t>
-            </a:r>
-          </a:p>
-        </p:txBody>
-      </p:sp>
-      <p:sp>
-        <p:nvSpPr>
-          <p:cNvPr id="23" name="text-source-07">
-            <a:extLst xmlns:a="http://schemas.openxmlformats.org/drawingml/2006/main">
-              <a:ext uri="{FF2B5EF4-FFF2-40B4-BE49-F238E27FC236}">
-                <a16:creationId xmlns:a16="http://schemas.microsoft.com/office/drawing/2014/main" id="{C1046F46-F6EE-47A9-84C6-3247DA2BCFFC}"/>
-              </a:ext>
-            </a:extLst>
-          </p:cNvPr>
-          <p:cNvSpPr>
-            <a:spLocks xmlns:a="http://schemas.openxmlformats.org/drawingml/2006/main" noGrp="1"/>
-          </p:cNvSpPr>
-          <p:nvPr/>
-        </p:nvSpPr>
-        <p:spPr>
-          <a:xfrm xmlns:a="http://schemas.openxmlformats.org/drawingml/2006/main">
-            <a:off x="9744075" y="3407866"/>
-            <a:ext cx="845939" cy="619125"/>
-          </a:xfrm>
-          <a:prstGeom xmlns:a="http://schemas.openxmlformats.org/drawingml/2006/main" prst="rect">
-            <a:avLst/>
-          </a:prstGeom>
-          <a:noFill xmlns:a="http://schemas.openxmlformats.org/drawingml/2006/main"/>
-          <a:ln xmlns:a="http://schemas.openxmlformats.org/drawingml/2006/main" w="0">
-            <a:noFill/>
-          </a:ln>
-        </p:spPr>
-        <p:txBody>
-          <a:bodyPr xmlns:a="http://schemas.openxmlformats.org/drawingml/2006/main" wrap="none" lIns="0" tIns="0" rIns="0" bIns="0" anchor="t">
-            <a:normAutofit fontScale="100000"/>
-          </a:bodyPr>
-          <a:lstStyle xmlns:a="http://schemas.openxmlformats.org/drawingml/2006/main"/>
-          <a:p xmlns:a="http://schemas.openxmlformats.org/drawingml/2006/main">
-            <a:pPr algn="l">
-              <a:defRPr sz="3300">
-                <a:latin typeface="IBM Plex Mono"/>
-                <a:ea typeface="IBM Plex Mono"/>
-                <a:cs typeface="IBM Plex Mono"/>
-              </a:defRPr>
-            </a:pPr>
-            <a:r>
-              <a:rPr sz="3300" b="0">
-                <a:solidFill>
-                  <a:srgbClr val="0A5CA8"/>
-                </a:solidFill>
-                <a:latin typeface="IBM Plex Mono"/>
-                <a:ea typeface="IBM Plex Mono"/>
-                <a:cs typeface="IBM Plex Mono"/>
-              </a:rPr>
-              <a:t>03</a:t>
-            </a:r>
-          </a:p>
-        </p:txBody>
-      </p:sp>
-      <p:sp>
-        <p:nvSpPr>
-          <p:cNvPr id="24" name="text-source-07">
-            <a:extLst xmlns:a="http://schemas.openxmlformats.org/drawingml/2006/main">
-              <a:ext uri="{FF2B5EF4-FFF2-40B4-BE49-F238E27FC236}">
-                <a16:creationId xmlns:a16="http://schemas.microsoft.com/office/drawing/2014/main" id="{1779AFFA-F153-495B-8570-40AD6022F317}"/>
-              </a:ext>
-            </a:extLst>
-          </p:cNvPr>
-          <p:cNvSpPr>
-            <a:spLocks xmlns:a="http://schemas.openxmlformats.org/drawingml/2006/main" noGrp="1"/>
-          </p:cNvSpPr>
-          <p:nvPr/>
-        </p:nvSpPr>
-        <p:spPr>
-          <a:xfrm xmlns:a="http://schemas.openxmlformats.org/drawingml/2006/main">
-            <a:off x="9744075" y="4108847"/>
-            <a:ext cx="673894" cy="428625"/>
-          </a:xfrm>
-          <a:prstGeom xmlns:a="http://schemas.openxmlformats.org/drawingml/2006/main" prst="rect">
-            <a:avLst/>
-          </a:prstGeom>
-          <a:noFill xmlns:a="http://schemas.openxmlformats.org/drawingml/2006/main"/>
-          <a:ln xmlns:a="http://schemas.openxmlformats.org/drawingml/2006/main" w="0">
-            <a:noFill/>
-          </a:ln>
-        </p:spPr>
-        <p:txBody>
-          <a:bodyPr xmlns:a="http://schemas.openxmlformats.org/drawingml/2006/main" wrap="none" lIns="0" tIns="0" rIns="0" bIns="0" anchor="t">
-            <a:normAutofit fontScale="100000"/>
-          </a:bodyPr>
-          <a:lstStyle xmlns:a="http://schemas.openxmlformats.org/drawingml/2006/main"/>
-          <a:p xmlns:a="http://schemas.openxmlformats.org/drawingml/2006/main">
-            <a:pPr algn="l">
-              <a:defRPr sz="2100">
-                <a:latin typeface="IBM Plex Sans"/>
-                <a:ea typeface="IBM Plex Sans"/>
-                <a:cs typeface="IBM Plex Sans"/>
-              </a:defRPr>
-            </a:pPr>
-            <a:r>
-              <a:rPr sz="2100" b="1">
-                <a:solidFill>
-                  <a:srgbClr val="13202D"/>
-                </a:solidFill>
-                <a:latin typeface="IBM Plex Sans"/>
-                <a:ea typeface="IBM Plex Sans"/>
-                <a:cs typeface="IBM Plex Sans"/>
-              </a:rPr>
-              <a:t>P3</a:t>
-            </a:r>
-          </a:p>
-        </p:txBody>
-      </p:sp>
-      <p:sp>
-        <p:nvSpPr>
-          <p:cNvPr id="25" name="text-source-07">
-            <a:extLst xmlns:a="http://schemas.openxmlformats.org/drawingml/2006/main">
-              <a:ext uri="{FF2B5EF4-FFF2-40B4-BE49-F238E27FC236}">
-                <a16:creationId xmlns:a16="http://schemas.microsoft.com/office/drawing/2014/main" id="{497D0C07-10C0-4435-9DCF-9BBD08E51E02}"/>
-              </a:ext>
-            </a:extLst>
-          </p:cNvPr>
-          <p:cNvSpPr>
-            <a:spLocks xmlns:a="http://schemas.openxmlformats.org/drawingml/2006/main" noGrp="1"/>
-          </p:cNvSpPr>
-          <p:nvPr/>
-        </p:nvSpPr>
-        <p:spPr>
-          <a:xfrm xmlns:a="http://schemas.openxmlformats.org/drawingml/2006/main">
-            <a:off x="9744075" y="4600277"/>
-            <a:ext cx="3144441" cy="381000"/>
-          </a:xfrm>
-          <a:prstGeom xmlns:a="http://schemas.openxmlformats.org/drawingml/2006/main" prst="rect">
-            <a:avLst/>
-          </a:prstGeom>
-          <a:noFill xmlns:a="http://schemas.openxmlformats.org/drawingml/2006/main"/>
-          <a:ln xmlns:a="http://schemas.openxmlformats.org/drawingml/2006/main" w="0">
-            <a:noFill/>
-          </a:ln>
-        </p:spPr>
-        <p:txBody>
-          <a:bodyPr xmlns:a="http://schemas.openxmlformats.org/drawingml/2006/main" wrap="none" lIns="0" tIns="0" rIns="0" bIns="0" anchor="t">
-            <a:normAutofit fontScale="100000"/>
-          </a:bodyPr>
-          <a:lstStyle xmlns:a="http://schemas.openxmlformats.org/drawingml/2006/main"/>
-          <a:p xmlns:a="http://schemas.openxmlformats.org/drawingml/2006/main">
-            <a:pPr algn="l">
-              <a:defRPr sz="1800">
-                <a:latin typeface="IBM Plex Sans"/>
-                <a:ea typeface="IBM Plex Sans"/>
-                <a:cs typeface="IBM Plex Sans"/>
-              </a:defRPr>
-            </a:pPr>
-            <a:r>
-              <a:rPr sz="1800" b="0">
-                <a:solidFill>
-                  <a:srgbClr val="44505D"/>
-                </a:solidFill>
-                <a:latin typeface="IBM Plex Sans"/>
-                <a:ea typeface="IBM Plex Sans"/>
-                <a:cs typeface="IBM Plex Sans"/>
-              </a:rPr>
-              <a:t>тестирање и manual-core-</a:t>
-            </a:r>
-          </a:p>
-        </p:txBody>
-      </p:sp>
-      <p:sp>
-        <p:nvSpPr>
-          <p:cNvPr id="26" name="text-source-07">
-            <a:extLst xmlns:a="http://schemas.openxmlformats.org/drawingml/2006/main">
-              <a:ext uri="{FF2B5EF4-FFF2-40B4-BE49-F238E27FC236}">
-                <a16:creationId xmlns:a16="http://schemas.microsoft.com/office/drawing/2014/main" id="{6E00D74C-9AB1-4055-98B9-09F755E2D5BD}"/>
-              </a:ext>
-            </a:extLst>
-          </p:cNvPr>
-          <p:cNvSpPr>
-            <a:spLocks xmlns:a="http://schemas.openxmlformats.org/drawingml/2006/main" noGrp="1"/>
-          </p:cNvSpPr>
-          <p:nvPr/>
-        </p:nvSpPr>
-        <p:spPr>
-          <a:xfrm xmlns:a="http://schemas.openxmlformats.org/drawingml/2006/main">
-            <a:off x="9744075" y="4920258"/>
-            <a:ext cx="1209080" cy="381000"/>
-          </a:xfrm>
-          <a:prstGeom xmlns:a="http://schemas.openxmlformats.org/drawingml/2006/main" prst="rect">
-            <a:avLst/>
-          </a:prstGeom>
-          <a:noFill xmlns:a="http://schemas.openxmlformats.org/drawingml/2006/main"/>
-          <a:ln xmlns:a="http://schemas.openxmlformats.org/drawingml/2006/main" w="0">
-            <a:noFill/>
-          </a:ln>
-        </p:spPr>
-        <p:txBody>
-          <a:bodyPr xmlns:a="http://schemas.openxmlformats.org/drawingml/2006/main" wrap="none" lIns="0" tIns="0" rIns="0" bIns="0" anchor="t">
-            <a:normAutofit fontScale="100000"/>
-          </a:bodyPr>
-          <a:lstStyle xmlns:a="http://schemas.openxmlformats.org/drawingml/2006/main"/>
-          <a:p xmlns:a="http://schemas.openxmlformats.org/drawingml/2006/main">
-            <a:pPr algn="l">
-              <a:defRPr sz="1800">
-                <a:latin typeface="IBM Plex Sans"/>
-                <a:ea typeface="IBM Plex Sans"/>
-                <a:cs typeface="IBM Plex Sans"/>
-              </a:defRPr>
-            </a:pPr>
-            <a:r>
-              <a:rPr sz="1800" b="0">
-                <a:solidFill>
-                  <a:srgbClr val="44505D"/>
-                </a:solidFill>
-                <a:latin typeface="IBM Plex Sans"/>
-                <a:ea typeface="IBM Plex Sans"/>
-                <a:cs typeface="IBM Plex Sans"/>
-              </a:rPr>
-              <a:t>baseline</a:t>
-            </a:r>
-          </a:p>
-        </p:txBody>
-      </p:sp>
-      <p:sp>
-        <p:nvSpPr>
-          <p:cNvPr id="27" name="text-source-07">
-            <a:extLst xmlns:a="http://schemas.openxmlformats.org/drawingml/2006/main">
-              <a:ext uri="{FF2B5EF4-FFF2-40B4-BE49-F238E27FC236}">
-                <a16:creationId xmlns:a16="http://schemas.microsoft.com/office/drawing/2014/main" id="{405825CA-2F73-4940-9CEB-D667B00CFAF1}"/>
-              </a:ext>
-            </a:extLst>
-          </p:cNvPr>
-          <p:cNvSpPr>
-            <a:spLocks xmlns:a="http://schemas.openxmlformats.org/drawingml/2006/main" noGrp="1"/>
-          </p:cNvSpPr>
-          <p:nvPr/>
-        </p:nvSpPr>
-        <p:spPr>
-          <a:xfrm xmlns:a="http://schemas.openxmlformats.org/drawingml/2006/main">
-            <a:off x="13868400" y="3407866"/>
-            <a:ext cx="845939" cy="619125"/>
-          </a:xfrm>
-          <a:prstGeom xmlns:a="http://schemas.openxmlformats.org/drawingml/2006/main" prst="rect">
-            <a:avLst/>
-          </a:prstGeom>
-          <a:noFill xmlns:a="http://schemas.openxmlformats.org/drawingml/2006/main"/>
-          <a:ln xmlns:a="http://schemas.openxmlformats.org/drawingml/2006/main" w="0">
-            <a:noFill/>
-          </a:ln>
-        </p:spPr>
-        <p:txBody>
-          <a:bodyPr xmlns:a="http://schemas.openxmlformats.org/drawingml/2006/main" wrap="none" lIns="0" tIns="0" rIns="0" bIns="0" anchor="t">
-            <a:normAutofit fontScale="100000"/>
-          </a:bodyPr>
-          <a:lstStyle xmlns:a="http://schemas.openxmlformats.org/drawingml/2006/main"/>
-          <a:p xmlns:a="http://schemas.openxmlformats.org/drawingml/2006/main">
-            <a:pPr algn="l">
-              <a:defRPr sz="3300">
-                <a:latin typeface="IBM Plex Mono"/>
-                <a:ea typeface="IBM Plex Mono"/>
-                <a:cs typeface="IBM Plex Mono"/>
-              </a:defRPr>
-            </a:pPr>
-            <a:r>
-              <a:rPr sz="3300" b="0">
-                <a:solidFill>
-                  <a:srgbClr val="0A5CA8"/>
-                </a:solidFill>
-                <a:latin typeface="IBM Plex Mono"/>
-                <a:ea typeface="IBM Plex Mono"/>
-                <a:cs typeface="IBM Plex Mono"/>
-              </a:rPr>
-              <a:t>04</a:t>
-            </a:r>
-          </a:p>
-        </p:txBody>
-      </p:sp>
-      <p:sp>
-        <p:nvSpPr>
-          <p:cNvPr id="28" name="text-source-07">
-            <a:extLst xmlns:a="http://schemas.openxmlformats.org/drawingml/2006/main">
-              <a:ext uri="{FF2B5EF4-FFF2-40B4-BE49-F238E27FC236}">
-                <a16:creationId xmlns:a16="http://schemas.microsoft.com/office/drawing/2014/main" id="{01BE5811-24BE-4202-BC7A-D53ED43EBF56}"/>
-              </a:ext>
-            </a:extLst>
-          </p:cNvPr>
-          <p:cNvSpPr>
-            <a:spLocks xmlns:a="http://schemas.openxmlformats.org/drawingml/2006/main" noGrp="1"/>
-          </p:cNvSpPr>
-          <p:nvPr/>
-        </p:nvSpPr>
-        <p:spPr>
-          <a:xfrm xmlns:a="http://schemas.openxmlformats.org/drawingml/2006/main">
-            <a:off x="13868400" y="4108847"/>
-            <a:ext cx="673894" cy="428625"/>
-          </a:xfrm>
-          <a:prstGeom xmlns:a="http://schemas.openxmlformats.org/drawingml/2006/main" prst="rect">
-            <a:avLst/>
-          </a:prstGeom>
-          <a:noFill xmlns:a="http://schemas.openxmlformats.org/drawingml/2006/main"/>
-          <a:ln xmlns:a="http://schemas.openxmlformats.org/drawingml/2006/main" w="0">
-            <a:noFill/>
-          </a:ln>
-        </p:spPr>
-        <p:txBody>
-          <a:bodyPr xmlns:a="http://schemas.openxmlformats.org/drawingml/2006/main" wrap="none" lIns="0" tIns="0" rIns="0" bIns="0" anchor="t">
-            <a:normAutofit fontScale="100000"/>
-          </a:bodyPr>
-          <a:lstStyle xmlns:a="http://schemas.openxmlformats.org/drawingml/2006/main"/>
-          <a:p xmlns:a="http://schemas.openxmlformats.org/drawingml/2006/main">
-            <a:pPr algn="l">
-              <a:defRPr sz="2100">
-                <a:latin typeface="IBM Plex Sans"/>
-                <a:ea typeface="IBM Plex Sans"/>
-                <a:cs typeface="IBM Plex Sans"/>
-              </a:defRPr>
-            </a:pPr>
-            <a:r>
-              <a:rPr sz="2100" b="1">
-                <a:solidFill>
-                  <a:srgbClr val="13202D"/>
-                </a:solidFill>
-                <a:latin typeface="IBM Plex Sans"/>
-                <a:ea typeface="IBM Plex Sans"/>
-                <a:cs typeface="IBM Plex Sans"/>
-              </a:rPr>
-              <a:t>P4</a:t>
-            </a:r>
-          </a:p>
-        </p:txBody>
-      </p:sp>
-      <p:sp>
-        <p:nvSpPr>
-          <p:cNvPr id="29" name="text-source-07">
-            <a:extLst xmlns:a="http://schemas.openxmlformats.org/drawingml/2006/main">
-              <a:ext uri="{FF2B5EF4-FFF2-40B4-BE49-F238E27FC236}">
-                <a16:creationId xmlns:a16="http://schemas.microsoft.com/office/drawing/2014/main" id="{3B445F6E-CC25-4053-9F85-E0F6C4B7CDA2}"/>
-              </a:ext>
-            </a:extLst>
-          </p:cNvPr>
-          <p:cNvSpPr>
-            <a:spLocks xmlns:a="http://schemas.openxmlformats.org/drawingml/2006/main" noGrp="1"/>
-          </p:cNvSpPr>
-          <p:nvPr/>
-        </p:nvSpPr>
-        <p:spPr>
-          <a:xfrm xmlns:a="http://schemas.openxmlformats.org/drawingml/2006/main">
-            <a:off x="13868400" y="4600277"/>
-            <a:ext cx="3092500" cy="381000"/>
-          </a:xfrm>
-          <a:prstGeom xmlns:a="http://schemas.openxmlformats.org/drawingml/2006/main" prst="rect">
-            <a:avLst/>
-          </a:prstGeom>
-          <a:noFill xmlns:a="http://schemas.openxmlformats.org/drawingml/2006/main"/>
-          <a:ln xmlns:a="http://schemas.openxmlformats.org/drawingml/2006/main" w="0">
-            <a:noFill/>
-          </a:ln>
-        </p:spPr>
-        <p:txBody>
-          <a:bodyPr xmlns:a="http://schemas.openxmlformats.org/drawingml/2006/main" wrap="none" lIns="0" tIns="0" rIns="0" bIns="0" anchor="t">
-            <a:normAutofit fontScale="100000"/>
-          </a:bodyPr>
-          <a:lstStyle xmlns:a="http://schemas.openxmlformats.org/drawingml/2006/main"/>
-          <a:p xmlns:a="http://schemas.openxmlformats.org/drawingml/2006/main">
-            <a:pPr algn="l">
-              <a:defRPr sz="1800">
-                <a:latin typeface="IBM Plex Sans"/>
-                <a:ea typeface="IBM Plex Sans"/>
-                <a:cs typeface="IBM Plex Sans"/>
-              </a:defRPr>
-            </a:pPr>
-            <a:r>
-              <a:rPr sz="1800" b="0">
-                <a:solidFill>
-                  <a:srgbClr val="44505D"/>
-                </a:solidFill>
-                <a:latin typeface="IBM Plex Sans"/>
-                <a:ea typeface="IBM Plex Sans"/>
-                <a:cs typeface="IBM Plex Sans"/>
-              </a:rPr>
-              <a:t>оперативна безбедност и </a:t>
-            </a:r>
-          </a:p>
-        </p:txBody>
-      </p:sp>
-      <p:sp>
-        <p:nvSpPr>
-          <p:cNvPr id="30" name="text-source-07">
-            <a:extLst xmlns:a="http://schemas.openxmlformats.org/drawingml/2006/main">
-              <a:ext uri="{FF2B5EF4-FFF2-40B4-BE49-F238E27FC236}">
-                <a16:creationId xmlns:a16="http://schemas.microsoft.com/office/drawing/2014/main" id="{78B700CA-635A-41BC-8CE5-43A14D2647EB}"/>
-              </a:ext>
-            </a:extLst>
-          </p:cNvPr>
-          <p:cNvSpPr>
-            <a:spLocks xmlns:a="http://schemas.openxmlformats.org/drawingml/2006/main" noGrp="1"/>
-          </p:cNvSpPr>
-          <p:nvPr/>
-        </p:nvSpPr>
-        <p:spPr>
-          <a:xfrm xmlns:a="http://schemas.openxmlformats.org/drawingml/2006/main">
-            <a:off x="13868400" y="4920258"/>
-            <a:ext cx="1246584" cy="381000"/>
-          </a:xfrm>
-          <a:prstGeom xmlns:a="http://schemas.openxmlformats.org/drawingml/2006/main" prst="rect">
-            <a:avLst/>
-          </a:prstGeom>
-          <a:noFill xmlns:a="http://schemas.openxmlformats.org/drawingml/2006/main"/>
-          <a:ln xmlns:a="http://schemas.openxmlformats.org/drawingml/2006/main" w="0">
-            <a:noFill/>
-          </a:ln>
-        </p:spPr>
-        <p:txBody>
-          <a:bodyPr xmlns:a="http://schemas.openxmlformats.org/drawingml/2006/main" wrap="none" lIns="0" tIns="0" rIns="0" bIns="0" anchor="t">
-            <a:normAutofit fontScale="100000"/>
-          </a:bodyPr>
-          <a:lstStyle xmlns:a="http://schemas.openxmlformats.org/drawingml/2006/main"/>
-          <a:p xmlns:a="http://schemas.openxmlformats.org/drawingml/2006/main">
-            <a:pPr algn="l">
-              <a:defRPr sz="1800">
-                <a:latin typeface="IBM Plex Sans"/>
-                <a:ea typeface="IBM Plex Sans"/>
-                <a:cs typeface="IBM Plex Sans"/>
-              </a:defRPr>
-            </a:pPr>
-            <a:r>
-              <a:rPr sz="1800" b="0">
-                <a:solidFill>
-                  <a:srgbClr val="44505D"/>
-                </a:solidFill>
-                <a:latin typeface="IBM Plex Sans"/>
-                <a:ea typeface="IBM Plex Sans"/>
-                <a:cs typeface="IBM Plex Sans"/>
-              </a:rPr>
-              <a:t>одбрана</a:t>
-            </a:r>
-          </a:p>
-        </p:txBody>
-      </p:sp>
-      <p:sp>
-        <p:nvSpPr>
-          <p:cNvPr id="31" name="text-source-07">
-            <a:extLst xmlns:a="http://schemas.openxmlformats.org/drawingml/2006/main">
-              <a:ext uri="{FF2B5EF4-FFF2-40B4-BE49-F238E27FC236}">
-                <a16:creationId xmlns:a16="http://schemas.microsoft.com/office/drawing/2014/main" id="{265AD0C1-50C8-4066-98AF-4357604FE3B6}"/>
-              </a:ext>
-            </a:extLst>
-          </p:cNvPr>
-          <p:cNvSpPr>
-            <a:spLocks xmlns:a="http://schemas.openxmlformats.org/drawingml/2006/main" noGrp="1"/>
-          </p:cNvSpPr>
-          <p:nvPr/>
-        </p:nvSpPr>
-        <p:spPr>
-          <a:xfrm xmlns:a="http://schemas.openxmlformats.org/drawingml/2006/main">
-            <a:off x="1504950" y="6011763"/>
-            <a:ext cx="2537520" cy="381000"/>
-          </a:xfrm>
-          <a:prstGeom xmlns:a="http://schemas.openxmlformats.org/drawingml/2006/main" prst="rect">
-            <a:avLst/>
-          </a:prstGeom>
-          <a:noFill xmlns:a="http://schemas.openxmlformats.org/drawingml/2006/main"/>
-          <a:ln xmlns:a="http://schemas.openxmlformats.org/drawingml/2006/main" w="0">
-            <a:noFill/>
-          </a:ln>
-        </p:spPr>
-        <p:txBody>
-          <a:bodyPr xmlns:a="http://schemas.openxmlformats.org/drawingml/2006/main" wrap="none" lIns="0" tIns="0" rIns="0" bIns="0" anchor="t">
-            <a:normAutofit fontScale="100000"/>
-          </a:bodyPr>
-          <a:lstStyle xmlns:a="http://schemas.openxmlformats.org/drawingml/2006/main"/>
-          <a:p xmlns:a="http://schemas.openxmlformats.org/drawingml/2006/main">
-            <a:pPr algn="l">
+              <a:buNone/>
               <a:defRPr sz="1800">
                 <a:latin typeface="IBM Plex Mono"/>
                 <a:ea typeface="IBM Plex Mono"/>
@@ -18362,6 +17351,7 @@
           <a:lstStyle xmlns:a="http://schemas.openxmlformats.org/drawingml/2006/main"/>
           <a:p xmlns:a="http://schemas.openxmlformats.org/drawingml/2006/main">
             <a:pPr algn="l">
+              <a:buNone/>
               <a:defRPr sz="2100">
                 <a:latin typeface="IBM Plex Sans"/>
                 <a:ea typeface="IBM Plex Sans"/>
@@ -18416,6 +17406,7 @@
           <a:lstStyle xmlns:a="http://schemas.openxmlformats.org/drawingml/2006/main"/>
           <a:p xmlns:a="http://schemas.openxmlformats.org/drawingml/2006/main">
             <a:pPr algn="l">
+              <a:buNone/>
               <a:defRPr sz="2100">
                 <a:latin typeface="IBM Plex Sans"/>
                 <a:ea typeface="IBM Plex Sans"/>
@@ -18470,6 +17461,7 @@
           <a:lstStyle xmlns:a="http://schemas.openxmlformats.org/drawingml/2006/main"/>
           <a:p xmlns:a="http://schemas.openxmlformats.org/drawingml/2006/main">
             <a:pPr algn="l">
+              <a:buNone/>
               <a:defRPr sz="1800">
                 <a:latin typeface="IBM Plex Sans"/>
                 <a:ea typeface="IBM Plex Sans"/>
@@ -18524,6 +17516,7 @@
           <a:lstStyle xmlns:a="http://schemas.openxmlformats.org/drawingml/2006/main"/>
           <a:p xmlns:a="http://schemas.openxmlformats.org/drawingml/2006/main">
             <a:pPr algn="l">
+              <a:buNone/>
               <a:defRPr sz="1800">
                 <a:latin typeface="IBM Plex Mono"/>
                 <a:ea typeface="IBM Plex Mono"/>
@@ -18540,6 +17533,988 @@
                 <a:cs typeface="IBM Plex Mono"/>
               </a:rPr>
               <a:t>18</a:t>
+            </a:r>
+          </a:p>
+        </p:txBody>
+      </p:sp>
+      <p:sp>
+        <p:nvSpPr>
+          <p:cNvPr id="47" name="checkpoint-update">
+            <a:extLst xmlns:a="http://schemas.openxmlformats.org/drawingml/2006/main">
+              <a:ext uri="{FF2B5EF4-FFF2-40B4-BE49-F238E27FC236}">
+                <a16:creationId xmlns:a16="http://schemas.microsoft.com/office/drawing/2014/main" id="{C86336B1-5C4A-47C3-818D-6809DB8DE6D4}"/>
+              </a:ext>
+            </a:extLst>
+          </p:cNvPr>
+          <p:cNvSpPr>
+            <a:spLocks xmlns:a="http://schemas.openxmlformats.org/drawingml/2006/main" noGrp="1"/>
+          </p:cNvSpPr>
+          <p:nvPr/>
+        </p:nvSpPr>
+        <p:spPr>
+          <a:xfrm xmlns:a="http://schemas.openxmlformats.org/drawingml/2006/main">
+            <a:off x="1219200" y="3333750"/>
+            <a:ext cx="7429500" cy="476250"/>
+          </a:xfrm>
+          <a:prstGeom xmlns:a="http://schemas.openxmlformats.org/drawingml/2006/main" prst="rect">
+            <a:avLst/>
+          </a:prstGeom>
+          <a:noFill xmlns:a="http://schemas.openxmlformats.org/drawingml/2006/main"/>
+          <a:ln xmlns:a="http://schemas.openxmlformats.org/drawingml/2006/main" w="0">
+            <a:noFill/>
+          </a:ln>
+        </p:spPr>
+        <p:txBody>
+          <a:bodyPr xmlns:a="http://schemas.openxmlformats.org/drawingml/2006/main" lIns="0" tIns="0" rIns="0" bIns="0"/>
+          <a:lstStyle xmlns:a="http://schemas.openxmlformats.org/drawingml/2006/main">
+            <a:defPPr>
+              <a:defRPr sz="2100" b="0">
+                <a:solidFill>
+                  <a:srgbClr val="0A5CA8"/>
+                </a:solidFill>
+                <a:latin typeface="IBM Plex Mono"/>
+                <a:ea typeface="IBM Plex Mono"/>
+                <a:cs typeface="IBM Plex Mono"/>
+              </a:defRPr>
+            </a:defPPr>
+            <a:lvl1pPr>
+              <a:defRPr sz="2100" b="0">
+                <a:solidFill>
+                  <a:srgbClr val="0A5CA8"/>
+                </a:solidFill>
+                <a:latin typeface="IBM Plex Mono"/>
+                <a:ea typeface="IBM Plex Mono"/>
+                <a:cs typeface="IBM Plex Mono"/>
+              </a:defRPr>
+            </a:lvl1pPr>
+            <a:lvl2pPr>
+              <a:defRPr sz="2100" b="0">
+                <a:solidFill>
+                  <a:srgbClr val="0A5CA8"/>
+                </a:solidFill>
+                <a:latin typeface="IBM Plex Mono"/>
+                <a:ea typeface="IBM Plex Mono"/>
+                <a:cs typeface="IBM Plex Mono"/>
+              </a:defRPr>
+            </a:lvl2pPr>
+            <a:lvl3pPr>
+              <a:defRPr sz="2100" b="0">
+                <a:solidFill>
+                  <a:srgbClr val="0A5CA8"/>
+                </a:solidFill>
+                <a:latin typeface="IBM Plex Mono"/>
+                <a:ea typeface="IBM Plex Mono"/>
+                <a:cs typeface="IBM Plex Mono"/>
+              </a:defRPr>
+            </a:lvl3pPr>
+            <a:lvl4pPr>
+              <a:defRPr sz="2100" b="0">
+                <a:solidFill>
+                  <a:srgbClr val="0A5CA8"/>
+                </a:solidFill>
+                <a:latin typeface="IBM Plex Mono"/>
+                <a:ea typeface="IBM Plex Mono"/>
+                <a:cs typeface="IBM Plex Mono"/>
+              </a:defRPr>
+            </a:lvl4pPr>
+            <a:lvl5pPr>
+              <a:defRPr sz="2100" b="0">
+                <a:solidFill>
+                  <a:srgbClr val="0A5CA8"/>
+                </a:solidFill>
+                <a:latin typeface="IBM Plex Mono"/>
+                <a:ea typeface="IBM Plex Mono"/>
+                <a:cs typeface="IBM Plex Mono"/>
+              </a:defRPr>
+            </a:lvl5pPr>
+            <a:lvl6pPr>
+              <a:defRPr sz="2100" b="0">
+                <a:solidFill>
+                  <a:srgbClr val="0A5CA8"/>
+                </a:solidFill>
+                <a:latin typeface="IBM Plex Mono"/>
+                <a:ea typeface="IBM Plex Mono"/>
+                <a:cs typeface="IBM Plex Mono"/>
+              </a:defRPr>
+            </a:lvl6pPr>
+            <a:lvl7pPr>
+              <a:defRPr sz="2100" b="0">
+                <a:solidFill>
+                  <a:srgbClr val="0A5CA8"/>
+                </a:solidFill>
+                <a:latin typeface="IBM Plex Mono"/>
+                <a:ea typeface="IBM Plex Mono"/>
+                <a:cs typeface="IBM Plex Mono"/>
+              </a:defRPr>
+            </a:lvl7pPr>
+            <a:lvl8pPr>
+              <a:defRPr sz="2100" b="0">
+                <a:solidFill>
+                  <a:srgbClr val="0A5CA8"/>
+                </a:solidFill>
+                <a:latin typeface="IBM Plex Mono"/>
+                <a:ea typeface="IBM Plex Mono"/>
+                <a:cs typeface="IBM Plex Mono"/>
+              </a:defRPr>
+            </a:lvl8pPr>
+            <a:lvl9pPr>
+              <a:defRPr sz="2100" b="0">
+                <a:solidFill>
+                  <a:srgbClr val="0A5CA8"/>
+                </a:solidFill>
+                <a:latin typeface="IBM Plex Mono"/>
+                <a:ea typeface="IBM Plex Mono"/>
+                <a:cs typeface="IBM Plex Mono"/>
+              </a:defRPr>
+            </a:lvl9pPr>
+          </a:lstStyle>
+          <a:p xmlns:a="http://schemas.openxmlformats.org/drawingml/2006/main">
+            <a:pPr>
+              <a:defRPr sz="2100" b="0">
+                <a:solidFill>
+                  <a:srgbClr val="0A5CA8"/>
+                </a:solidFill>
+                <a:latin typeface="IBM Plex Mono"/>
+                <a:ea typeface="IBM Plex Mono"/>
+                <a:cs typeface="IBM Plex Mono"/>
+              </a:defRPr>
+            </a:pPr>
+            <a:r>
+              <a:rPr sz="2100" b="0">
+                <a:solidFill>
+                  <a:srgbClr val="0A5CA8"/>
+                </a:solidFill>
+                <a:latin typeface="IBM Plex Mono"/>
+                <a:ea typeface="IBM Plex Mono"/>
+                <a:cs typeface="IBM Plex Mono"/>
+              </a:rPr>
+              <a:t>КТ1 · 4. ВЕЖБА</a:t>
+            </a:r>
+          </a:p>
+        </p:txBody>
+      </p:sp>
+      <p:sp>
+        <p:nvSpPr>
+          <p:cNvPr id="48" name="checkpoint-update">
+            <a:extLst xmlns:a="http://schemas.openxmlformats.org/drawingml/2006/main">
+              <a:ext uri="{FF2B5EF4-FFF2-40B4-BE49-F238E27FC236}">
+                <a16:creationId xmlns:a16="http://schemas.microsoft.com/office/drawing/2014/main" id="{D4024DFA-7E37-46F4-A5A6-5EF6189DD665}"/>
+              </a:ext>
+            </a:extLst>
+          </p:cNvPr>
+          <p:cNvSpPr>
+            <a:spLocks xmlns:a="http://schemas.openxmlformats.org/drawingml/2006/main" noGrp="1"/>
+          </p:cNvSpPr>
+          <p:nvPr/>
+        </p:nvSpPr>
+        <p:spPr>
+          <a:xfrm xmlns:a="http://schemas.openxmlformats.org/drawingml/2006/main">
+            <a:off x="1219200" y="4019550"/>
+            <a:ext cx="7524750" cy="523875"/>
+          </a:xfrm>
+          <a:prstGeom xmlns:a="http://schemas.openxmlformats.org/drawingml/2006/main" prst="rect">
+            <a:avLst/>
+          </a:prstGeom>
+          <a:noFill xmlns:a="http://schemas.openxmlformats.org/drawingml/2006/main"/>
+          <a:ln xmlns:a="http://schemas.openxmlformats.org/drawingml/2006/main" w="0">
+            <a:noFill/>
+          </a:ln>
+        </p:spPr>
+        <p:txBody>
+          <a:bodyPr xmlns:a="http://schemas.openxmlformats.org/drawingml/2006/main" lIns="0" tIns="0" rIns="0" bIns="0"/>
+          <a:lstStyle xmlns:a="http://schemas.openxmlformats.org/drawingml/2006/main">
+            <a:defPPr>
+              <a:defRPr sz="2700" b="1">
+                <a:solidFill>
+                  <a:srgbClr val="13202D"/>
+                </a:solidFill>
+                <a:latin typeface="IBM Plex Sans"/>
+                <a:ea typeface="IBM Plex Sans"/>
+                <a:cs typeface="IBM Plex Sans"/>
+              </a:defRPr>
+            </a:defPPr>
+            <a:lvl1pPr>
+              <a:defRPr sz="2700" b="1">
+                <a:solidFill>
+                  <a:srgbClr val="13202D"/>
+                </a:solidFill>
+                <a:latin typeface="IBM Plex Sans"/>
+                <a:ea typeface="IBM Plex Sans"/>
+                <a:cs typeface="IBM Plex Sans"/>
+              </a:defRPr>
+            </a:lvl1pPr>
+            <a:lvl2pPr>
+              <a:defRPr sz="2700" b="1">
+                <a:solidFill>
+                  <a:srgbClr val="13202D"/>
+                </a:solidFill>
+                <a:latin typeface="IBM Plex Sans"/>
+                <a:ea typeface="IBM Plex Sans"/>
+                <a:cs typeface="IBM Plex Sans"/>
+              </a:defRPr>
+            </a:lvl2pPr>
+            <a:lvl3pPr>
+              <a:defRPr sz="2700" b="1">
+                <a:solidFill>
+                  <a:srgbClr val="13202D"/>
+                </a:solidFill>
+                <a:latin typeface="IBM Plex Sans"/>
+                <a:ea typeface="IBM Plex Sans"/>
+                <a:cs typeface="IBM Plex Sans"/>
+              </a:defRPr>
+            </a:lvl3pPr>
+            <a:lvl4pPr>
+              <a:defRPr sz="2700" b="1">
+                <a:solidFill>
+                  <a:srgbClr val="13202D"/>
+                </a:solidFill>
+                <a:latin typeface="IBM Plex Sans"/>
+                <a:ea typeface="IBM Plex Sans"/>
+                <a:cs typeface="IBM Plex Sans"/>
+              </a:defRPr>
+            </a:lvl4pPr>
+            <a:lvl5pPr>
+              <a:defRPr sz="2700" b="1">
+                <a:solidFill>
+                  <a:srgbClr val="13202D"/>
+                </a:solidFill>
+                <a:latin typeface="IBM Plex Sans"/>
+                <a:ea typeface="IBM Plex Sans"/>
+                <a:cs typeface="IBM Plex Sans"/>
+              </a:defRPr>
+            </a:lvl5pPr>
+            <a:lvl6pPr>
+              <a:defRPr sz="2700" b="1">
+                <a:solidFill>
+                  <a:srgbClr val="13202D"/>
+                </a:solidFill>
+                <a:latin typeface="IBM Plex Sans"/>
+                <a:ea typeface="IBM Plex Sans"/>
+                <a:cs typeface="IBM Plex Sans"/>
+              </a:defRPr>
+            </a:lvl6pPr>
+            <a:lvl7pPr>
+              <a:defRPr sz="2700" b="1">
+                <a:solidFill>
+                  <a:srgbClr val="13202D"/>
+                </a:solidFill>
+                <a:latin typeface="IBM Plex Sans"/>
+                <a:ea typeface="IBM Plex Sans"/>
+                <a:cs typeface="IBM Plex Sans"/>
+              </a:defRPr>
+            </a:lvl7pPr>
+            <a:lvl8pPr>
+              <a:defRPr sz="2700" b="1">
+                <a:solidFill>
+                  <a:srgbClr val="13202D"/>
+                </a:solidFill>
+                <a:latin typeface="IBM Plex Sans"/>
+                <a:ea typeface="IBM Plex Sans"/>
+                <a:cs typeface="IBM Plex Sans"/>
+              </a:defRPr>
+            </a:lvl8pPr>
+            <a:lvl9pPr>
+              <a:defRPr sz="2700" b="1">
+                <a:solidFill>
+                  <a:srgbClr val="13202D"/>
+                </a:solidFill>
+                <a:latin typeface="IBM Plex Sans"/>
+                <a:ea typeface="IBM Plex Sans"/>
+                <a:cs typeface="IBM Plex Sans"/>
+              </a:defRPr>
+            </a:lvl9pPr>
+          </a:lstStyle>
+          <a:p xmlns:a="http://schemas.openxmlformats.org/drawingml/2006/main">
+            <a:pPr>
+              <a:defRPr sz="2700" b="1">
+                <a:solidFill>
+                  <a:srgbClr val="13202D"/>
+                </a:solidFill>
+                <a:latin typeface="IBM Plex Sans"/>
+                <a:ea typeface="IBM Plex Sans"/>
+                <a:cs typeface="IBM Plex Sans"/>
+              </a:defRPr>
+            </a:pPr>
+            <a:r>
+              <a:rPr sz="2700" b="1">
+                <a:solidFill>
+                  <a:srgbClr val="13202D"/>
+                </a:solidFill>
+                <a:latin typeface="IBM Plex Sans"/>
+                <a:ea typeface="IBM Plex Sans"/>
+                <a:cs typeface="IBM Plex Sans"/>
+              </a:rPr>
+              <a:t>Основна имплементација</a:t>
+            </a:r>
+          </a:p>
+        </p:txBody>
+      </p:sp>
+      <p:sp>
+        <p:nvSpPr>
+          <p:cNvPr id="49" name="checkpoint-update">
+            <a:extLst xmlns:a="http://schemas.openxmlformats.org/drawingml/2006/main">
+              <a:ext uri="{FF2B5EF4-FFF2-40B4-BE49-F238E27FC236}">
+                <a16:creationId xmlns:a16="http://schemas.microsoft.com/office/drawing/2014/main" id="{C32FE950-3861-4260-9E82-2C7364455A5A}"/>
+              </a:ext>
+            </a:extLst>
+          </p:cNvPr>
+          <p:cNvSpPr>
+            <a:spLocks xmlns:a="http://schemas.openxmlformats.org/drawingml/2006/main" noGrp="1"/>
+          </p:cNvSpPr>
+          <p:nvPr/>
+        </p:nvSpPr>
+        <p:spPr>
+          <a:xfrm xmlns:a="http://schemas.openxmlformats.org/drawingml/2006/main">
+            <a:off x="1219200" y="4714875"/>
+            <a:ext cx="7524750" cy="809625"/>
+          </a:xfrm>
+          <a:prstGeom xmlns:a="http://schemas.openxmlformats.org/drawingml/2006/main" prst="rect">
+            <a:avLst/>
+          </a:prstGeom>
+          <a:noFill xmlns:a="http://schemas.openxmlformats.org/drawingml/2006/main"/>
+          <a:ln xmlns:a="http://schemas.openxmlformats.org/drawingml/2006/main" w="0">
+            <a:noFill/>
+          </a:ln>
+        </p:spPr>
+        <p:txBody>
+          <a:bodyPr xmlns:a="http://schemas.openxmlformats.org/drawingml/2006/main" lIns="0" tIns="0" rIns="0" bIns="0"/>
+          <a:lstStyle xmlns:a="http://schemas.openxmlformats.org/drawingml/2006/main">
+            <a:defPPr>
+              <a:defRPr sz="1950" b="0">
+                <a:solidFill>
+                  <a:srgbClr val="44505D"/>
+                </a:solidFill>
+                <a:latin typeface="IBM Plex Sans"/>
+                <a:ea typeface="IBM Plex Sans"/>
+                <a:cs typeface="IBM Plex Sans"/>
+              </a:defRPr>
+            </a:defPPr>
+            <a:lvl1pPr>
+              <a:defRPr sz="1950" b="0">
+                <a:solidFill>
+                  <a:srgbClr val="44505D"/>
+                </a:solidFill>
+                <a:latin typeface="IBM Plex Sans"/>
+                <a:ea typeface="IBM Plex Sans"/>
+                <a:cs typeface="IBM Plex Sans"/>
+              </a:defRPr>
+            </a:lvl1pPr>
+            <a:lvl2pPr>
+              <a:defRPr sz="1950" b="0">
+                <a:solidFill>
+                  <a:srgbClr val="44505D"/>
+                </a:solidFill>
+                <a:latin typeface="IBM Plex Sans"/>
+                <a:ea typeface="IBM Plex Sans"/>
+                <a:cs typeface="IBM Plex Sans"/>
+              </a:defRPr>
+            </a:lvl2pPr>
+            <a:lvl3pPr>
+              <a:defRPr sz="1950" b="0">
+                <a:solidFill>
+                  <a:srgbClr val="44505D"/>
+                </a:solidFill>
+                <a:latin typeface="IBM Plex Sans"/>
+                <a:ea typeface="IBM Plex Sans"/>
+                <a:cs typeface="IBM Plex Sans"/>
+              </a:defRPr>
+            </a:lvl3pPr>
+            <a:lvl4pPr>
+              <a:defRPr sz="1950" b="0">
+                <a:solidFill>
+                  <a:srgbClr val="44505D"/>
+                </a:solidFill>
+                <a:latin typeface="IBM Plex Sans"/>
+                <a:ea typeface="IBM Plex Sans"/>
+                <a:cs typeface="IBM Plex Sans"/>
+              </a:defRPr>
+            </a:lvl4pPr>
+            <a:lvl5pPr>
+              <a:defRPr sz="1950" b="0">
+                <a:solidFill>
+                  <a:srgbClr val="44505D"/>
+                </a:solidFill>
+                <a:latin typeface="IBM Plex Sans"/>
+                <a:ea typeface="IBM Plex Sans"/>
+                <a:cs typeface="IBM Plex Sans"/>
+              </a:defRPr>
+            </a:lvl5pPr>
+            <a:lvl6pPr>
+              <a:defRPr sz="1950" b="0">
+                <a:solidFill>
+                  <a:srgbClr val="44505D"/>
+                </a:solidFill>
+                <a:latin typeface="IBM Plex Sans"/>
+                <a:ea typeface="IBM Plex Sans"/>
+                <a:cs typeface="IBM Plex Sans"/>
+              </a:defRPr>
+            </a:lvl6pPr>
+            <a:lvl7pPr>
+              <a:defRPr sz="1950" b="0">
+                <a:solidFill>
+                  <a:srgbClr val="44505D"/>
+                </a:solidFill>
+                <a:latin typeface="IBM Plex Sans"/>
+                <a:ea typeface="IBM Plex Sans"/>
+                <a:cs typeface="IBM Plex Sans"/>
+              </a:defRPr>
+            </a:lvl7pPr>
+            <a:lvl8pPr>
+              <a:defRPr sz="1950" b="0">
+                <a:solidFill>
+                  <a:srgbClr val="44505D"/>
+                </a:solidFill>
+                <a:latin typeface="IBM Plex Sans"/>
+                <a:ea typeface="IBM Plex Sans"/>
+                <a:cs typeface="IBM Plex Sans"/>
+              </a:defRPr>
+            </a:lvl8pPr>
+            <a:lvl9pPr>
+              <a:defRPr sz="1950" b="0">
+                <a:solidFill>
+                  <a:srgbClr val="44505D"/>
+                </a:solidFill>
+                <a:latin typeface="IBM Plex Sans"/>
+                <a:ea typeface="IBM Plex Sans"/>
+                <a:cs typeface="IBM Plex Sans"/>
+              </a:defRPr>
+            </a:lvl9pPr>
+          </a:lstStyle>
+          <a:p xmlns:a="http://schemas.openxmlformats.org/drawingml/2006/main">
+            <a:pPr>
+              <a:defRPr sz="1950" b="0">
+                <a:solidFill>
+                  <a:srgbClr val="44505D"/>
+                </a:solidFill>
+                <a:latin typeface="IBM Plex Sans"/>
+                <a:ea typeface="IBM Plex Sans"/>
+                <a:cs typeface="IBM Plex Sans"/>
+              </a:defRPr>
+            </a:pPr>
+            <a:r>
+              <a:rPr sz="1950" b="0">
+                <a:solidFill>
+                  <a:srgbClr val="44505D"/>
+                </a:solidFill>
+                <a:latin typeface="IBM Plex Sans"/>
+                <a:ea typeface="IBM Plex Sans"/>
+                <a:cs typeface="IBM Plex Sans"/>
+              </a:rPr>
+              <a:t>Обухват и безбедносни модел свих целина</a:t>
+            </a:r>
+          </a:p>
+          <a:p xmlns:a="http://schemas.openxmlformats.org/drawingml/2006/main">
+            <a:pPr>
+              <a:defRPr sz="1950" b="0">
+                <a:solidFill>
+                  <a:srgbClr val="44505D"/>
+                </a:solidFill>
+                <a:latin typeface="IBM Plex Sans"/>
+                <a:ea typeface="IBM Plex Sans"/>
+                <a:cs typeface="IBM Plex Sans"/>
+              </a:defRPr>
+            </a:pPr>
+            <a:r>
+              <a:rPr sz="1950" b="0">
+                <a:solidFill>
+                  <a:srgbClr val="44505D"/>
+                </a:solidFill>
+                <a:latin typeface="IBM Plex Sans"/>
+                <a:ea typeface="IBM Plex Sans"/>
+                <a:cs typeface="IBM Plex Sans"/>
+              </a:rPr>
+              <a:t>Први функционални ток и негативни тест</a:t>
+            </a:r>
+          </a:p>
+        </p:txBody>
+      </p:sp>
+      <p:sp>
+        <p:nvSpPr>
+          <p:cNvPr id="50" name="checkpoint-update">
+            <a:extLst xmlns:a="http://schemas.openxmlformats.org/drawingml/2006/main">
+              <a:ext uri="{FF2B5EF4-FFF2-40B4-BE49-F238E27FC236}">
+                <a16:creationId xmlns:a16="http://schemas.microsoft.com/office/drawing/2014/main" id="{9235142C-1F2E-4428-9EFE-94696C3C84F6}"/>
+              </a:ext>
+            </a:extLst>
+          </p:cNvPr>
+          <p:cNvSpPr>
+            <a:spLocks xmlns:a="http://schemas.openxmlformats.org/drawingml/2006/main" noGrp="1"/>
+          </p:cNvSpPr>
+          <p:nvPr/>
+        </p:nvSpPr>
+        <p:spPr>
+          <a:xfrm xmlns:a="http://schemas.openxmlformats.org/drawingml/2006/main">
+            <a:off x="9525000" y="3333750"/>
+            <a:ext cx="7429500" cy="476250"/>
+          </a:xfrm>
+          <a:prstGeom xmlns:a="http://schemas.openxmlformats.org/drawingml/2006/main" prst="rect">
+            <a:avLst/>
+          </a:prstGeom>
+          <a:noFill xmlns:a="http://schemas.openxmlformats.org/drawingml/2006/main"/>
+          <a:ln xmlns:a="http://schemas.openxmlformats.org/drawingml/2006/main" w="0">
+            <a:noFill/>
+          </a:ln>
+        </p:spPr>
+        <p:txBody>
+          <a:bodyPr xmlns:a="http://schemas.openxmlformats.org/drawingml/2006/main" lIns="0" tIns="0" rIns="0" bIns="0"/>
+          <a:lstStyle xmlns:a="http://schemas.openxmlformats.org/drawingml/2006/main">
+            <a:defPPr>
+              <a:defRPr sz="2100" b="0">
+                <a:solidFill>
+                  <a:srgbClr val="0A5CA8"/>
+                </a:solidFill>
+                <a:latin typeface="IBM Plex Mono"/>
+                <a:ea typeface="IBM Plex Mono"/>
+                <a:cs typeface="IBM Plex Mono"/>
+              </a:defRPr>
+            </a:defPPr>
+            <a:lvl1pPr>
+              <a:defRPr sz="2100" b="0">
+                <a:solidFill>
+                  <a:srgbClr val="0A5CA8"/>
+                </a:solidFill>
+                <a:latin typeface="IBM Plex Mono"/>
+                <a:ea typeface="IBM Plex Mono"/>
+                <a:cs typeface="IBM Plex Mono"/>
+              </a:defRPr>
+            </a:lvl1pPr>
+            <a:lvl2pPr>
+              <a:defRPr sz="2100" b="0">
+                <a:solidFill>
+                  <a:srgbClr val="0A5CA8"/>
+                </a:solidFill>
+                <a:latin typeface="IBM Plex Mono"/>
+                <a:ea typeface="IBM Plex Mono"/>
+                <a:cs typeface="IBM Plex Mono"/>
+              </a:defRPr>
+            </a:lvl2pPr>
+            <a:lvl3pPr>
+              <a:defRPr sz="2100" b="0">
+                <a:solidFill>
+                  <a:srgbClr val="0A5CA8"/>
+                </a:solidFill>
+                <a:latin typeface="IBM Plex Mono"/>
+                <a:ea typeface="IBM Plex Mono"/>
+                <a:cs typeface="IBM Plex Mono"/>
+              </a:defRPr>
+            </a:lvl3pPr>
+            <a:lvl4pPr>
+              <a:defRPr sz="2100" b="0">
+                <a:solidFill>
+                  <a:srgbClr val="0A5CA8"/>
+                </a:solidFill>
+                <a:latin typeface="IBM Plex Mono"/>
+                <a:ea typeface="IBM Plex Mono"/>
+                <a:cs typeface="IBM Plex Mono"/>
+              </a:defRPr>
+            </a:lvl4pPr>
+            <a:lvl5pPr>
+              <a:defRPr sz="2100" b="0">
+                <a:solidFill>
+                  <a:srgbClr val="0A5CA8"/>
+                </a:solidFill>
+                <a:latin typeface="IBM Plex Mono"/>
+                <a:ea typeface="IBM Plex Mono"/>
+                <a:cs typeface="IBM Plex Mono"/>
+              </a:defRPr>
+            </a:lvl5pPr>
+            <a:lvl6pPr>
+              <a:defRPr sz="2100" b="0">
+                <a:solidFill>
+                  <a:srgbClr val="0A5CA8"/>
+                </a:solidFill>
+                <a:latin typeface="IBM Plex Mono"/>
+                <a:ea typeface="IBM Plex Mono"/>
+                <a:cs typeface="IBM Plex Mono"/>
+              </a:defRPr>
+            </a:lvl6pPr>
+            <a:lvl7pPr>
+              <a:defRPr sz="2100" b="0">
+                <a:solidFill>
+                  <a:srgbClr val="0A5CA8"/>
+                </a:solidFill>
+                <a:latin typeface="IBM Plex Mono"/>
+                <a:ea typeface="IBM Plex Mono"/>
+                <a:cs typeface="IBM Plex Mono"/>
+              </a:defRPr>
+            </a:lvl7pPr>
+            <a:lvl8pPr>
+              <a:defRPr sz="2100" b="0">
+                <a:solidFill>
+                  <a:srgbClr val="0A5CA8"/>
+                </a:solidFill>
+                <a:latin typeface="IBM Plex Mono"/>
+                <a:ea typeface="IBM Plex Mono"/>
+                <a:cs typeface="IBM Plex Mono"/>
+              </a:defRPr>
+            </a:lvl8pPr>
+            <a:lvl9pPr>
+              <a:defRPr sz="2100" b="0">
+                <a:solidFill>
+                  <a:srgbClr val="0A5CA8"/>
+                </a:solidFill>
+                <a:latin typeface="IBM Plex Mono"/>
+                <a:ea typeface="IBM Plex Mono"/>
+                <a:cs typeface="IBM Plex Mono"/>
+              </a:defRPr>
+            </a:lvl9pPr>
+          </a:lstStyle>
+          <a:p xmlns:a="http://schemas.openxmlformats.org/drawingml/2006/main">
+            <a:pPr>
+              <a:defRPr sz="2100" b="0">
+                <a:solidFill>
+                  <a:srgbClr val="0A5CA8"/>
+                </a:solidFill>
+                <a:latin typeface="IBM Plex Mono"/>
+                <a:ea typeface="IBM Plex Mono"/>
+                <a:cs typeface="IBM Plex Mono"/>
+              </a:defRPr>
+            </a:pPr>
+            <a:r>
+              <a:rPr sz="2100" b="0">
+                <a:solidFill>
+                  <a:srgbClr val="0A5CA8"/>
+                </a:solidFill>
+                <a:latin typeface="IBM Plex Mono"/>
+                <a:ea typeface="IBM Plex Mono"/>
+                <a:cs typeface="IBM Plex Mono"/>
+              </a:rPr>
+              <a:t>КТ2 · 8. ВЕЖБА</a:t>
+            </a:r>
+          </a:p>
+        </p:txBody>
+      </p:sp>
+      <p:sp>
+        <p:nvSpPr>
+          <p:cNvPr id="51" name="checkpoint-update">
+            <a:extLst xmlns:a="http://schemas.openxmlformats.org/drawingml/2006/main">
+              <a:ext uri="{FF2B5EF4-FFF2-40B4-BE49-F238E27FC236}">
+                <a16:creationId xmlns:a16="http://schemas.microsoft.com/office/drawing/2014/main" id="{6D84464F-D473-4039-944D-0F12FCB90A3E}"/>
+              </a:ext>
+            </a:extLst>
+          </p:cNvPr>
+          <p:cNvSpPr>
+            <a:spLocks xmlns:a="http://schemas.openxmlformats.org/drawingml/2006/main" noGrp="1"/>
+          </p:cNvSpPr>
+          <p:nvPr/>
+        </p:nvSpPr>
+        <p:spPr>
+          <a:xfrm xmlns:a="http://schemas.openxmlformats.org/drawingml/2006/main">
+            <a:off x="9525000" y="4019550"/>
+            <a:ext cx="7524750" cy="523875"/>
+          </a:xfrm>
+          <a:prstGeom xmlns:a="http://schemas.openxmlformats.org/drawingml/2006/main" prst="rect">
+            <a:avLst/>
+          </a:prstGeom>
+          <a:noFill xmlns:a="http://schemas.openxmlformats.org/drawingml/2006/main"/>
+          <a:ln xmlns:a="http://schemas.openxmlformats.org/drawingml/2006/main" w="0">
+            <a:noFill/>
+          </a:ln>
+        </p:spPr>
+        <p:txBody>
+          <a:bodyPr xmlns:a="http://schemas.openxmlformats.org/drawingml/2006/main" lIns="0" tIns="0" rIns="0" bIns="0"/>
+          <a:lstStyle xmlns:a="http://schemas.openxmlformats.org/drawingml/2006/main">
+            <a:defPPr>
+              <a:defRPr sz="2700" b="1">
+                <a:solidFill>
+                  <a:srgbClr val="13202D"/>
+                </a:solidFill>
+                <a:latin typeface="IBM Plex Sans"/>
+                <a:ea typeface="IBM Plex Sans"/>
+                <a:cs typeface="IBM Plex Sans"/>
+              </a:defRPr>
+            </a:defPPr>
+            <a:lvl1pPr>
+              <a:defRPr sz="2700" b="1">
+                <a:solidFill>
+                  <a:srgbClr val="13202D"/>
+                </a:solidFill>
+                <a:latin typeface="IBM Plex Sans"/>
+                <a:ea typeface="IBM Plex Sans"/>
+                <a:cs typeface="IBM Plex Sans"/>
+              </a:defRPr>
+            </a:lvl1pPr>
+            <a:lvl2pPr>
+              <a:defRPr sz="2700" b="1">
+                <a:solidFill>
+                  <a:srgbClr val="13202D"/>
+                </a:solidFill>
+                <a:latin typeface="IBM Plex Sans"/>
+                <a:ea typeface="IBM Plex Sans"/>
+                <a:cs typeface="IBM Plex Sans"/>
+              </a:defRPr>
+            </a:lvl2pPr>
+            <a:lvl3pPr>
+              <a:defRPr sz="2700" b="1">
+                <a:solidFill>
+                  <a:srgbClr val="13202D"/>
+                </a:solidFill>
+                <a:latin typeface="IBM Plex Sans"/>
+                <a:ea typeface="IBM Plex Sans"/>
+                <a:cs typeface="IBM Plex Sans"/>
+              </a:defRPr>
+            </a:lvl3pPr>
+            <a:lvl4pPr>
+              <a:defRPr sz="2700" b="1">
+                <a:solidFill>
+                  <a:srgbClr val="13202D"/>
+                </a:solidFill>
+                <a:latin typeface="IBM Plex Sans"/>
+                <a:ea typeface="IBM Plex Sans"/>
+                <a:cs typeface="IBM Plex Sans"/>
+              </a:defRPr>
+            </a:lvl4pPr>
+            <a:lvl5pPr>
+              <a:defRPr sz="2700" b="1">
+                <a:solidFill>
+                  <a:srgbClr val="13202D"/>
+                </a:solidFill>
+                <a:latin typeface="IBM Plex Sans"/>
+                <a:ea typeface="IBM Plex Sans"/>
+                <a:cs typeface="IBM Plex Sans"/>
+              </a:defRPr>
+            </a:lvl5pPr>
+            <a:lvl6pPr>
+              <a:defRPr sz="2700" b="1">
+                <a:solidFill>
+                  <a:srgbClr val="13202D"/>
+                </a:solidFill>
+                <a:latin typeface="IBM Plex Sans"/>
+                <a:ea typeface="IBM Plex Sans"/>
+                <a:cs typeface="IBM Plex Sans"/>
+              </a:defRPr>
+            </a:lvl6pPr>
+            <a:lvl7pPr>
+              <a:defRPr sz="2700" b="1">
+                <a:solidFill>
+                  <a:srgbClr val="13202D"/>
+                </a:solidFill>
+                <a:latin typeface="IBM Plex Sans"/>
+                <a:ea typeface="IBM Plex Sans"/>
+                <a:cs typeface="IBM Plex Sans"/>
+              </a:defRPr>
+            </a:lvl7pPr>
+            <a:lvl8pPr>
+              <a:defRPr sz="2700" b="1">
+                <a:solidFill>
+                  <a:srgbClr val="13202D"/>
+                </a:solidFill>
+                <a:latin typeface="IBM Plex Sans"/>
+                <a:ea typeface="IBM Plex Sans"/>
+                <a:cs typeface="IBM Plex Sans"/>
+              </a:defRPr>
+            </a:lvl8pPr>
+            <a:lvl9pPr>
+              <a:defRPr sz="2700" b="1">
+                <a:solidFill>
+                  <a:srgbClr val="13202D"/>
+                </a:solidFill>
+                <a:latin typeface="IBM Plex Sans"/>
+                <a:ea typeface="IBM Plex Sans"/>
+                <a:cs typeface="IBM Plex Sans"/>
+              </a:defRPr>
+            </a:lvl9pPr>
+          </a:lstStyle>
+          <a:p xmlns:a="http://schemas.openxmlformats.org/drawingml/2006/main">
+            <a:pPr>
+              <a:defRPr sz="2700" b="1">
+                <a:solidFill>
+                  <a:srgbClr val="13202D"/>
+                </a:solidFill>
+                <a:latin typeface="IBM Plex Sans"/>
+                <a:ea typeface="IBM Plex Sans"/>
+                <a:cs typeface="IBM Plex Sans"/>
+              </a:defRPr>
+            </a:pPr>
+            <a:r>
+              <a:rPr sz="2700" b="1">
+                <a:solidFill>
+                  <a:srgbClr val="13202D"/>
+                </a:solidFill>
+                <a:latin typeface="IBM Plex Sans"/>
+                <a:ea typeface="IBM Plex Sans"/>
+                <a:cs typeface="IBM Plex Sans"/>
+              </a:rPr>
+              <a:t>Завршна демонстрација</a:t>
+            </a:r>
+          </a:p>
+        </p:txBody>
+      </p:sp>
+      <p:sp>
+        <p:nvSpPr>
+          <p:cNvPr id="52" name="checkpoint-update">
+            <a:extLst xmlns:a="http://schemas.openxmlformats.org/drawingml/2006/main">
+              <a:ext uri="{FF2B5EF4-FFF2-40B4-BE49-F238E27FC236}">
+                <a16:creationId xmlns:a16="http://schemas.microsoft.com/office/drawing/2014/main" id="{9ACF9E05-B7DD-43A2-855A-E06C432412FE}"/>
+              </a:ext>
+            </a:extLst>
+          </p:cNvPr>
+          <p:cNvSpPr>
+            <a:spLocks xmlns:a="http://schemas.openxmlformats.org/drawingml/2006/main" noGrp="1"/>
+          </p:cNvSpPr>
+          <p:nvPr/>
+        </p:nvSpPr>
+        <p:spPr>
+          <a:xfrm xmlns:a="http://schemas.openxmlformats.org/drawingml/2006/main">
+            <a:off x="9525000" y="4714875"/>
+            <a:ext cx="7524750" cy="809625"/>
+          </a:xfrm>
+          <a:prstGeom xmlns:a="http://schemas.openxmlformats.org/drawingml/2006/main" prst="rect">
+            <a:avLst/>
+          </a:prstGeom>
+          <a:noFill xmlns:a="http://schemas.openxmlformats.org/drawingml/2006/main"/>
+          <a:ln xmlns:a="http://schemas.openxmlformats.org/drawingml/2006/main" w="0">
+            <a:noFill/>
+          </a:ln>
+        </p:spPr>
+        <p:txBody>
+          <a:bodyPr xmlns:a="http://schemas.openxmlformats.org/drawingml/2006/main" lIns="0" tIns="0" rIns="0" bIns="0"/>
+          <a:lstStyle xmlns:a="http://schemas.openxmlformats.org/drawingml/2006/main">
+            <a:defPPr>
+              <a:defRPr sz="1950" b="0">
+                <a:solidFill>
+                  <a:srgbClr val="44505D"/>
+                </a:solidFill>
+                <a:latin typeface="IBM Plex Sans"/>
+                <a:ea typeface="IBM Plex Sans"/>
+                <a:cs typeface="IBM Plex Sans"/>
+              </a:defRPr>
+            </a:defPPr>
+            <a:lvl1pPr>
+              <a:defRPr sz="1950" b="0">
+                <a:solidFill>
+                  <a:srgbClr val="44505D"/>
+                </a:solidFill>
+                <a:latin typeface="IBM Plex Sans"/>
+                <a:ea typeface="IBM Plex Sans"/>
+                <a:cs typeface="IBM Plex Sans"/>
+              </a:defRPr>
+            </a:lvl1pPr>
+            <a:lvl2pPr>
+              <a:defRPr sz="1950" b="0">
+                <a:solidFill>
+                  <a:srgbClr val="44505D"/>
+                </a:solidFill>
+                <a:latin typeface="IBM Plex Sans"/>
+                <a:ea typeface="IBM Plex Sans"/>
+                <a:cs typeface="IBM Plex Sans"/>
+              </a:defRPr>
+            </a:lvl2pPr>
+            <a:lvl3pPr>
+              <a:defRPr sz="1950" b="0">
+                <a:solidFill>
+                  <a:srgbClr val="44505D"/>
+                </a:solidFill>
+                <a:latin typeface="IBM Plex Sans"/>
+                <a:ea typeface="IBM Plex Sans"/>
+                <a:cs typeface="IBM Plex Sans"/>
+              </a:defRPr>
+            </a:lvl3pPr>
+            <a:lvl4pPr>
+              <a:defRPr sz="1950" b="0">
+                <a:solidFill>
+                  <a:srgbClr val="44505D"/>
+                </a:solidFill>
+                <a:latin typeface="IBM Plex Sans"/>
+                <a:ea typeface="IBM Plex Sans"/>
+                <a:cs typeface="IBM Plex Sans"/>
+              </a:defRPr>
+            </a:lvl4pPr>
+            <a:lvl5pPr>
+              <a:defRPr sz="1950" b="0">
+                <a:solidFill>
+                  <a:srgbClr val="44505D"/>
+                </a:solidFill>
+                <a:latin typeface="IBM Plex Sans"/>
+                <a:ea typeface="IBM Plex Sans"/>
+                <a:cs typeface="IBM Plex Sans"/>
+              </a:defRPr>
+            </a:lvl5pPr>
+            <a:lvl6pPr>
+              <a:defRPr sz="1950" b="0">
+                <a:solidFill>
+                  <a:srgbClr val="44505D"/>
+                </a:solidFill>
+                <a:latin typeface="IBM Plex Sans"/>
+                <a:ea typeface="IBM Plex Sans"/>
+                <a:cs typeface="IBM Plex Sans"/>
+              </a:defRPr>
+            </a:lvl6pPr>
+            <a:lvl7pPr>
+              <a:defRPr sz="1950" b="0">
+                <a:solidFill>
+                  <a:srgbClr val="44505D"/>
+                </a:solidFill>
+                <a:latin typeface="IBM Plex Sans"/>
+                <a:ea typeface="IBM Plex Sans"/>
+                <a:cs typeface="IBM Plex Sans"/>
+              </a:defRPr>
+            </a:lvl7pPr>
+            <a:lvl8pPr>
+              <a:defRPr sz="1950" b="0">
+                <a:solidFill>
+                  <a:srgbClr val="44505D"/>
+                </a:solidFill>
+                <a:latin typeface="IBM Plex Sans"/>
+                <a:ea typeface="IBM Plex Sans"/>
+                <a:cs typeface="IBM Plex Sans"/>
+              </a:defRPr>
+            </a:lvl8pPr>
+            <a:lvl9pPr>
+              <a:defRPr sz="1950" b="0">
+                <a:solidFill>
+                  <a:srgbClr val="44505D"/>
+                </a:solidFill>
+                <a:latin typeface="IBM Plex Sans"/>
+                <a:ea typeface="IBM Plex Sans"/>
+                <a:cs typeface="IBM Plex Sans"/>
+              </a:defRPr>
+            </a:lvl9pPr>
+          </a:lstStyle>
+          <a:p xmlns:a="http://schemas.openxmlformats.org/drawingml/2006/main">
+            <a:pPr>
+              <a:defRPr sz="1950" b="0">
+                <a:solidFill>
+                  <a:srgbClr val="44505D"/>
+                </a:solidFill>
+                <a:latin typeface="IBM Plex Sans"/>
+                <a:ea typeface="IBM Plex Sans"/>
+                <a:cs typeface="IBM Plex Sans"/>
+              </a:defRPr>
+            </a:pPr>
+            <a:r>
+              <a:rPr sz="1950" b="0">
+                <a:solidFill>
+                  <a:srgbClr val="44505D"/>
+                </a:solidFill>
+                <a:latin typeface="IBM Plex Sans"/>
+                <a:ea typeface="IBM Plex Sans"/>
+                <a:cs typeface="IBM Plex Sans"/>
+              </a:rPr>
+              <a:t>Све додељене целине, тестови и интеграција</a:t>
+            </a:r>
+          </a:p>
+          <a:p xmlns:a="http://schemas.openxmlformats.org/drawingml/2006/main">
+            <a:pPr>
+              <a:defRPr sz="1950" b="0">
+                <a:solidFill>
+                  <a:srgbClr val="44505D"/>
+                </a:solidFill>
+                <a:latin typeface="IBM Plex Sans"/>
+                <a:ea typeface="IBM Plex Sans"/>
+                <a:cs typeface="IBM Plex Sans"/>
+              </a:defRPr>
+            </a:pPr>
+            <a:r>
+              <a:rPr sz="1950" b="0">
+                <a:solidFill>
+                  <a:srgbClr val="44505D"/>
+                </a:solidFill>
+                <a:latin typeface="IBM Plex Sans"/>
+                <a:ea typeface="IBM Plex Sans"/>
+                <a:cs typeface="IBM Plex Sans"/>
+              </a:rPr>
+              <a:t>Поновљив demo и ажурна документација</a:t>
             </a:r>
           </a:p>
         </p:txBody>
@@ -18669,6 +18644,7 @@
           <a:lstStyle xmlns:a="http://schemas.openxmlformats.org/drawingml/2006/main"/>
           <a:p xmlns:a="http://schemas.openxmlformats.org/drawingml/2006/main">
             <a:pPr algn="l">
+              <a:buNone/>
               <a:defRPr sz="1800">
                 <a:latin typeface="IBM Plex Mono"/>
                 <a:ea typeface="IBM Plex Mono"/>
@@ -18723,6 +18699,7 @@
           <a:lstStyle xmlns:a="http://schemas.openxmlformats.org/drawingml/2006/main"/>
           <a:p xmlns:a="http://schemas.openxmlformats.org/drawingml/2006/main">
             <a:pPr algn="l">
+              <a:buNone/>
               <a:defRPr sz="4500">
                 <a:latin typeface="IBM Plex Sans"/>
                 <a:ea typeface="IBM Plex Sans"/>
@@ -18777,6 +18754,7 @@
           <a:lstStyle xmlns:a="http://schemas.openxmlformats.org/drawingml/2006/main"/>
           <a:p xmlns:a="http://schemas.openxmlformats.org/drawingml/2006/main">
             <a:pPr algn="l">
+              <a:buNone/>
               <a:defRPr sz="2100">
                 <a:latin typeface="IBM Plex Sans"/>
                 <a:ea typeface="IBM Plex Sans"/>
@@ -18831,6 +18809,7 @@
           <a:lstStyle xmlns:a="http://schemas.openxmlformats.org/drawingml/2006/main"/>
           <a:p xmlns:a="http://schemas.openxmlformats.org/drawingml/2006/main">
             <a:pPr algn="l">
+              <a:buNone/>
               <a:defRPr sz="1800">
                 <a:latin typeface="IBM Plex Sans"/>
                 <a:ea typeface="IBM Plex Sans"/>
@@ -18885,6 +18864,7 @@
           <a:lstStyle xmlns:a="http://schemas.openxmlformats.org/drawingml/2006/main"/>
           <a:p xmlns:a="http://schemas.openxmlformats.org/drawingml/2006/main">
             <a:pPr algn="l">
+              <a:buNone/>
               <a:defRPr sz="1800">
                 <a:latin typeface="IBM Plex Mono"/>
                 <a:ea typeface="IBM Plex Mono"/>
@@ -18907,13 +18887,19 @@
       </p:sp>
       <p:graphicFrame>
         <p:nvGraphicFramePr>
-          <p:cNvPr id="16" name=""/>
+          <p:cNvPr id="16" name="">
+            <a:extLst xmlns:a="http://schemas.openxmlformats.org/drawingml/2006/main">
+              <a:ext uri="{FF2B5EF4-FFF2-40B4-BE49-F238E27FC236}">
+                <a16:creationId xmlns:a16="http://schemas.microsoft.com/office/drawing/2014/main" id="{CCC346C0-D398-418C-AF08-9692F39871BB}"/>
+              </a:ext>
+            </a:extLst>
+          </p:cNvPr>
           <p:cNvGraphicFramePr/>
           <p:nvPr/>
         </p:nvGraphicFramePr>
         <p:xfrm>
           <a:off xmlns:a="http://schemas.openxmlformats.org/drawingml/2006/main" x="1219200" y="3112591"/>
-          <a:ext xmlns:a="http://schemas.openxmlformats.org/drawingml/2006/main" cx="15849600" cy="3647480"/>
+          <a:ext xmlns:a="http://schemas.openxmlformats.org/drawingml/2006/main" cx="15849600" cy="2177058"/>
         </p:xfrm>
         <a:graphic xmlns:a="http://schemas.openxmlformats.org/drawingml/2006/main">
           <a:graphicData uri="http://schemas.openxmlformats.org/drawingml/2006/table">
@@ -19076,7 +19062,7 @@
                   </a:tcPr>
                 </a:tc>
               </a:tr>
-              <a:tr h="725686">
+              <a:tr h="1238250">
                 <a:tc>
                   <a:txBody>
                     <a:bodyPr>
@@ -19093,7 +19079,7 @@
                           <a:ea typeface="IBM Plex Sans"/>
                           <a:cs typeface="IBM Plex Sans"/>
                         </a:rPr>
-                        <a:t>P1</a:t>
+                        <a:t>КТ1</a:t>
                       </a:r>
                     </a:p>
                   </a:txBody>
@@ -19143,7 +19129,7 @@
                           <a:ea typeface="IBM Plex Sans"/>
                           <a:cs typeface="IBM Plex Sans"/>
                         </a:rPr>
-                        <a:t>Идентитет, RBAC и одбијен приступ</a:t>
+                        <a:t>Основна имплементација, безбедносни модел и први ток са негативним тестом</a:t>
                       </a:r>
                     </a:p>
                   </a:txBody>
@@ -19193,7 +19179,7 @@
                           <a:ea typeface="IBM Plex Sans"/>
                           <a:cs typeface="IBM Plex Sans"/>
                         </a:rPr>
-                        <a:t>После вежби 1–2</a:t>
+                        <a:t>Термин 4. вежбе</a:t>
                       </a:r>
                     </a:p>
                   </a:txBody>
@@ -19228,7 +19214,7 @@
                   </a:tcPr>
                 </a:tc>
               </a:tr>
-              <a:tr h="725686">
+              <a:tr h="1238250">
                 <a:tc>
                   <a:txBody>
                     <a:bodyPr>
@@ -19245,7 +19231,7 @@
                           <a:ea typeface="IBM Plex Sans"/>
                           <a:cs typeface="IBM Plex Sans"/>
                         </a:rPr>
-                        <a:t>P2</a:t>
+                        <a:t>КТ2</a:t>
                       </a:r>
                     </a:p>
                   </a:txBody>
@@ -19295,7 +19281,7 @@
                           <a:ea typeface="IBM Plex Sans"/>
                           <a:cs typeface="IBM Plex Sans"/>
                         </a:rPr>
-                        <a:t>Политике, класификација и baseline</a:t>
+                        <a:t>Све целине у одобреном обиму, интеграција, тестови и поновљив demo</a:t>
                       </a:r>
                     </a:p>
                   </a:txBody>
@@ -19345,311 +19331,7 @@
                           <a:ea typeface="IBM Plex Sans"/>
                           <a:cs typeface="IBM Plex Sans"/>
                         </a:rPr>
-                        <a:t>После вежби 3–4</a:t>
-                      </a:r>
-                    </a:p>
-                  </a:txBody>
-                  <a:tcPr marL="228600" marR="228600" marT="171450" marB="171450" anchor="ctr">
-                    <a:lnL w="9525">
-                      <a:solidFill>
-                        <a:srgbClr val="D3DAE1"/>
-                      </a:solidFill>
-                      <a:prstDash val="solid"/>
-                    </a:lnL>
-                    <a:lnR w="9525">
-                      <a:solidFill>
-                        <a:srgbClr val="D3DAE1"/>
-                      </a:solidFill>
-                      <a:prstDash val="solid"/>
-                    </a:lnR>
-                    <a:lnT w="9525">
-                      <a:solidFill>
-                        <a:srgbClr val="D3DAE1"/>
-                      </a:solidFill>
-                      <a:prstDash val="solid"/>
-                    </a:lnT>
-                    <a:lnB w="9525">
-                      <a:solidFill>
-                        <a:srgbClr val="D3DAE1"/>
-                      </a:solidFill>
-                      <a:prstDash val="solid"/>
-                    </a:lnB>
-                    <a:solidFill>
-                      <a:srgbClr val="FCFCFB"/>
-                    </a:solidFill>
-                  </a:tcPr>
-                </a:tc>
-              </a:tr>
-              <a:tr h="725686">
-                <a:tc>
-                  <a:txBody>
-                    <a:bodyPr>
-                      <a:noAutofit/>
-                    </a:bodyPr>
-                    <a:lstStyle/>
-                    <a:p>
-                      <a:r>
-                        <a:rPr sz="2100" b="0">
-                          <a:solidFill>
-                            <a:srgbClr val="44505D"/>
-                          </a:solidFill>
-                          <a:latin typeface="IBM Plex Sans"/>
-                          <a:ea typeface="IBM Plex Sans"/>
-                          <a:cs typeface="IBM Plex Sans"/>
-                        </a:rPr>
-                        <a:t>P3</a:t>
-                      </a:r>
-                    </a:p>
-                  </a:txBody>
-                  <a:tcPr marL="228600" marR="228600" marT="171450" marB="171450" anchor="ctr">
-                    <a:lnL w="9525">
-                      <a:solidFill>
-                        <a:srgbClr val="D3DAE1"/>
-                      </a:solidFill>
-                      <a:prstDash val="solid"/>
-                    </a:lnL>
-                    <a:lnR w="9525">
-                      <a:solidFill>
-                        <a:srgbClr val="D3DAE1"/>
-                      </a:solidFill>
-                      <a:prstDash val="solid"/>
-                    </a:lnR>
-                    <a:lnT w="9525">
-                      <a:solidFill>
-                        <a:srgbClr val="D3DAE1"/>
-                      </a:solidFill>
-                      <a:prstDash val="solid"/>
-                    </a:lnT>
-                    <a:lnB w="9525">
-                      <a:solidFill>
-                        <a:srgbClr val="D3DAE1"/>
-                      </a:solidFill>
-                      <a:prstDash val="solid"/>
-                    </a:lnB>
-                    <a:solidFill>
-                      <a:srgbClr val="FCFCFB"/>
-                    </a:solidFill>
-                  </a:tcPr>
-                </a:tc>
-                <a:tc>
-                  <a:txBody>
-                    <a:bodyPr>
-                      <a:noAutofit/>
-                    </a:bodyPr>
-                    <a:lstStyle/>
-                    <a:p>
-                      <a:r>
-                        <a:rPr sz="2100" b="0">
-                          <a:solidFill>
-                            <a:srgbClr val="44505D"/>
-                          </a:solidFill>
-                          <a:latin typeface="IBM Plex Sans"/>
-                          <a:ea typeface="IBM Plex Sans"/>
-                          <a:cs typeface="IBM Plex Sans"/>
-                        </a:rPr>
-                        <a:t>Тестови и стабилно ручно језгро</a:t>
-                      </a:r>
-                    </a:p>
-                  </a:txBody>
-                  <a:tcPr marL="228600" marR="228600" marT="171450" marB="171450" anchor="ctr">
-                    <a:lnL w="9525">
-                      <a:solidFill>
-                        <a:srgbClr val="D3DAE1"/>
-                      </a:solidFill>
-                      <a:prstDash val="solid"/>
-                    </a:lnL>
-                    <a:lnR w="9525">
-                      <a:solidFill>
-                        <a:srgbClr val="D3DAE1"/>
-                      </a:solidFill>
-                      <a:prstDash val="solid"/>
-                    </a:lnR>
-                    <a:lnT w="9525">
-                      <a:solidFill>
-                        <a:srgbClr val="D3DAE1"/>
-                      </a:solidFill>
-                      <a:prstDash val="solid"/>
-                    </a:lnT>
-                    <a:lnB w="9525">
-                      <a:solidFill>
-                        <a:srgbClr val="D3DAE1"/>
-                      </a:solidFill>
-                      <a:prstDash val="solid"/>
-                    </a:lnB>
-                    <a:solidFill>
-                      <a:srgbClr val="FCFCFB"/>
-                    </a:solidFill>
-                  </a:tcPr>
-                </a:tc>
-                <a:tc>
-                  <a:txBody>
-                    <a:bodyPr>
-                      <a:noAutofit/>
-                    </a:bodyPr>
-                    <a:lstStyle/>
-                    <a:p>
-                      <a:r>
-                        <a:rPr sz="2100" b="0">
-                          <a:solidFill>
-                            <a:srgbClr val="44505D"/>
-                          </a:solidFill>
-                          <a:latin typeface="IBM Plex Sans"/>
-                          <a:ea typeface="IBM Plex Sans"/>
-                          <a:cs typeface="IBM Plex Sans"/>
-                        </a:rPr>
-                        <a:t>После вежби 5–6</a:t>
-                      </a:r>
-                    </a:p>
-                  </a:txBody>
-                  <a:tcPr marL="228600" marR="228600" marT="171450" marB="171450" anchor="ctr">
-                    <a:lnL w="9525">
-                      <a:solidFill>
-                        <a:srgbClr val="D3DAE1"/>
-                      </a:solidFill>
-                      <a:prstDash val="solid"/>
-                    </a:lnL>
-                    <a:lnR w="9525">
-                      <a:solidFill>
-                        <a:srgbClr val="D3DAE1"/>
-                      </a:solidFill>
-                      <a:prstDash val="solid"/>
-                    </a:lnR>
-                    <a:lnT w="9525">
-                      <a:solidFill>
-                        <a:srgbClr val="D3DAE1"/>
-                      </a:solidFill>
-                      <a:prstDash val="solid"/>
-                    </a:lnT>
-                    <a:lnB w="9525">
-                      <a:solidFill>
-                        <a:srgbClr val="D3DAE1"/>
-                      </a:solidFill>
-                      <a:prstDash val="solid"/>
-                    </a:lnB>
-                    <a:solidFill>
-                      <a:srgbClr val="FCFCFB"/>
-                    </a:solidFill>
-                  </a:tcPr>
-                </a:tc>
-              </a:tr>
-              <a:tr h="725686">
-                <a:tc>
-                  <a:txBody>
-                    <a:bodyPr>
-                      <a:noAutofit/>
-                    </a:bodyPr>
-                    <a:lstStyle/>
-                    <a:p>
-                      <a:r>
-                        <a:rPr sz="2100" b="0">
-                          <a:solidFill>
-                            <a:srgbClr val="44505D"/>
-                          </a:solidFill>
-                          <a:latin typeface="IBM Plex Sans"/>
-                          <a:ea typeface="IBM Plex Sans"/>
-                          <a:cs typeface="IBM Plex Sans"/>
-                        </a:rPr>
-                        <a:t>P4</a:t>
-                      </a:r>
-                    </a:p>
-                  </a:txBody>
-                  <a:tcPr marL="228600" marR="228600" marT="171450" marB="171450" anchor="ctr">
-                    <a:lnL w="9525">
-                      <a:solidFill>
-                        <a:srgbClr val="D3DAE1"/>
-                      </a:solidFill>
-                      <a:prstDash val="solid"/>
-                    </a:lnL>
-                    <a:lnR w="9525">
-                      <a:solidFill>
-                        <a:srgbClr val="D3DAE1"/>
-                      </a:solidFill>
-                      <a:prstDash val="solid"/>
-                    </a:lnR>
-                    <a:lnT w="9525">
-                      <a:solidFill>
-                        <a:srgbClr val="D3DAE1"/>
-                      </a:solidFill>
-                      <a:prstDash val="solid"/>
-                    </a:lnT>
-                    <a:lnB w="9525">
-                      <a:solidFill>
-                        <a:srgbClr val="D3DAE1"/>
-                      </a:solidFill>
-                      <a:prstDash val="solid"/>
-                    </a:lnB>
-                    <a:solidFill>
-                      <a:srgbClr val="FCFCFB"/>
-                    </a:solidFill>
-                  </a:tcPr>
-                </a:tc>
-                <a:tc>
-                  <a:txBody>
-                    <a:bodyPr>
-                      <a:noAutofit/>
-                    </a:bodyPr>
-                    <a:lstStyle/>
-                    <a:p>
-                      <a:r>
-                        <a:rPr sz="2100" b="0">
-                          <a:solidFill>
-                            <a:srgbClr val="44505D"/>
-                          </a:solidFill>
-                          <a:latin typeface="IBM Plex Sans"/>
-                          <a:ea typeface="IBM Plex Sans"/>
-                          <a:cs typeface="IBM Plex Sans"/>
-                        </a:rPr>
-                        <a:t>Оперативна безбедност и завршна одбрана</a:t>
-                      </a:r>
-                    </a:p>
-                  </a:txBody>
-                  <a:tcPr marL="228600" marR="228600" marT="171450" marB="171450" anchor="ctr">
-                    <a:lnL w="9525">
-                      <a:solidFill>
-                        <a:srgbClr val="D3DAE1"/>
-                      </a:solidFill>
-                      <a:prstDash val="solid"/>
-                    </a:lnL>
-                    <a:lnR w="9525">
-                      <a:solidFill>
-                        <a:srgbClr val="D3DAE1"/>
-                      </a:solidFill>
-                      <a:prstDash val="solid"/>
-                    </a:lnR>
-                    <a:lnT w="9525">
-                      <a:solidFill>
-                        <a:srgbClr val="D3DAE1"/>
-                      </a:solidFill>
-                      <a:prstDash val="solid"/>
-                    </a:lnT>
-                    <a:lnB w="9525">
-                      <a:solidFill>
-                        <a:srgbClr val="D3DAE1"/>
-                      </a:solidFill>
-                      <a:prstDash val="solid"/>
-                    </a:lnB>
-                    <a:solidFill>
-                      <a:srgbClr val="FCFCFB"/>
-                    </a:solidFill>
-                  </a:tcPr>
-                </a:tc>
-                <a:tc>
-                  <a:txBody>
-                    <a:bodyPr>
-                      <a:noAutofit/>
-                    </a:bodyPr>
-                    <a:lstStyle/>
-                    <a:p>
-                      <a:r>
-                        <a:rPr sz="2100" b="0">
-                          <a:solidFill>
-                            <a:srgbClr val="44505D"/>
-                          </a:solidFill>
-                          <a:latin typeface="IBM Plex Sans"/>
-                          <a:ea typeface="IBM Plex Sans"/>
-                          <a:cs typeface="IBM Plex Sans"/>
-                        </a:rPr>
-                        <a:t>После вежби 7–8</a:t>
+                        <a:t>Термин 8. вежбе</a:t>
                       </a:r>
                     </a:p>
                   </a:txBody>
@@ -19688,6 +19370,162 @@
           </a:graphicData>
         </a:graphic>
       </p:graphicFrame>
+      <p:sp>
+        <p:nvSpPr>
+          <p:cNvPr id="17" name="checkpoint-update">
+            <a:extLst xmlns:a="http://schemas.openxmlformats.org/drawingml/2006/main">
+              <a:ext uri="{FF2B5EF4-FFF2-40B4-BE49-F238E27FC236}">
+                <a16:creationId xmlns:a16="http://schemas.microsoft.com/office/drawing/2014/main" id="{1CBD6B89-505A-45A7-8691-C607FC36ACF0}"/>
+              </a:ext>
+            </a:extLst>
+          </p:cNvPr>
+          <p:cNvSpPr>
+            <a:spLocks xmlns:a="http://schemas.openxmlformats.org/drawingml/2006/main" noGrp="1"/>
+          </p:cNvSpPr>
+          <p:nvPr/>
+        </p:nvSpPr>
+        <p:spPr>
+          <a:xfrm xmlns:a="http://schemas.openxmlformats.org/drawingml/2006/main">
+            <a:off x="1219200" y="6953250"/>
+            <a:ext cx="15849600" cy="476250"/>
+          </a:xfrm>
+          <a:prstGeom xmlns:a="http://schemas.openxmlformats.org/drawingml/2006/main" prst="rect">
+            <a:avLst/>
+          </a:prstGeom>
+          <a:noFill xmlns:a="http://schemas.openxmlformats.org/drawingml/2006/main"/>
+          <a:ln xmlns:a="http://schemas.openxmlformats.org/drawingml/2006/main" w="0">
+            <a:noFill/>
+          </a:ln>
+        </p:spPr>
+        <p:txBody>
+          <a:bodyPr xmlns:a="http://schemas.openxmlformats.org/drawingml/2006/main" lIns="0" tIns="0" rIns="0" bIns="0"/>
+          <a:lstStyle xmlns:a="http://schemas.openxmlformats.org/drawingml/2006/main">
+            <a:defPPr>
+              <a:defRPr sz="1950" b="0">
+                <a:solidFill>
+                  <a:srgbClr val="44505D"/>
+                </a:solidFill>
+                <a:latin typeface="IBM Plex Sans"/>
+                <a:ea typeface="IBM Plex Sans"/>
+                <a:cs typeface="IBM Plex Sans"/>
+              </a:defRPr>
+            </a:defPPr>
+            <a:lvl1pPr>
+              <a:defRPr sz="1950" b="0">
+                <a:solidFill>
+                  <a:srgbClr val="44505D"/>
+                </a:solidFill>
+                <a:latin typeface="IBM Plex Sans"/>
+                <a:ea typeface="IBM Plex Sans"/>
+                <a:cs typeface="IBM Plex Sans"/>
+              </a:defRPr>
+            </a:lvl1pPr>
+            <a:lvl2pPr>
+              <a:defRPr sz="1950" b="0">
+                <a:solidFill>
+                  <a:srgbClr val="44505D"/>
+                </a:solidFill>
+                <a:latin typeface="IBM Plex Sans"/>
+                <a:ea typeface="IBM Plex Sans"/>
+                <a:cs typeface="IBM Plex Sans"/>
+              </a:defRPr>
+            </a:lvl2pPr>
+            <a:lvl3pPr>
+              <a:defRPr sz="1950" b="0">
+                <a:solidFill>
+                  <a:srgbClr val="44505D"/>
+                </a:solidFill>
+                <a:latin typeface="IBM Plex Sans"/>
+                <a:ea typeface="IBM Plex Sans"/>
+                <a:cs typeface="IBM Plex Sans"/>
+              </a:defRPr>
+            </a:lvl3pPr>
+            <a:lvl4pPr>
+              <a:defRPr sz="1950" b="0">
+                <a:solidFill>
+                  <a:srgbClr val="44505D"/>
+                </a:solidFill>
+                <a:latin typeface="IBM Plex Sans"/>
+                <a:ea typeface="IBM Plex Sans"/>
+                <a:cs typeface="IBM Plex Sans"/>
+              </a:defRPr>
+            </a:lvl4pPr>
+            <a:lvl5pPr>
+              <a:defRPr sz="1950" b="0">
+                <a:solidFill>
+                  <a:srgbClr val="44505D"/>
+                </a:solidFill>
+                <a:latin typeface="IBM Plex Sans"/>
+                <a:ea typeface="IBM Plex Sans"/>
+                <a:cs typeface="IBM Plex Sans"/>
+              </a:defRPr>
+            </a:lvl5pPr>
+            <a:lvl6pPr>
+              <a:defRPr sz="1950" b="0">
+                <a:solidFill>
+                  <a:srgbClr val="44505D"/>
+                </a:solidFill>
+                <a:latin typeface="IBM Plex Sans"/>
+                <a:ea typeface="IBM Plex Sans"/>
+                <a:cs typeface="IBM Plex Sans"/>
+              </a:defRPr>
+            </a:lvl6pPr>
+            <a:lvl7pPr>
+              <a:defRPr sz="1950" b="0">
+                <a:solidFill>
+                  <a:srgbClr val="44505D"/>
+                </a:solidFill>
+                <a:latin typeface="IBM Plex Sans"/>
+                <a:ea typeface="IBM Plex Sans"/>
+                <a:cs typeface="IBM Plex Sans"/>
+              </a:defRPr>
+            </a:lvl7pPr>
+            <a:lvl8pPr>
+              <a:defRPr sz="1950" b="0">
+                <a:solidFill>
+                  <a:srgbClr val="44505D"/>
+                </a:solidFill>
+                <a:latin typeface="IBM Plex Sans"/>
+                <a:ea typeface="IBM Plex Sans"/>
+                <a:cs typeface="IBM Plex Sans"/>
+              </a:defRPr>
+            </a:lvl8pPr>
+            <a:lvl9pPr>
+              <a:defRPr sz="1950" b="0">
+                <a:solidFill>
+                  <a:srgbClr val="44505D"/>
+                </a:solidFill>
+                <a:latin typeface="IBM Plex Sans"/>
+                <a:ea typeface="IBM Plex Sans"/>
+                <a:cs typeface="IBM Plex Sans"/>
+              </a:defRPr>
+            </a:lvl9pPr>
+          </a:lstStyle>
+          <a:p xmlns:a="http://schemas.openxmlformats.org/drawingml/2006/main">
+            <a:pPr>
+              <a:defRPr sz="1950" b="0">
+                <a:solidFill>
+                  <a:srgbClr val="44505D"/>
+                </a:solidFill>
+                <a:latin typeface="IBM Plex Sans"/>
+                <a:ea typeface="IBM Plex Sans"/>
+                <a:cs typeface="IBM Plex Sans"/>
+              </a:defRPr>
+            </a:pPr>
+            <a:r>
+              <a:rPr sz="1950" b="0">
+                <a:solidFill>
+                  <a:srgbClr val="44505D"/>
+                </a:solidFill>
+                <a:latin typeface="IBM Plex Sans"/>
+                <a:ea typeface="IBM Plex Sans"/>
+                <a:cs typeface="IBM Plex Sans"/>
+              </a:rPr>
+              <a:t>Контролне тачке и термини одбране пројекта су одвојене обавезе.</a:t>
+            </a:r>
+          </a:p>
+        </p:txBody>
+      </p:sp>
     </p:spTree>
     <p:extLst>
       <p:ext uri="{BB962C8B-B14F-4D97-AF65-F5344CB8AC3E}">
@@ -20603,6 +20441,7 @@
           <a:lstStyle xmlns:a="http://schemas.openxmlformats.org/drawingml/2006/main"/>
           <a:p xmlns:a="http://schemas.openxmlformats.org/drawingml/2006/main">
             <a:pPr algn="l">
+              <a:buNone/>
               <a:defRPr sz="1800">
                 <a:latin typeface="IBM Plex Mono"/>
                 <a:ea typeface="IBM Plex Mono"/>
@@ -20657,6 +20496,7 @@
           <a:lstStyle xmlns:a="http://schemas.openxmlformats.org/drawingml/2006/main"/>
           <a:p xmlns:a="http://schemas.openxmlformats.org/drawingml/2006/main">
             <a:pPr algn="l">
+              <a:buNone/>
               <a:defRPr sz="4500">
                 <a:latin typeface="IBM Plex Sans"/>
                 <a:ea typeface="IBM Plex Sans"/>
@@ -20711,6 +20551,7 @@
           <a:lstStyle xmlns:a="http://schemas.openxmlformats.org/drawingml/2006/main"/>
           <a:p xmlns:a="http://schemas.openxmlformats.org/drawingml/2006/main">
             <a:pPr algn="l">
+              <a:buNone/>
               <a:defRPr sz="3300">
                 <a:latin typeface="IBM Plex Mono"/>
                 <a:ea typeface="IBM Plex Mono"/>
@@ -20765,6 +20606,7 @@
           <a:lstStyle xmlns:a="http://schemas.openxmlformats.org/drawingml/2006/main"/>
           <a:p xmlns:a="http://schemas.openxmlformats.org/drawingml/2006/main">
             <a:pPr algn="l">
+              <a:buNone/>
               <a:defRPr sz="2100">
                 <a:latin typeface="IBM Plex Sans"/>
                 <a:ea typeface="IBM Plex Sans"/>
@@ -20819,6 +20661,7 @@
           <a:lstStyle xmlns:a="http://schemas.openxmlformats.org/drawingml/2006/main"/>
           <a:p xmlns:a="http://schemas.openxmlformats.org/drawingml/2006/main">
             <a:pPr algn="l">
+              <a:buNone/>
               <a:defRPr sz="1800">
                 <a:latin typeface="IBM Plex Sans"/>
                 <a:ea typeface="IBM Plex Sans"/>
@@ -20873,6 +20716,7 @@
           <a:lstStyle xmlns:a="http://schemas.openxmlformats.org/drawingml/2006/main"/>
           <a:p xmlns:a="http://schemas.openxmlformats.org/drawingml/2006/main">
             <a:pPr algn="l">
+              <a:buNone/>
               <a:defRPr sz="1800">
                 <a:latin typeface="IBM Plex Sans"/>
                 <a:ea typeface="IBM Plex Sans"/>
@@ -20927,6 +20771,7 @@
           <a:lstStyle xmlns:a="http://schemas.openxmlformats.org/drawingml/2006/main"/>
           <a:p xmlns:a="http://schemas.openxmlformats.org/drawingml/2006/main">
             <a:pPr algn="l">
+              <a:buNone/>
               <a:defRPr sz="1800">
                 <a:latin typeface="IBM Plex Sans"/>
                 <a:ea typeface="IBM Plex Sans"/>
@@ -20981,6 +20826,7 @@
           <a:lstStyle xmlns:a="http://schemas.openxmlformats.org/drawingml/2006/main"/>
           <a:p xmlns:a="http://schemas.openxmlformats.org/drawingml/2006/main">
             <a:pPr algn="l">
+              <a:buNone/>
               <a:defRPr sz="3300">
                 <a:latin typeface="IBM Plex Mono"/>
                 <a:ea typeface="IBM Plex Mono"/>
@@ -21035,6 +20881,7 @@
           <a:lstStyle xmlns:a="http://schemas.openxmlformats.org/drawingml/2006/main"/>
           <a:p xmlns:a="http://schemas.openxmlformats.org/drawingml/2006/main">
             <a:pPr algn="l">
+              <a:buNone/>
               <a:defRPr sz="2100">
                 <a:latin typeface="IBM Plex Sans"/>
                 <a:ea typeface="IBM Plex Sans"/>
@@ -21089,6 +20936,7 @@
           <a:lstStyle xmlns:a="http://schemas.openxmlformats.org/drawingml/2006/main"/>
           <a:p xmlns:a="http://schemas.openxmlformats.org/drawingml/2006/main">
             <a:pPr algn="l">
+              <a:buNone/>
               <a:defRPr sz="1800">
                 <a:latin typeface="IBM Plex Sans"/>
                 <a:ea typeface="IBM Plex Sans"/>
@@ -21143,6 +20991,7 @@
           <a:lstStyle xmlns:a="http://schemas.openxmlformats.org/drawingml/2006/main"/>
           <a:p xmlns:a="http://schemas.openxmlformats.org/drawingml/2006/main">
             <a:pPr algn="l">
+              <a:buNone/>
               <a:defRPr sz="1800">
                 <a:latin typeface="IBM Plex Sans"/>
                 <a:ea typeface="IBM Plex Sans"/>
@@ -21197,6 +21046,7 @@
           <a:lstStyle xmlns:a="http://schemas.openxmlformats.org/drawingml/2006/main"/>
           <a:p xmlns:a="http://schemas.openxmlformats.org/drawingml/2006/main">
             <a:pPr algn="l">
+              <a:buNone/>
               <a:defRPr sz="1800">
                 <a:latin typeface="IBM Plex Sans"/>
                 <a:ea typeface="IBM Plex Sans"/>
@@ -21251,6 +21101,7 @@
           <a:lstStyle xmlns:a="http://schemas.openxmlformats.org/drawingml/2006/main"/>
           <a:p xmlns:a="http://schemas.openxmlformats.org/drawingml/2006/main">
             <a:pPr algn="l">
+              <a:buNone/>
               <a:defRPr sz="3300">
                 <a:latin typeface="IBM Plex Mono"/>
                 <a:ea typeface="IBM Plex Mono"/>
@@ -21305,6 +21156,7 @@
           <a:lstStyle xmlns:a="http://schemas.openxmlformats.org/drawingml/2006/main"/>
           <a:p xmlns:a="http://schemas.openxmlformats.org/drawingml/2006/main">
             <a:pPr algn="l">
+              <a:buNone/>
               <a:defRPr sz="2100">
                 <a:latin typeface="IBM Plex Sans"/>
                 <a:ea typeface="IBM Plex Sans"/>
@@ -21359,6 +21211,7 @@
           <a:lstStyle xmlns:a="http://schemas.openxmlformats.org/drawingml/2006/main"/>
           <a:p xmlns:a="http://schemas.openxmlformats.org/drawingml/2006/main">
             <a:pPr algn="l">
+              <a:buNone/>
               <a:defRPr sz="1800">
                 <a:latin typeface="IBM Plex Sans"/>
                 <a:ea typeface="IBM Plex Sans"/>
@@ -21374,7 +21227,7 @@
                 <a:ea typeface="IBM Plex Sans"/>
                 <a:cs typeface="IBM Plex Sans"/>
               </a:rPr>
-              <a:t>Контролне тачке, P1–P4 и </a:t>
+              <a:t>Контролне тачке, КТ1–КТ2 и </a:t>
             </a:r>
           </a:p>
         </p:txBody>
@@ -21413,6 +21266,7 @@
           <a:lstStyle xmlns:a="http://schemas.openxmlformats.org/drawingml/2006/main"/>
           <a:p xmlns:a="http://schemas.openxmlformats.org/drawingml/2006/main">
             <a:pPr algn="l">
+              <a:buNone/>
               <a:defRPr sz="1800">
                 <a:latin typeface="IBM Plex Sans"/>
                 <a:ea typeface="IBM Plex Sans"/>
@@ -21467,6 +21321,7 @@
           <a:lstStyle xmlns:a="http://schemas.openxmlformats.org/drawingml/2006/main"/>
           <a:p xmlns:a="http://schemas.openxmlformats.org/drawingml/2006/main">
             <a:pPr algn="l">
+              <a:buNone/>
               <a:defRPr sz="1800">
                 <a:latin typeface="IBM Plex Sans"/>
                 <a:ea typeface="IBM Plex Sans"/>
@@ -21521,6 +21376,7 @@
           <a:lstStyle xmlns:a="http://schemas.openxmlformats.org/drawingml/2006/main"/>
           <a:p xmlns:a="http://schemas.openxmlformats.org/drawingml/2006/main">
             <a:pPr algn="l">
+              <a:buNone/>
               <a:defRPr sz="3300">
                 <a:latin typeface="IBM Plex Mono"/>
                 <a:ea typeface="IBM Plex Mono"/>
@@ -21575,6 +21431,7 @@
           <a:lstStyle xmlns:a="http://schemas.openxmlformats.org/drawingml/2006/main"/>
           <a:p xmlns:a="http://schemas.openxmlformats.org/drawingml/2006/main">
             <a:pPr algn="l">
+              <a:buNone/>
               <a:defRPr sz="2100">
                 <a:latin typeface="IBM Plex Sans"/>
                 <a:ea typeface="IBM Plex Sans"/>
@@ -21629,6 +21486,7 @@
           <a:lstStyle xmlns:a="http://schemas.openxmlformats.org/drawingml/2006/main"/>
           <a:p xmlns:a="http://schemas.openxmlformats.org/drawingml/2006/main">
             <a:pPr algn="l">
+              <a:buNone/>
               <a:defRPr sz="1800">
                 <a:latin typeface="IBM Plex Sans"/>
                 <a:ea typeface="IBM Plex Sans"/>
@@ -21683,6 +21541,7 @@
           <a:lstStyle xmlns:a="http://schemas.openxmlformats.org/drawingml/2006/main"/>
           <a:p xmlns:a="http://schemas.openxmlformats.org/drawingml/2006/main">
             <a:pPr algn="l">
+              <a:buNone/>
               <a:defRPr sz="1800">
                 <a:latin typeface="IBM Plex Sans"/>
                 <a:ea typeface="IBM Plex Sans"/>
@@ -21737,6 +21596,7 @@
           <a:lstStyle xmlns:a="http://schemas.openxmlformats.org/drawingml/2006/main"/>
           <a:p xmlns:a="http://schemas.openxmlformats.org/drawingml/2006/main">
             <a:pPr algn="l">
+              <a:buNone/>
               <a:defRPr sz="1800">
                 <a:latin typeface="IBM Plex Sans"/>
                 <a:ea typeface="IBM Plex Sans"/>
@@ -21791,6 +21651,7 @@
           <a:lstStyle xmlns:a="http://schemas.openxmlformats.org/drawingml/2006/main"/>
           <a:p xmlns:a="http://schemas.openxmlformats.org/drawingml/2006/main">
             <a:pPr algn="l">
+              <a:buNone/>
               <a:defRPr sz="1800">
                 <a:latin typeface="IBM Plex Mono"/>
                 <a:ea typeface="IBM Plex Mono"/>
@@ -21845,6 +21706,7 @@
           <a:lstStyle xmlns:a="http://schemas.openxmlformats.org/drawingml/2006/main"/>
           <a:p xmlns:a="http://schemas.openxmlformats.org/drawingml/2006/main">
             <a:pPr algn="l">
+              <a:buNone/>
               <a:defRPr sz="2100">
                 <a:latin typeface="IBM Plex Sans"/>
                 <a:ea typeface="IBM Plex Sans"/>
@@ -21899,6 +21761,7 @@
           <a:lstStyle xmlns:a="http://schemas.openxmlformats.org/drawingml/2006/main"/>
           <a:p xmlns:a="http://schemas.openxmlformats.org/drawingml/2006/main">
             <a:pPr algn="l">
+              <a:buNone/>
               <a:defRPr sz="1800">
                 <a:latin typeface="IBM Plex Sans"/>
                 <a:ea typeface="IBM Plex Sans"/>
@@ -21953,6 +21816,7 @@
           <a:lstStyle xmlns:a="http://schemas.openxmlformats.org/drawingml/2006/main"/>
           <a:p xmlns:a="http://schemas.openxmlformats.org/drawingml/2006/main">
             <a:pPr algn="l">
+              <a:buNone/>
               <a:defRPr sz="1800">
                 <a:latin typeface="IBM Plex Mono"/>
                 <a:ea typeface="IBM Plex Mono"/>
